--- a/presentations/technical_presentation.pptx
+++ b/presentations/technical_presentation.pptx
@@ -4515,7 +4515,7 @@
               </a:defRPr>
             </a:pPr>
             <a:r>
-              <a:t>•  No live alert is defined. SLA references are inherited project assumptions, not verified policy.</a:t>
+              <a:t>•  No live alert is defined. SLA references are project-configured assumptions, not verified policy.</a:t>
             </a:r>
           </a:p>
         </p:txBody>

--- a/presentations/technical_presentation.pptx
+++ b/presentations/technical_presentation.pptx
@@ -5,20 +5,20 @@
     <p:sldMasterId id="2147483648" r:id="rId1"/>
   </p:sldMasterIdLst>
   <p:sldIdLst>
-    <p:sldId id="256" r:id="rId7"/>
-    <p:sldId id="257" r:id="rId8"/>
-    <p:sldId id="258" r:id="rId9"/>
-    <p:sldId id="259" r:id="rId10"/>
-    <p:sldId id="260" r:id="rId11"/>
-    <p:sldId id="261" r:id="rId12"/>
-    <p:sldId id="262" r:id="rId13"/>
-    <p:sldId id="263" r:id="rId14"/>
-    <p:sldId id="264" r:id="rId15"/>
-    <p:sldId id="265" r:id="rId16"/>
-    <p:sldId id="266" r:id="rId17"/>
-    <p:sldId id="267" r:id="rId18"/>
+    <p:sldId id="256" r:id="rId2"/>
+    <p:sldId id="257" r:id="rId3"/>
+    <p:sldId id="258" r:id="rId4"/>
+    <p:sldId id="259" r:id="rId5"/>
+    <p:sldId id="260" r:id="rId6"/>
+    <p:sldId id="261" r:id="rId7"/>
+    <p:sldId id="262" r:id="rId8"/>
+    <p:sldId id="263" r:id="rId9"/>
+    <p:sldId id="264" r:id="rId10"/>
+    <p:sldId id="265" r:id="rId11"/>
+    <p:sldId id="266" r:id="rId12"/>
+    <p:sldId id="267" r:id="rId13"/>
   </p:sldIdLst>
-  <p:sldSz cx="12191695" cy="6858000" type="screen4x3"/>
+  <p:sldSz cx="12192000" cy="6858000"/>
   <p:notesSz cx="6858000" cy="9144000"/>
   <p:defaultTextStyle>
     <a:defPPr>
@@ -115,6 +115,22 @@
       </a:defRPr>
     </a:lvl9pPr>
   </p:defaultTextStyle>
+  <p:extLst>
+    <p:ext uri="{EFAFB233-063F-42B5-8137-9DF3F51BA10A}">
+      <p15:sldGuideLst xmlns:p15="http://schemas.microsoft.com/office/powerpoint/2012/main">
+        <p15:guide id="1" orient="horz" pos="2160">
+          <p15:clr>
+            <a:srgbClr val="A4A3A4"/>
+          </p15:clr>
+        </p15:guide>
+        <p15:guide id="2" pos="2880">
+          <p15:clr>
+            <a:srgbClr val="A4A3A4"/>
+          </p15:clr>
+        </p15:guide>
+      </p15:sldGuideLst>
+    </p:ext>
+  </p:extLst>
 </p:presentation>
 </file>
 
@@ -156,10 +172,9 @@
           <a:lstStyle/>
           <a:p>
             <a:r>
-              <a:rPr lang="en-US" smtClean="0"/>
+              <a:rPr lang="en-US"/>
               <a:t>Click to edit Master title style</a:t>
             </a:r>
-            <a:endParaRPr lang="en-US"/>
           </a:p>
         </p:txBody>
       </p:sp>
@@ -275,10 +290,9 @@
           </a:lstStyle>
           <a:p>
             <a:r>
-              <a:rPr lang="en-US" smtClean="0"/>
+              <a:rPr lang="en-US"/>
               <a:t>Click to edit Master subtitle style</a:t>
             </a:r>
-            <a:endParaRPr lang="en-US"/>
           </a:p>
         </p:txBody>
       </p:sp>
@@ -299,7 +313,7 @@
           <a:p>
             <a:fld id="{5BCAD085-E8A6-8845-BD4E-CB4CCA059FC4}" type="datetimeFigureOut">
               <a:rPr lang="en-US" smtClean="0"/>
-              <a:t>1/27/13</a:t>
+              <a:t>10/2/2026</a:t>
             </a:fld>
             <a:endParaRPr lang="en-US"/>
           </a:p>
@@ -393,10 +407,9 @@
           <a:lstStyle/>
           <a:p>
             <a:r>
-              <a:rPr lang="en-US" smtClean="0"/>
+              <a:rPr lang="en-US"/>
               <a:t>Click to edit Master title style</a:t>
             </a:r>
-            <a:endParaRPr lang="en-US"/>
           </a:p>
         </p:txBody>
       </p:sp>
@@ -417,38 +430,37 @@
           <a:p>
             <a:pPr lvl="0"/>
             <a:r>
-              <a:rPr lang="en-US" smtClean="0"/>
+              <a:rPr lang="en-US"/>
               <a:t>Click to edit Master text styles</a:t>
             </a:r>
           </a:p>
           <a:p>
             <a:pPr lvl="1"/>
             <a:r>
-              <a:rPr lang="en-US" smtClean="0"/>
+              <a:rPr lang="en-US"/>
               <a:t>Second level</a:t>
             </a:r>
           </a:p>
           <a:p>
             <a:pPr lvl="2"/>
             <a:r>
-              <a:rPr lang="en-US" smtClean="0"/>
+              <a:rPr lang="en-US"/>
               <a:t>Third level</a:t>
             </a:r>
           </a:p>
           <a:p>
             <a:pPr lvl="3"/>
             <a:r>
-              <a:rPr lang="en-US" smtClean="0"/>
+              <a:rPr lang="en-US"/>
               <a:t>Fourth level</a:t>
             </a:r>
           </a:p>
           <a:p>
             <a:pPr lvl="4"/>
             <a:r>
-              <a:rPr lang="en-US" smtClean="0"/>
+              <a:rPr lang="en-US"/>
               <a:t>Fifth level</a:t>
             </a:r>
-            <a:endParaRPr lang="en-US"/>
           </a:p>
         </p:txBody>
       </p:sp>
@@ -469,7 +481,7 @@
           <a:p>
             <a:fld id="{5BCAD085-E8A6-8845-BD4E-CB4CCA059FC4}" type="datetimeFigureOut">
               <a:rPr lang="en-US" smtClean="0"/>
-              <a:t>1/27/13</a:t>
+              <a:t>10/2/2026</a:t>
             </a:fld>
             <a:endParaRPr lang="en-US"/>
           </a:p>
@@ -568,10 +580,9 @@
           <a:lstStyle/>
           <a:p>
             <a:r>
-              <a:rPr lang="en-US" smtClean="0"/>
+              <a:rPr lang="en-US"/>
               <a:t>Click to edit Master title style</a:t>
             </a:r>
-            <a:endParaRPr lang="en-US"/>
           </a:p>
         </p:txBody>
       </p:sp>
@@ -597,38 +608,37 @@
           <a:p>
             <a:pPr lvl="0"/>
             <a:r>
-              <a:rPr lang="en-US" smtClean="0"/>
+              <a:rPr lang="en-US"/>
               <a:t>Click to edit Master text styles</a:t>
             </a:r>
           </a:p>
           <a:p>
             <a:pPr lvl="1"/>
             <a:r>
-              <a:rPr lang="en-US" smtClean="0"/>
+              <a:rPr lang="en-US"/>
               <a:t>Second level</a:t>
             </a:r>
           </a:p>
           <a:p>
             <a:pPr lvl="2"/>
             <a:r>
-              <a:rPr lang="en-US" smtClean="0"/>
+              <a:rPr lang="en-US"/>
               <a:t>Third level</a:t>
             </a:r>
           </a:p>
           <a:p>
             <a:pPr lvl="3"/>
             <a:r>
-              <a:rPr lang="en-US" smtClean="0"/>
+              <a:rPr lang="en-US"/>
               <a:t>Fourth level</a:t>
             </a:r>
           </a:p>
           <a:p>
             <a:pPr lvl="4"/>
             <a:r>
-              <a:rPr lang="en-US" smtClean="0"/>
+              <a:rPr lang="en-US"/>
               <a:t>Fifth level</a:t>
             </a:r>
-            <a:endParaRPr lang="en-US"/>
           </a:p>
         </p:txBody>
       </p:sp>
@@ -649,7 +659,7 @@
           <a:p>
             <a:fld id="{5BCAD085-E8A6-8845-BD4E-CB4CCA059FC4}" type="datetimeFigureOut">
               <a:rPr lang="en-US" smtClean="0"/>
-              <a:t>1/27/13</a:t>
+              <a:t>10/2/2026</a:t>
             </a:fld>
             <a:endParaRPr lang="en-US"/>
           </a:p>
@@ -743,10 +753,9 @@
           <a:lstStyle/>
           <a:p>
             <a:r>
-              <a:rPr lang="en-US" smtClean="0"/>
+              <a:rPr lang="en-US"/>
               <a:t>Click to edit Master title style</a:t>
             </a:r>
-            <a:endParaRPr lang="en-US"/>
           </a:p>
         </p:txBody>
       </p:sp>
@@ -767,38 +776,37 @@
           <a:p>
             <a:pPr lvl="0"/>
             <a:r>
-              <a:rPr lang="en-US" smtClean="0"/>
+              <a:rPr lang="en-US"/>
               <a:t>Click to edit Master text styles</a:t>
             </a:r>
           </a:p>
           <a:p>
             <a:pPr lvl="1"/>
             <a:r>
-              <a:rPr lang="en-US" smtClean="0"/>
+              <a:rPr lang="en-US"/>
               <a:t>Second level</a:t>
             </a:r>
           </a:p>
           <a:p>
             <a:pPr lvl="2"/>
             <a:r>
-              <a:rPr lang="en-US" smtClean="0"/>
+              <a:rPr lang="en-US"/>
               <a:t>Third level</a:t>
             </a:r>
           </a:p>
           <a:p>
             <a:pPr lvl="3"/>
             <a:r>
-              <a:rPr lang="en-US" smtClean="0"/>
+              <a:rPr lang="en-US"/>
               <a:t>Fourth level</a:t>
             </a:r>
           </a:p>
           <a:p>
             <a:pPr lvl="4"/>
             <a:r>
-              <a:rPr lang="en-US" smtClean="0"/>
+              <a:rPr lang="en-US"/>
               <a:t>Fifth level</a:t>
             </a:r>
-            <a:endParaRPr lang="en-US"/>
           </a:p>
         </p:txBody>
       </p:sp>
@@ -819,7 +827,7 @@
           <a:p>
             <a:fld id="{5BCAD085-E8A6-8845-BD4E-CB4CCA059FC4}" type="datetimeFigureOut">
               <a:rPr lang="en-US" smtClean="0"/>
-              <a:t>1/27/13</a:t>
+              <a:t>10/2/2026</a:t>
             </a:fld>
             <a:endParaRPr lang="en-US"/>
           </a:p>
@@ -922,10 +930,9 @@
           </a:lstStyle>
           <a:p>
             <a:r>
-              <a:rPr lang="en-US" smtClean="0"/>
+              <a:rPr lang="en-US"/>
               <a:t>Click to edit Master title style</a:t>
             </a:r>
-            <a:endParaRPr lang="en-US"/>
           </a:p>
         </p:txBody>
       </p:sp>
@@ -1042,7 +1049,7 @@
           <a:p>
             <a:pPr lvl="0"/>
             <a:r>
-              <a:rPr lang="en-US" smtClean="0"/>
+              <a:rPr lang="en-US"/>
               <a:t>Click to edit Master text styles</a:t>
             </a:r>
           </a:p>
@@ -1065,7 +1072,7 @@
           <a:p>
             <a:fld id="{5BCAD085-E8A6-8845-BD4E-CB4CCA059FC4}" type="datetimeFigureOut">
               <a:rPr lang="en-US" smtClean="0"/>
-              <a:t>1/27/13</a:t>
+              <a:t>10/2/2026</a:t>
             </a:fld>
             <a:endParaRPr lang="en-US"/>
           </a:p>
@@ -1159,10 +1166,9 @@
           <a:lstStyle/>
           <a:p>
             <a:r>
-              <a:rPr lang="en-US" smtClean="0"/>
+              <a:rPr lang="en-US"/>
               <a:t>Click to edit Master title style</a:t>
             </a:r>
-            <a:endParaRPr lang="en-US"/>
           </a:p>
         </p:txBody>
       </p:sp>
@@ -1216,38 +1222,37 @@
           <a:p>
             <a:pPr lvl="0"/>
             <a:r>
-              <a:rPr lang="en-US" smtClean="0"/>
+              <a:rPr lang="en-US"/>
               <a:t>Click to edit Master text styles</a:t>
             </a:r>
           </a:p>
           <a:p>
             <a:pPr lvl="1"/>
             <a:r>
-              <a:rPr lang="en-US" smtClean="0"/>
+              <a:rPr lang="en-US"/>
               <a:t>Second level</a:t>
             </a:r>
           </a:p>
           <a:p>
             <a:pPr lvl="2"/>
             <a:r>
-              <a:rPr lang="en-US" smtClean="0"/>
+              <a:rPr lang="en-US"/>
               <a:t>Third level</a:t>
             </a:r>
           </a:p>
           <a:p>
             <a:pPr lvl="3"/>
             <a:r>
-              <a:rPr lang="en-US" smtClean="0"/>
+              <a:rPr lang="en-US"/>
               <a:t>Fourth level</a:t>
             </a:r>
           </a:p>
           <a:p>
             <a:pPr lvl="4"/>
             <a:r>
-              <a:rPr lang="en-US" smtClean="0"/>
+              <a:rPr lang="en-US"/>
               <a:t>Fifth level</a:t>
             </a:r>
-            <a:endParaRPr lang="en-US"/>
           </a:p>
         </p:txBody>
       </p:sp>
@@ -1301,38 +1306,37 @@
           <a:p>
             <a:pPr lvl="0"/>
             <a:r>
-              <a:rPr lang="en-US" smtClean="0"/>
+              <a:rPr lang="en-US"/>
               <a:t>Click to edit Master text styles</a:t>
             </a:r>
           </a:p>
           <a:p>
             <a:pPr lvl="1"/>
             <a:r>
-              <a:rPr lang="en-US" smtClean="0"/>
+              <a:rPr lang="en-US"/>
               <a:t>Second level</a:t>
             </a:r>
           </a:p>
           <a:p>
             <a:pPr lvl="2"/>
             <a:r>
-              <a:rPr lang="en-US" smtClean="0"/>
+              <a:rPr lang="en-US"/>
               <a:t>Third level</a:t>
             </a:r>
           </a:p>
           <a:p>
             <a:pPr lvl="3"/>
             <a:r>
-              <a:rPr lang="en-US" smtClean="0"/>
+              <a:rPr lang="en-US"/>
               <a:t>Fourth level</a:t>
             </a:r>
           </a:p>
           <a:p>
             <a:pPr lvl="4"/>
             <a:r>
-              <a:rPr lang="en-US" smtClean="0"/>
+              <a:rPr lang="en-US"/>
               <a:t>Fifth level</a:t>
             </a:r>
-            <a:endParaRPr lang="en-US"/>
           </a:p>
         </p:txBody>
       </p:sp>
@@ -1353,7 +1357,7 @@
           <a:p>
             <a:fld id="{5BCAD085-E8A6-8845-BD4E-CB4CCA059FC4}" type="datetimeFigureOut">
               <a:rPr lang="en-US" smtClean="0"/>
-              <a:t>1/27/13</a:t>
+              <a:t>10/2/2026</a:t>
             </a:fld>
             <a:endParaRPr lang="en-US"/>
           </a:p>
@@ -1451,10 +1455,9 @@
           </a:lstStyle>
           <a:p>
             <a:r>
-              <a:rPr lang="en-US" smtClean="0"/>
+              <a:rPr lang="en-US"/>
               <a:t>Click to edit Master title style</a:t>
             </a:r>
-            <a:endParaRPr lang="en-US"/>
           </a:p>
         </p:txBody>
       </p:sp>
@@ -1517,7 +1520,7 @@
           <a:p>
             <a:pPr lvl="0"/>
             <a:r>
-              <a:rPr lang="en-US" smtClean="0"/>
+              <a:rPr lang="en-US"/>
               <a:t>Click to edit Master text styles</a:t>
             </a:r>
           </a:p>
@@ -1573,38 +1576,37 @@
           <a:p>
             <a:pPr lvl="0"/>
             <a:r>
-              <a:rPr lang="en-US" smtClean="0"/>
+              <a:rPr lang="en-US"/>
               <a:t>Click to edit Master text styles</a:t>
             </a:r>
           </a:p>
           <a:p>
             <a:pPr lvl="1"/>
             <a:r>
-              <a:rPr lang="en-US" smtClean="0"/>
+              <a:rPr lang="en-US"/>
               <a:t>Second level</a:t>
             </a:r>
           </a:p>
           <a:p>
             <a:pPr lvl="2"/>
             <a:r>
-              <a:rPr lang="en-US" smtClean="0"/>
+              <a:rPr lang="en-US"/>
               <a:t>Third level</a:t>
             </a:r>
           </a:p>
           <a:p>
             <a:pPr lvl="3"/>
             <a:r>
-              <a:rPr lang="en-US" smtClean="0"/>
+              <a:rPr lang="en-US"/>
               <a:t>Fourth level</a:t>
             </a:r>
           </a:p>
           <a:p>
             <a:pPr lvl="4"/>
             <a:r>
-              <a:rPr lang="en-US" smtClean="0"/>
+              <a:rPr lang="en-US"/>
               <a:t>Fifth level</a:t>
             </a:r>
-            <a:endParaRPr lang="en-US"/>
           </a:p>
         </p:txBody>
       </p:sp>
@@ -1667,7 +1669,7 @@
           <a:p>
             <a:pPr lvl="0"/>
             <a:r>
-              <a:rPr lang="en-US" smtClean="0"/>
+              <a:rPr lang="en-US"/>
               <a:t>Click to edit Master text styles</a:t>
             </a:r>
           </a:p>
@@ -1723,38 +1725,37 @@
           <a:p>
             <a:pPr lvl="0"/>
             <a:r>
-              <a:rPr lang="en-US" smtClean="0"/>
+              <a:rPr lang="en-US"/>
               <a:t>Click to edit Master text styles</a:t>
             </a:r>
           </a:p>
           <a:p>
             <a:pPr lvl="1"/>
             <a:r>
-              <a:rPr lang="en-US" smtClean="0"/>
+              <a:rPr lang="en-US"/>
               <a:t>Second level</a:t>
             </a:r>
           </a:p>
           <a:p>
             <a:pPr lvl="2"/>
             <a:r>
-              <a:rPr lang="en-US" smtClean="0"/>
+              <a:rPr lang="en-US"/>
               <a:t>Third level</a:t>
             </a:r>
           </a:p>
           <a:p>
             <a:pPr lvl="3"/>
             <a:r>
-              <a:rPr lang="en-US" smtClean="0"/>
+              <a:rPr lang="en-US"/>
               <a:t>Fourth level</a:t>
             </a:r>
           </a:p>
           <a:p>
             <a:pPr lvl="4"/>
             <a:r>
-              <a:rPr lang="en-US" smtClean="0"/>
+              <a:rPr lang="en-US"/>
               <a:t>Fifth level</a:t>
             </a:r>
-            <a:endParaRPr lang="en-US"/>
           </a:p>
         </p:txBody>
       </p:sp>
@@ -1775,7 +1776,7 @@
           <a:p>
             <a:fld id="{5BCAD085-E8A6-8845-BD4E-CB4CCA059FC4}" type="datetimeFigureOut">
               <a:rPr lang="en-US" smtClean="0"/>
-              <a:t>1/27/13</a:t>
+              <a:t>10/2/2026</a:t>
             </a:fld>
             <a:endParaRPr lang="en-US"/>
           </a:p>
@@ -1869,10 +1870,9 @@
           <a:lstStyle/>
           <a:p>
             <a:r>
-              <a:rPr lang="en-US" smtClean="0"/>
+              <a:rPr lang="en-US"/>
               <a:t>Click to edit Master title style</a:t>
             </a:r>
-            <a:endParaRPr lang="en-US"/>
           </a:p>
         </p:txBody>
       </p:sp>
@@ -1893,7 +1893,7 @@
           <a:p>
             <a:fld id="{5BCAD085-E8A6-8845-BD4E-CB4CCA059FC4}" type="datetimeFigureOut">
               <a:rPr lang="en-US" smtClean="0"/>
-              <a:t>1/27/13</a:t>
+              <a:t>10/2/2026</a:t>
             </a:fld>
             <a:endParaRPr lang="en-US"/>
           </a:p>
@@ -1988,7 +1988,7 @@
           <a:p>
             <a:fld id="{5BCAD085-E8A6-8845-BD4E-CB4CCA059FC4}" type="datetimeFigureOut">
               <a:rPr lang="en-US" smtClean="0"/>
-              <a:t>1/27/13</a:t>
+              <a:t>10/2/2026</a:t>
             </a:fld>
             <a:endParaRPr lang="en-US"/>
           </a:p>
@@ -2091,10 +2091,9 @@
           </a:lstStyle>
           <a:p>
             <a:r>
-              <a:rPr lang="en-US" smtClean="0"/>
+              <a:rPr lang="en-US"/>
               <a:t>Click to edit Master title style</a:t>
             </a:r>
-            <a:endParaRPr lang="en-US"/>
           </a:p>
         </p:txBody>
       </p:sp>
@@ -2148,38 +2147,37 @@
           <a:p>
             <a:pPr lvl="0"/>
             <a:r>
-              <a:rPr lang="en-US" smtClean="0"/>
+              <a:rPr lang="en-US"/>
               <a:t>Click to edit Master text styles</a:t>
             </a:r>
           </a:p>
           <a:p>
             <a:pPr lvl="1"/>
             <a:r>
-              <a:rPr lang="en-US" smtClean="0"/>
+              <a:rPr lang="en-US"/>
               <a:t>Second level</a:t>
             </a:r>
           </a:p>
           <a:p>
             <a:pPr lvl="2"/>
             <a:r>
-              <a:rPr lang="en-US" smtClean="0"/>
+              <a:rPr lang="en-US"/>
               <a:t>Third level</a:t>
             </a:r>
           </a:p>
           <a:p>
             <a:pPr lvl="3"/>
             <a:r>
-              <a:rPr lang="en-US" smtClean="0"/>
+              <a:rPr lang="en-US"/>
               <a:t>Fourth level</a:t>
             </a:r>
           </a:p>
           <a:p>
             <a:pPr lvl="4"/>
             <a:r>
-              <a:rPr lang="en-US" smtClean="0"/>
+              <a:rPr lang="en-US"/>
               <a:t>Fifth level</a:t>
             </a:r>
-            <a:endParaRPr lang="en-US"/>
           </a:p>
         </p:txBody>
       </p:sp>
@@ -2242,7 +2240,7 @@
           <a:p>
             <a:pPr lvl="0"/>
             <a:r>
-              <a:rPr lang="en-US" smtClean="0"/>
+              <a:rPr lang="en-US"/>
               <a:t>Click to edit Master text styles</a:t>
             </a:r>
           </a:p>
@@ -2265,7 +2263,7 @@
           <a:p>
             <a:fld id="{5BCAD085-E8A6-8845-BD4E-CB4CCA059FC4}" type="datetimeFigureOut">
               <a:rPr lang="en-US" smtClean="0"/>
-              <a:t>1/27/13</a:t>
+              <a:t>10/2/2026</a:t>
             </a:fld>
             <a:endParaRPr lang="en-US"/>
           </a:p>
@@ -2368,10 +2366,9 @@
           </a:lstStyle>
           <a:p>
             <a:r>
-              <a:rPr lang="en-US" smtClean="0"/>
+              <a:rPr lang="en-US"/>
               <a:t>Click to edit Master title style</a:t>
             </a:r>
-            <a:endParaRPr lang="en-US"/>
           </a:p>
         </p:txBody>
       </p:sp>
@@ -2495,7 +2492,7 @@
           <a:p>
             <a:pPr lvl="0"/>
             <a:r>
-              <a:rPr lang="en-US" smtClean="0"/>
+              <a:rPr lang="en-US"/>
               <a:t>Click to edit Master text styles</a:t>
             </a:r>
           </a:p>
@@ -2518,7 +2515,7 @@
           <a:p>
             <a:fld id="{5BCAD085-E8A6-8845-BD4E-CB4CCA059FC4}" type="datetimeFigureOut">
               <a:rPr lang="en-US" smtClean="0"/>
-              <a:t>1/27/13</a:t>
+              <a:t>10/2/2026</a:t>
             </a:fld>
             <a:endParaRPr lang="en-US"/>
           </a:p>
@@ -2627,10 +2624,9 @@
           <a:lstStyle/>
           <a:p>
             <a:r>
-              <a:rPr lang="en-US" smtClean="0"/>
+              <a:rPr lang="en-US"/>
               <a:t>Click to edit Master title style</a:t>
             </a:r>
-            <a:endParaRPr lang="en-US"/>
           </a:p>
         </p:txBody>
       </p:sp>
@@ -2661,38 +2657,37 @@
           <a:p>
             <a:pPr lvl="0"/>
             <a:r>
-              <a:rPr lang="en-US" smtClean="0"/>
+              <a:rPr lang="en-US"/>
               <a:t>Click to edit Master text styles</a:t>
             </a:r>
           </a:p>
           <a:p>
             <a:pPr lvl="1"/>
             <a:r>
-              <a:rPr lang="en-US" smtClean="0"/>
+              <a:rPr lang="en-US"/>
               <a:t>Second level</a:t>
             </a:r>
           </a:p>
           <a:p>
             <a:pPr lvl="2"/>
             <a:r>
-              <a:rPr lang="en-US" smtClean="0"/>
+              <a:rPr lang="en-US"/>
               <a:t>Third level</a:t>
             </a:r>
           </a:p>
           <a:p>
             <a:pPr lvl="3"/>
             <a:r>
-              <a:rPr lang="en-US" smtClean="0"/>
+              <a:rPr lang="en-US"/>
               <a:t>Fourth level</a:t>
             </a:r>
           </a:p>
           <a:p>
             <a:pPr lvl="4"/>
             <a:r>
-              <a:rPr lang="en-US" smtClean="0"/>
+              <a:rPr lang="en-US"/>
               <a:t>Fifth level</a:t>
             </a:r>
-            <a:endParaRPr lang="en-US"/>
           </a:p>
         </p:txBody>
       </p:sp>
@@ -2731,7 +2726,7 @@
           <a:p>
             <a:fld id="{5BCAD085-E8A6-8845-BD4E-CB4CCA059FC4}" type="datetimeFigureOut">
               <a:rPr lang="en-US" smtClean="0"/>
-              <a:t>1/27/13</a:t>
+              <a:t>10/2/2026</a:t>
             </a:fld>
             <a:endParaRPr lang="en-US"/>
           </a:p>
@@ -3090,7 +3085,7 @@
 </file>
 
 <file path=ppt/slides/slide1.xml><?xml version="1.0" encoding="utf-8"?>
-<p:sld xmlns:a="http://schemas.openxmlformats.org/drawingml/2006/main" xmlns:p="http://schemas.openxmlformats.org/presentationml/2006/main" xmlns:r="http://schemas.openxmlformats.org/officeDocument/2006/relationships">
+<p:sld xmlns:a="http://schemas.openxmlformats.org/drawingml/2006/main" xmlns:r="http://schemas.openxmlformats.org/officeDocument/2006/relationships" xmlns:p="http://schemas.openxmlformats.org/presentationml/2006/main">
   <p:cSld>
     <p:bg>
       <p:bgPr>
@@ -3106,56 +3101,24 @@
         <p:cNvGrpSpPr/>
         <p:nvPr/>
       </p:nvGrpSpPr>
-      <p:grpSpPr/>
-      <p:sp>
-        <p:nvSpPr>
-          <p:cNvPr id="2" name="TextBox 1"/>
-          <p:cNvSpPr txBox="1"/>
-          <p:nvPr/>
-        </p:nvSpPr>
-        <p:spPr>
-          <a:xfrm>
-            <a:off x="822960" y="2331720"/>
-            <a:ext cx="10515600" cy="1463040"/>
-          </a:xfrm>
-          <a:prstGeom prst="rect">
-            <a:avLst/>
-          </a:prstGeom>
-          <a:noFill/>
-        </p:spPr>
-        <p:txBody>
-          <a:bodyPr wrap="square">
-            <a:spAutoFit/>
-          </a:bodyPr>
-          <a:lstStyle/>
-          <a:p>
-            <a:pPr>
-              <a:lnSpc>
-                <a:spcPct val="125000"/>
-              </a:lnSpc>
-              <a:defRPr sz="4000" b="1">
-                <a:solidFill>
-                  <a:srgbClr val="FFFFFF"/>
-                </a:solidFill>
-                <a:latin typeface="DejaVu Sans"/>
-              </a:defRPr>
-            </a:pPr>
-            <a:r>
-              <a:t>Help Desk Ticket SLA and Volume Forecasting</a:t>
-            </a:r>
-          </a:p>
-        </p:txBody>
-      </p:sp>
-      <p:sp>
-        <p:nvSpPr>
-          <p:cNvPr id="3" name="Rectangle 2"/>
+      <p:grpSpPr>
+        <a:xfrm>
+          <a:off x="0" y="0"/>
+          <a:ext cx="0" cy="0"/>
+          <a:chOff x="0" y="0"/>
+          <a:chExt cx="0" cy="0"/>
+        </a:xfrm>
+      </p:grpSpPr>
+      <p:sp>
+        <p:nvSpPr>
+          <p:cNvPr id="10" name="Side Accent"/>
           <p:cNvSpPr/>
           <p:nvPr/>
         </p:nvSpPr>
         <p:spPr>
           <a:xfrm>
-            <a:off x="868680" y="2148840"/>
-            <a:ext cx="1463040" cy="73152"/>
+            <a:off x="0" y="0"/>
+            <a:ext cx="137160" cy="6858000"/>
           </a:xfrm>
           <a:prstGeom prst="rect">
             <a:avLst/>
@@ -3167,38 +3130,24 @@
             <a:noFill/>
           </a:ln>
         </p:spPr>
-        <p:style>
-          <a:lnRef idx="1">
-            <a:schemeClr val="accent1"/>
-          </a:lnRef>
-          <a:fillRef idx="3">
-            <a:schemeClr val="accent1"/>
-          </a:fillRef>
-          <a:effectRef idx="2">
-            <a:schemeClr val="accent1"/>
-          </a:effectRef>
-          <a:fontRef idx="minor">
-            <a:schemeClr val="lt1"/>
-          </a:fontRef>
-        </p:style>
-        <p:txBody>
-          <a:bodyPr rtlCol="0" anchor="ctr"/>
-          <a:lstStyle/>
-          <a:p>
-            <a:pPr algn="ctr"/>
-          </a:p>
-        </p:txBody>
-      </p:sp>
-      <p:sp>
-        <p:nvSpPr>
-          <p:cNvPr id="4" name="TextBox 3"/>
+        <p:txBody>
+          <a:bodyPr/>
+          <a:lstStyle/>
+          <a:p>
+            <a:endParaRPr lang="en-US"/>
+          </a:p>
+        </p:txBody>
+      </p:sp>
+      <p:sp>
+        <p:nvSpPr>
+          <p:cNvPr id="4" name="Eyebrow"/>
           <p:cNvSpPr txBox="1"/>
           <p:nvPr/>
         </p:nvSpPr>
         <p:spPr>
           <a:xfrm>
-            <a:off x="868680" y="3886200"/>
-            <a:ext cx="10058400" cy="2136140"/>
+            <a:off x="868680" y="960120"/>
+            <a:ext cx="10058400" cy="420000"/>
           </a:xfrm>
           <a:prstGeom prst="rect">
             <a:avLst/>
@@ -3207,64 +3156,531 @@
         </p:spPr>
         <p:txBody>
           <a:bodyPr wrap="square">
-            <a:spAutoFit/>
+            <a:normAutofit/>
           </a:bodyPr>
           <a:lstStyle/>
           <a:p>
             <a:pPr>
               <a:lnSpc>
-                <a:spcPct val="125000"/>
+                <a:spcPct val="100000"/>
               </a:lnSpc>
               <a:spcAft>
-                <a:spcPts val="1200"/>
+                <a:spcPts val="0"/>
               </a:spcAft>
-              <a:defRPr sz="2000">
-                <a:solidFill>
-                  <a:srgbClr val="D6E2ED"/>
-                </a:solidFill>
-                <a:latin typeface="DejaVu Sans"/>
-              </a:defRPr>
             </a:pPr>
             <a:r>
-              <a:t>Technical capstone: retrospective resolution/SLA-reference analysis</a:t>
-            </a:r>
-          </a:p>
+              <a:rPr lang="en-US" sz="1400" b="1" spc="200" dirty="0">
+                <a:solidFill>
+                  <a:srgbClr val="8CC4F2"/>
+                </a:solidFill>
+                <a:latin typeface="DejaVu Sans"/>
+              </a:rPr>
+              <a:t>HELP DESK ANALYTICS  |  TECHNICAL CAPSTONE</a:t>
+            </a:r>
+          </a:p>
+        </p:txBody>
+      </p:sp>
+      <p:sp>
+        <p:nvSpPr>
+          <p:cNvPr id="3" name="Rectangle 2"/>
+          <p:cNvSpPr/>
+          <p:nvPr/>
+        </p:nvSpPr>
+        <p:spPr>
+          <a:xfrm>
+            <a:off x="868680" y="1463040"/>
+            <a:ext cx="1463040" cy="73152"/>
+          </a:xfrm>
+          <a:prstGeom prst="rect">
+            <a:avLst/>
+          </a:prstGeom>
+          <a:solidFill>
+            <a:srgbClr val="3470A8"/>
+          </a:solidFill>
+          <a:ln>
+            <a:noFill/>
+          </a:ln>
+        </p:spPr>
+        <p:txBody>
+          <a:bodyPr/>
+          <a:lstStyle/>
+          <a:p>
+            <a:endParaRPr lang="en-US"/>
+          </a:p>
+        </p:txBody>
+      </p:sp>
+      <p:sp>
+        <p:nvSpPr>
+          <p:cNvPr id="2" name="TextBox 1"/>
+          <p:cNvSpPr txBox="1"/>
+          <p:nvPr/>
+        </p:nvSpPr>
+        <p:spPr>
+          <a:xfrm>
+            <a:off x="822960" y="1600200"/>
+            <a:ext cx="10515600" cy="1700000"/>
+          </a:xfrm>
+          <a:prstGeom prst="rect">
+            <a:avLst/>
+          </a:prstGeom>
+          <a:noFill/>
+        </p:spPr>
+        <p:txBody>
+          <a:bodyPr wrap="square">
+            <a:normAutofit/>
+          </a:bodyPr>
+          <a:lstStyle/>
           <a:p>
             <a:pPr>
               <a:lnSpc>
-                <a:spcPct val="125000"/>
+                <a:spcPct val="105000"/>
               </a:lnSpc>
               <a:spcAft>
-                <a:spcPts val="1200"/>
+                <a:spcPts val="0"/>
               </a:spcAft>
-              <a:defRPr sz="2000">
-                <a:solidFill>
-                  <a:srgbClr val="D6E2ED"/>
-                </a:solidFill>
-                <a:latin typeface="DejaVu Sans"/>
-              </a:defRPr>
             </a:pPr>
             <a:r>
-              <a:t>Core prediction: daily Ticket-arrival forecasts for the next week and month</a:t>
-            </a:r>
-          </a:p>
+              <a:rPr lang="en-US" sz="4400" b="1" dirty="0">
+                <a:solidFill>
+                  <a:srgbClr val="FFFFFF"/>
+                </a:solidFill>
+                <a:latin typeface="DejaVu Sans"/>
+              </a:rPr>
+              <a:t>Help Desk Ticket SLA and Volume Forecasting</a:t>
+            </a:r>
+          </a:p>
+        </p:txBody>
+      </p:sp>
+      <p:sp>
+        <p:nvSpPr>
+          <p:cNvPr id="20" name="Card 1"/>
+          <p:cNvSpPr/>
+          <p:nvPr/>
+        </p:nvSpPr>
+        <p:spPr>
+          <a:xfrm>
+            <a:off x="868680" y="3749040"/>
+            <a:ext cx="3291840" cy="1737360"/>
+          </a:xfrm>
+          <a:prstGeom prst="roundRect">
+            <a:avLst>
+              <a:gd name="adj" fmla="val 6000"/>
+            </a:avLst>
+          </a:prstGeom>
+          <a:solidFill>
+            <a:srgbClr val="284766"/>
+          </a:solidFill>
+          <a:ln>
+            <a:noFill/>
+          </a:ln>
+        </p:spPr>
+        <p:txBody>
+          <a:bodyPr/>
+          <a:lstStyle/>
+          <a:p>
+            <a:endParaRPr lang="en-US"/>
+          </a:p>
+        </p:txBody>
+      </p:sp>
+      <p:sp>
+        <p:nvSpPr>
+          <p:cNvPr id="21" name="Card 1 Accent"/>
+          <p:cNvSpPr/>
+          <p:nvPr/>
+        </p:nvSpPr>
+        <p:spPr>
+          <a:xfrm>
+            <a:off x="868680" y="3749040"/>
+            <a:ext cx="3291840" cy="64008"/>
+          </a:xfrm>
+          <a:prstGeom prst="rect">
+            <a:avLst/>
+          </a:prstGeom>
+          <a:solidFill>
+            <a:srgbClr val="8CC4F2"/>
+          </a:solidFill>
+          <a:ln>
+            <a:noFill/>
+          </a:ln>
+        </p:spPr>
+        <p:txBody>
+          <a:bodyPr/>
+          <a:lstStyle/>
+          <a:p>
+            <a:endParaRPr lang="en-US"/>
+          </a:p>
+        </p:txBody>
+      </p:sp>
+      <p:sp>
+        <p:nvSpPr>
+          <p:cNvPr id="22" name="Card 1 Text"/>
+          <p:cNvSpPr txBox="1"/>
+          <p:nvPr/>
+        </p:nvSpPr>
+        <p:spPr>
+          <a:xfrm>
+            <a:off x="868680" y="3813048"/>
+            <a:ext cx="3291840" cy="1673352"/>
+          </a:xfrm>
+          <a:prstGeom prst="rect">
+            <a:avLst/>
+          </a:prstGeom>
+          <a:noFill/>
+        </p:spPr>
+        <p:txBody>
+          <a:bodyPr wrap="square" lIns="228600" tIns="228600" rIns="228600" bIns="182880" anchor="t">
+            <a:normAutofit/>
+          </a:bodyPr>
+          <a:lstStyle/>
           <a:p>
             <a:pPr>
               <a:lnSpc>
-                <a:spcPct val="125000"/>
+                <a:spcPct val="100000"/>
               </a:lnSpc>
               <a:spcAft>
-                <a:spcPts val="1200"/>
+                <a:spcPts val="600"/>
               </a:spcAft>
-              <a:defRPr sz="2000">
-                <a:solidFill>
-                  <a:srgbClr val="D6E2ED"/>
-                </a:solidFill>
-                <a:latin typeface="DejaVu Sans"/>
-              </a:defRPr>
             </a:pPr>
             <a:r>
+              <a:rPr lang="en-US" sz="1200" b="1" spc="150" dirty="0">
+                <a:solidFill>
+                  <a:srgbClr val="8CC4F2"/>
+                </a:solidFill>
+                <a:latin typeface="DejaVu Sans"/>
+              </a:rPr>
+              <a:t>TECHNICAL CAPSTONE</a:t>
+            </a:r>
+          </a:p>
+          <a:p>
+            <a:pPr>
+              <a:lnSpc>
+                <a:spcPct val="115000"/>
+              </a:lnSpc>
+              <a:spcAft>
+                <a:spcPts val="0"/>
+              </a:spcAft>
+            </a:pPr>
+            <a:r>
+              <a:rPr lang="en-US" sz="1600" b="0" dirty="0">
+                <a:solidFill>
+                  <a:srgbClr val="FFFFFF"/>
+                </a:solidFill>
+                <a:latin typeface="DejaVu Sans"/>
+              </a:rPr>
+              <a:t>Retrospective resolution/SLA-reference analysis</a:t>
+            </a:r>
+          </a:p>
+        </p:txBody>
+      </p:sp>
+      <p:sp>
+        <p:nvSpPr>
+          <p:cNvPr id="23" name="Card 2"/>
+          <p:cNvSpPr/>
+          <p:nvPr/>
+        </p:nvSpPr>
+        <p:spPr>
+          <a:xfrm>
+            <a:off x="4389120" y="3749040"/>
+            <a:ext cx="3291840" cy="1737360"/>
+          </a:xfrm>
+          <a:prstGeom prst="roundRect">
+            <a:avLst>
+              <a:gd name="adj" fmla="val 6000"/>
+            </a:avLst>
+          </a:prstGeom>
+          <a:solidFill>
+            <a:srgbClr val="284766"/>
+          </a:solidFill>
+          <a:ln>
+            <a:noFill/>
+          </a:ln>
+        </p:spPr>
+        <p:txBody>
+          <a:bodyPr/>
+          <a:lstStyle/>
+          <a:p>
+            <a:endParaRPr lang="en-US"/>
+          </a:p>
+        </p:txBody>
+      </p:sp>
+      <p:sp>
+        <p:nvSpPr>
+          <p:cNvPr id="24" name="Card 2 Accent"/>
+          <p:cNvSpPr/>
+          <p:nvPr/>
+        </p:nvSpPr>
+        <p:spPr>
+          <a:xfrm>
+            <a:off x="4389120" y="3749040"/>
+            <a:ext cx="3291840" cy="64008"/>
+          </a:xfrm>
+          <a:prstGeom prst="rect">
+            <a:avLst/>
+          </a:prstGeom>
+          <a:solidFill>
+            <a:srgbClr val="8CC4F2"/>
+          </a:solidFill>
+          <a:ln>
+            <a:noFill/>
+          </a:ln>
+        </p:spPr>
+        <p:txBody>
+          <a:bodyPr/>
+          <a:lstStyle/>
+          <a:p>
+            <a:endParaRPr lang="en-US"/>
+          </a:p>
+        </p:txBody>
+      </p:sp>
+      <p:sp>
+        <p:nvSpPr>
+          <p:cNvPr id="25" name="Card 2 Text"/>
+          <p:cNvSpPr txBox="1"/>
+          <p:nvPr/>
+        </p:nvSpPr>
+        <p:spPr>
+          <a:xfrm>
+            <a:off x="4389120" y="3813048"/>
+            <a:ext cx="3291840" cy="1673352"/>
+          </a:xfrm>
+          <a:prstGeom prst="rect">
+            <a:avLst/>
+          </a:prstGeom>
+          <a:noFill/>
+        </p:spPr>
+        <p:txBody>
+          <a:bodyPr wrap="square" lIns="228600" tIns="228600" rIns="228600" bIns="182880" anchor="t">
+            <a:normAutofit/>
+          </a:bodyPr>
+          <a:lstStyle/>
+          <a:p>
+            <a:pPr>
+              <a:lnSpc>
+                <a:spcPct val="100000"/>
+              </a:lnSpc>
+              <a:spcAft>
+                <a:spcPts val="600"/>
+              </a:spcAft>
+            </a:pPr>
+            <a:r>
+              <a:rPr lang="en-US" sz="1200" b="1" spc="150" dirty="0">
+                <a:solidFill>
+                  <a:srgbClr val="8CC4F2"/>
+                </a:solidFill>
+                <a:latin typeface="DejaVu Sans"/>
+              </a:rPr>
+              <a:t>CORE PREDICTION</a:t>
+            </a:r>
+          </a:p>
+          <a:p>
+            <a:pPr>
+              <a:lnSpc>
+                <a:spcPct val="115000"/>
+              </a:lnSpc>
+              <a:spcAft>
+                <a:spcPts val="0"/>
+              </a:spcAft>
+            </a:pPr>
+            <a:r>
+              <a:rPr lang="en-US" sz="1600" b="0" dirty="0">
+                <a:solidFill>
+                  <a:srgbClr val="FFFFFF"/>
+                </a:solidFill>
+                <a:latin typeface="DejaVu Sans"/>
+              </a:rPr>
+              <a:t>Daily Ticket-arrival forecasts for the next week and month</a:t>
+            </a:r>
+          </a:p>
+        </p:txBody>
+      </p:sp>
+      <p:sp>
+        <p:nvSpPr>
+          <p:cNvPr id="26" name="Card 3"/>
+          <p:cNvSpPr/>
+          <p:nvPr/>
+        </p:nvSpPr>
+        <p:spPr>
+          <a:xfrm>
+            <a:off x="7909560" y="3749040"/>
+            <a:ext cx="3291840" cy="1737360"/>
+          </a:xfrm>
+          <a:prstGeom prst="roundRect">
+            <a:avLst>
+              <a:gd name="adj" fmla="val 6000"/>
+            </a:avLst>
+          </a:prstGeom>
+          <a:solidFill>
+            <a:srgbClr val="284766"/>
+          </a:solidFill>
+          <a:ln>
+            <a:noFill/>
+          </a:ln>
+        </p:spPr>
+        <p:txBody>
+          <a:bodyPr/>
+          <a:lstStyle/>
+          <a:p>
+            <a:endParaRPr lang="en-US"/>
+          </a:p>
+        </p:txBody>
+      </p:sp>
+      <p:sp>
+        <p:nvSpPr>
+          <p:cNvPr id="27" name="Card 3 Accent"/>
+          <p:cNvSpPr/>
+          <p:nvPr/>
+        </p:nvSpPr>
+        <p:spPr>
+          <a:xfrm>
+            <a:off x="7909560" y="3749040"/>
+            <a:ext cx="3291840" cy="64008"/>
+          </a:xfrm>
+          <a:prstGeom prst="rect">
+            <a:avLst/>
+          </a:prstGeom>
+          <a:solidFill>
+            <a:srgbClr val="8CC4F2"/>
+          </a:solidFill>
+          <a:ln>
+            <a:noFill/>
+          </a:ln>
+        </p:spPr>
+        <p:txBody>
+          <a:bodyPr/>
+          <a:lstStyle/>
+          <a:p>
+            <a:endParaRPr lang="en-US"/>
+          </a:p>
+        </p:txBody>
+      </p:sp>
+      <p:sp>
+        <p:nvSpPr>
+          <p:cNvPr id="28" name="Card 3 Text"/>
+          <p:cNvSpPr txBox="1"/>
+          <p:nvPr/>
+        </p:nvSpPr>
+        <p:spPr>
+          <a:xfrm>
+            <a:off x="7909560" y="3813048"/>
+            <a:ext cx="3291840" cy="1673352"/>
+          </a:xfrm>
+          <a:prstGeom prst="rect">
+            <a:avLst/>
+          </a:prstGeom>
+          <a:noFill/>
+        </p:spPr>
+        <p:txBody>
+          <a:bodyPr wrap="square" lIns="228600" tIns="228600" rIns="228600" bIns="182880" anchor="t">
+            <a:normAutofit lnSpcReduction="10000"/>
+          </a:bodyPr>
+          <a:lstStyle/>
+          <a:p>
+            <a:pPr>
+              <a:lnSpc>
+                <a:spcPct val="100000"/>
+              </a:lnSpc>
+              <a:spcAft>
+                <a:spcPts val="600"/>
+              </a:spcAft>
+            </a:pPr>
+            <a:r>
+              <a:rPr lang="en-US" sz="1200" b="1" spc="150" dirty="0">
+                <a:solidFill>
+                  <a:srgbClr val="8CC4F2"/>
+                </a:solidFill>
+                <a:latin typeface="DejaVu Sans"/>
+              </a:rPr>
+              <a:t>STATUS</a:t>
+            </a:r>
+          </a:p>
+          <a:p>
+            <a:pPr>
+              <a:lnSpc>
+                <a:spcPct val="115000"/>
+              </a:lnSpc>
+              <a:spcAft>
+                <a:spcPts val="0"/>
+              </a:spcAft>
+            </a:pPr>
+            <a:r>
+              <a:rPr lang="en-US" sz="1600" b="0" dirty="0">
+                <a:solidFill>
+                  <a:srgbClr val="FFFFFF"/>
+                </a:solidFill>
+                <a:latin typeface="DejaVu Sans"/>
+              </a:rPr>
               <a:t>Historical experiment, not operational approval or current performance evidence</a:t>
+            </a:r>
+          </a:p>
+        </p:txBody>
+      </p:sp>
+      <p:sp>
+        <p:nvSpPr>
+          <p:cNvPr id="40" name="Footer Rule"/>
+          <p:cNvSpPr/>
+          <p:nvPr/>
+        </p:nvSpPr>
+        <p:spPr>
+          <a:xfrm>
+            <a:off x="868680" y="5943600"/>
+            <a:ext cx="10332720" cy="9144"/>
+          </a:xfrm>
+          <a:prstGeom prst="rect">
+            <a:avLst/>
+          </a:prstGeom>
+          <a:solidFill>
+            <a:srgbClr val="3E5C7E"/>
+          </a:solidFill>
+          <a:ln>
+            <a:noFill/>
+          </a:ln>
+        </p:spPr>
+        <p:txBody>
+          <a:bodyPr/>
+          <a:lstStyle/>
+          <a:p>
+            <a:endParaRPr lang="en-US"/>
+          </a:p>
+        </p:txBody>
+      </p:sp>
+      <p:sp>
+        <p:nvSpPr>
+          <p:cNvPr id="41" name="Footer"/>
+          <p:cNvSpPr txBox="1"/>
+          <p:nvPr/>
+        </p:nvSpPr>
+        <p:spPr>
+          <a:xfrm>
+            <a:off x="868680" y="6035040"/>
+            <a:ext cx="10332720" cy="400000"/>
+          </a:xfrm>
+          <a:prstGeom prst="rect">
+            <a:avLst/>
+          </a:prstGeom>
+          <a:noFill/>
+        </p:spPr>
+        <p:txBody>
+          <a:bodyPr wrap="square" anchor="t">
+            <a:normAutofit/>
+          </a:bodyPr>
+          <a:lstStyle/>
+          <a:p>
+            <a:pPr>
+              <a:lnSpc>
+                <a:spcPct val="100000"/>
+              </a:lnSpc>
+              <a:spcAft>
+                <a:spcPts val="0"/>
+              </a:spcAft>
+            </a:pPr>
+            <a:r>
+              <a:rPr lang="en-US" sz="1200" b="0" dirty="0">
+                <a:solidFill>
+                  <a:srgbClr val="A9BCD0"/>
+                </a:solidFill>
+                <a:latin typeface="DejaVu Sans"/>
+              </a:rPr>
+              <a:t>Data scope: 27,348 Ticket records  ·  2016-01-03 to 2023-03-14 UTC  ·  Historical analysis</a:t>
             </a:r>
           </a:p>
         </p:txBody>
@@ -3278,7 +3694,7 @@
 </file>
 
 <file path=ppt/slides/slide10.xml><?xml version="1.0" encoding="utf-8"?>
-<p:sld xmlns:a="http://schemas.openxmlformats.org/drawingml/2006/main" xmlns:p="http://schemas.openxmlformats.org/presentationml/2006/main" xmlns:r="http://schemas.openxmlformats.org/officeDocument/2006/relationships">
+<p:sld xmlns:a="http://schemas.openxmlformats.org/drawingml/2006/main" xmlns:r="http://schemas.openxmlformats.org/officeDocument/2006/relationships" xmlns:p="http://schemas.openxmlformats.org/presentationml/2006/main">
   <p:cSld>
     <p:bg>
       <p:bgPr>
@@ -3294,7 +3710,14 @@
         <p:cNvGrpSpPr/>
         <p:nvPr/>
       </p:nvGrpSpPr>
-      <p:grpSpPr/>
+      <p:grpSpPr>
+        <a:xfrm>
+          <a:off x="0" y="0"/>
+          <a:ext cx="0" cy="0"/>
+          <a:chOff x="0" y="0"/>
+          <a:chExt cx="0" cy="0"/>
+        </a:xfrm>
+      </p:grpSpPr>
       <p:sp>
         <p:nvSpPr>
           <p:cNvPr id="2" name="Rectangle 1"/>
@@ -3335,6 +3758,7 @@
           <a:lstStyle/>
           <a:p>
             <a:pPr algn="ctr"/>
+            <a:endParaRPr/>
           </a:p>
         </p:txBody>
       </p:sp>
@@ -3417,6 +3841,7 @@
           <a:lstStyle/>
           <a:p>
             <a:pPr algn="ctr"/>
+            <a:endParaRPr/>
           </a:p>
         </p:txBody>
       </p:sp>
@@ -3429,7 +3854,7 @@
         <p:spPr>
           <a:xfrm>
             <a:off x="822960" y="1536192"/>
-            <a:ext cx="10515600" cy="3615690"/>
+            <a:ext cx="10515600" cy="3130601"/>
           </a:xfrm>
           <a:prstGeom prst="rect">
             <a:avLst/>
@@ -3444,12 +3869,12 @@
           <a:p>
             <a:pPr>
               <a:lnSpc>
-                <a:spcPct val="125000"/>
+                <a:spcPct val="120000"/>
               </a:lnSpc>
               <a:spcAft>
-                <a:spcPts val="1200"/>
+                <a:spcPts val="800"/>
               </a:spcAft>
-              <a:defRPr sz="1800">
+              <a:defRPr sz="1600">
                 <a:solidFill>
                   <a:srgbClr val="4B545D"/>
                 </a:solidFill>
@@ -3457,18 +3882,33 @@
               </a:defRPr>
             </a:pPr>
             <a:r>
-              <a:t>•  No approved protected demographic attributes: protected-group fairness cannot be assessed.</a:t>
+              <a:rPr lang="en-US" sz="1600" b="1" dirty="0">
+                <a:solidFill>
+                  <a:srgbClr val="1F3752"/>
+                </a:solidFill>
+                <a:latin typeface="DejaVu Sans"/>
+              </a:rPr>
+              <a:t>•  No approved protected demographic attributes:</a:t>
+            </a:r>
+            <a:r>
+              <a:rPr lang="en-US" sz="1600" b="0" dirty="0">
+                <a:solidFill>
+                  <a:srgbClr val="4B545D"/>
+                </a:solidFill>
+                <a:latin typeface="DejaVu Sans"/>
+              </a:rPr>
+              <a:t> protected-group fairness cannot be assessed.</a:t>
             </a:r>
           </a:p>
           <a:p>
             <a:pPr>
               <a:lnSpc>
-                <a:spcPct val="125000"/>
+                <a:spcPct val="120000"/>
               </a:lnSpc>
               <a:spcAft>
-                <a:spcPts val="1200"/>
+                <a:spcPts val="800"/>
               </a:spcAft>
-              <a:defRPr sz="1800">
+              <a:defRPr sz="1600">
                 <a:solidFill>
                   <a:srgbClr val="4B545D"/>
                 </a:solidFill>
@@ -3476,18 +3916,24 @@
               </a:defRPr>
             </a:pPr>
             <a:r>
+              <a:rPr lang="en-US" sz="1600" b="0" dirty="0">
+                <a:solidFill>
+                  <a:srgbClr val="4B545D"/>
+                </a:solidFill>
+                <a:latin typeface="DejaVu Sans"/>
+              </a:rPr>
               <a:t>•  Priority attainment uses priority-specific reference values; group rates need contextual interpretation.</a:t>
             </a:r>
           </a:p>
           <a:p>
             <a:pPr>
               <a:lnSpc>
-                <a:spcPct val="125000"/>
+                <a:spcPct val="120000"/>
               </a:lnSpc>
               <a:spcAft>
-                <a:spcPts val="1200"/>
+                <a:spcPts val="800"/>
               </a:spcAft>
-              <a:defRPr sz="1800">
+              <a:defRPr sz="1600">
                 <a:solidFill>
                   <a:srgbClr val="4B545D"/>
                 </a:solidFill>
@@ -3495,18 +3941,24 @@
               </a:defRPr>
             </a:pPr>
             <a:r>
+              <a:rPr lang="en-US" sz="1600" b="0" dirty="0">
+                <a:solidFill>
+                  <a:srgbClr val="4B545D"/>
+                </a:solidFill>
+                <a:latin typeface="DejaVu Sans"/>
+              </a:rPr>
               <a:t>•  One aggregate forecast series cannot test allocation fairness across queue, site or shift.</a:t>
             </a:r>
           </a:p>
           <a:p>
             <a:pPr>
               <a:lnSpc>
-                <a:spcPct val="125000"/>
+                <a:spcPct val="120000"/>
               </a:lnSpc>
               <a:spcAft>
-                <a:spcPts val="1200"/>
+                <a:spcPts val="800"/>
               </a:spcAft>
-              <a:defRPr sz="1800">
+              <a:defRPr sz="1600">
                 <a:solidFill>
                   <a:srgbClr val="4B545D"/>
                 </a:solidFill>
@@ -3514,18 +3966,24 @@
               </a:defRPr>
             </a:pPr>
             <a:r>
+              <a:rPr lang="en-US" sz="1600" b="0" dirty="0">
+                <a:solidFill>
+                  <a:srgbClr val="4B545D"/>
+                </a:solidFill>
+                <a:latin typeface="DejaVu Sans"/>
+              </a:rPr>
               <a:t>•  Small masked-project groups should not be ranked; retain human review and investigate persistent under-forecasting.</a:t>
             </a:r>
           </a:p>
           <a:p>
             <a:pPr>
               <a:lnSpc>
-                <a:spcPct val="125000"/>
+                <a:spcPct val="120000"/>
               </a:lnSpc>
               <a:spcAft>
-                <a:spcPts val="1200"/>
+                <a:spcPts val="800"/>
               </a:spcAft>
-              <a:defRPr sz="1500">
+              <a:defRPr sz="1600">
                 <a:solidFill>
                   <a:srgbClr val="4B545D"/>
                 </a:solidFill>
@@ -3533,6 +3991,12 @@
               </a:defRPr>
             </a:pPr>
             <a:r>
+              <a:rPr lang="en-US" sz="1600" b="0" dirty="0">
+                <a:solidFill>
+                  <a:srgbClr val="4B545D"/>
+                </a:solidFill>
+                <a:latin typeface="DejaVu Sans"/>
+              </a:rPr>
               <a:t>•  Missing demographics, measured ROI or production are not automatic academic failures; explicit rubric requirements still apply.</a:t>
             </a:r>
           </a:p>
@@ -3606,6 +4070,86 @@
             <a:r>
               <a:t>Help Desk Ticket SLA and Volume Forecasting | Historical analysis</a:t>
             </a:r>
+          </a:p>
+        </p:txBody>
+      </p:sp>
+      <p:sp>
+        <p:nvSpPr>
+          <p:cNvPr id="50" name="Takeaway Banner"/>
+          <p:cNvSpPr/>
+          <p:nvPr/>
+        </p:nvSpPr>
+        <p:spPr>
+          <a:xfrm>
+            <a:off x="594360" y="5715000"/>
+            <a:ext cx="11003280" cy="594360"/>
+          </a:xfrm>
+          <a:prstGeom prst="roundRect">
+            <a:avLst>
+              <a:gd name="adj" fmla="val 12000"/>
+            </a:avLst>
+          </a:prstGeom>
+          <a:solidFill>
+            <a:srgbClr val="1F3752"/>
+          </a:solidFill>
+          <a:ln>
+            <a:noFill/>
+          </a:ln>
+        </p:spPr>
+        <p:txBody>
+          <a:bodyPr wrap="square" lIns="228600" tIns="45720" rIns="182880" bIns="45720" anchor="ctr">
+            <a:normAutofit/>
+          </a:bodyPr>
+          <a:lstStyle/>
+          <a:p>
+            <a:pPr algn="l"/>
+            <a:r>
+              <a:rPr lang="en-US" sz="1500" b="1" dirty="0">
+                <a:solidFill>
+                  <a:srgbClr val="8CC4F2"/>
+                </a:solidFill>
+                <a:latin typeface="DejaVu Sans"/>
+              </a:rPr>
+              <a:t>KEY TAKEAWAY  |  </a:t>
+            </a:r>
+            <a:r>
+              <a:rPr lang="en-US" sz="1500" b="0" dirty="0">
+                <a:solidFill>
+                  <a:srgbClr val="FFFFFF"/>
+                </a:solidFill>
+                <a:latin typeface="DejaVu Sans"/>
+              </a:rPr>
+              <a:t>Fairness cannot be fully assessed with current data, so human review remains essential.</a:t>
+            </a:r>
+          </a:p>
+        </p:txBody>
+      </p:sp>
+      <p:sp>
+        <p:nvSpPr>
+          <p:cNvPr id="51" name="Takeaway Accent"/>
+          <p:cNvSpPr/>
+          <p:nvPr/>
+        </p:nvSpPr>
+        <p:spPr>
+          <a:xfrm>
+            <a:off x="594360" y="5715000"/>
+            <a:ext cx="82296" cy="594360"/>
+          </a:xfrm>
+          <a:prstGeom prst="rect">
+            <a:avLst/>
+          </a:prstGeom>
+          <a:solidFill>
+            <a:srgbClr val="3470A8"/>
+          </a:solidFill>
+          <a:ln>
+            <a:noFill/>
+          </a:ln>
+        </p:spPr>
+        <p:txBody>
+          <a:bodyPr/>
+          <a:lstStyle/>
+          <a:p>
+            <a:endParaRPr lang="en-US"/>
           </a:p>
         </p:txBody>
       </p:sp>
@@ -3618,7 +4162,7 @@
 </file>
 
 <file path=ppt/slides/slide11.xml><?xml version="1.0" encoding="utf-8"?>
-<p:sld xmlns:a="http://schemas.openxmlformats.org/drawingml/2006/main" xmlns:p="http://schemas.openxmlformats.org/presentationml/2006/main" xmlns:r="http://schemas.openxmlformats.org/officeDocument/2006/relationships">
+<p:sld xmlns:a="http://schemas.openxmlformats.org/drawingml/2006/main" xmlns:r="http://schemas.openxmlformats.org/officeDocument/2006/relationships" xmlns:p="http://schemas.openxmlformats.org/presentationml/2006/main">
   <p:cSld>
     <p:bg>
       <p:bgPr>
@@ -3634,7 +4178,14 @@
         <p:cNvGrpSpPr/>
         <p:nvPr/>
       </p:nvGrpSpPr>
-      <p:grpSpPr/>
+      <p:grpSpPr>
+        <a:xfrm>
+          <a:off x="0" y="0"/>
+          <a:ext cx="0" cy="0"/>
+          <a:chOff x="0" y="0"/>
+          <a:chExt cx="0" cy="0"/>
+        </a:xfrm>
+      </p:grpSpPr>
       <p:sp>
         <p:nvSpPr>
           <p:cNvPr id="2" name="Rectangle 1"/>
@@ -3675,6 +4226,7 @@
           <a:lstStyle/>
           <a:p>
             <a:pPr algn="ctr"/>
+            <a:endParaRPr/>
           </a:p>
         </p:txBody>
       </p:sp>
@@ -3757,6 +4309,7 @@
           <a:lstStyle/>
           <a:p>
             <a:pPr algn="ctr"/>
+            <a:endParaRPr/>
           </a:p>
         </p:txBody>
       </p:sp>
@@ -3768,8 +4321,8 @@
         </p:nvSpPr>
         <p:spPr>
           <a:xfrm>
-            <a:off x="822960" y="1536192"/>
-            <a:ext cx="10515600" cy="3568065"/>
+            <a:off x="822960" y="1463040"/>
+            <a:ext cx="10515600" cy="3243324"/>
           </a:xfrm>
           <a:prstGeom prst="rect">
             <a:avLst/>
@@ -3784,10 +4337,10 @@
           <a:p>
             <a:pPr>
               <a:lnSpc>
-                <a:spcPct val="125000"/>
+                <a:spcPct val="120000"/>
               </a:lnSpc>
               <a:spcAft>
-                <a:spcPts val="1200"/>
+                <a:spcPts val="800"/>
               </a:spcAft>
               <a:defRPr sz="1500">
                 <a:solidFill>
@@ -3797,18 +4350,33 @@
               </a:defRPr>
             </a:pPr>
             <a:r>
-              <a:t>•  Selected model persisted and served via a FastAPI POC (src/app.py); MLflow run 269964acc543 logs the same parameters and metrics for reproducibility.</a:t>
+              <a:rPr lang="en-US" sz="1500" b="1" dirty="0">
+                <a:solidFill>
+                  <a:srgbClr val="1F3752"/>
+                </a:solidFill>
+                <a:latin typeface="DejaVu Sans"/>
+              </a:rPr>
+              <a:t>•  Selected model</a:t>
+            </a:r>
+            <a:r>
+              <a:rPr lang="en-US" sz="1500" b="0" dirty="0">
+                <a:solidFill>
+                  <a:srgbClr val="4B545D"/>
+                </a:solidFill>
+                <a:latin typeface="DejaVu Sans"/>
+              </a:rPr>
+              <a:t> persisted and served via a FastAPI POC (src/app.py); MLflow run 269964acc543 logs the same parameters and metrics for reproducibility.</a:t>
             </a:r>
           </a:p>
           <a:p>
             <a:pPr>
               <a:lnSpc>
-                <a:spcPct val="125000"/>
+                <a:spcPct val="120000"/>
               </a:lnSpc>
               <a:spcAft>
-                <a:spcPts val="1200"/>
+                <a:spcPts val="800"/>
               </a:spcAft>
-              <a:defRPr sz="1800">
+              <a:defRPr sz="1500">
                 <a:solidFill>
                   <a:srgbClr val="4B545D"/>
                 </a:solidFill>
@@ -3816,16 +4384,31 @@
               </a:defRPr>
             </a:pPr>
             <a:r>
-              <a:t>•  MLflow experiment 'helpdesk_volume_forecast': validation MAE 4.39, test MAE 4.67.</a:t>
+              <a:rPr lang="en-US" sz="1500" b="1" dirty="0">
+                <a:solidFill>
+                  <a:srgbClr val="1F3752"/>
+                </a:solidFill>
+                <a:latin typeface="DejaVu Sans"/>
+              </a:rPr>
+              <a:t>•  MLflow experiment 'helpdesk_volume_forecast':</a:t>
+            </a:r>
+            <a:r>
+              <a:rPr lang="en-US" sz="1500" b="0" dirty="0">
+                <a:solidFill>
+                  <a:srgbClr val="4B545D"/>
+                </a:solidFill>
+                <a:latin typeface="DejaVu Sans"/>
+              </a:rPr>
+              <a:t> validation MAE 4.39, test MAE 4.67.</a:t>
             </a:r>
           </a:p>
           <a:p>
             <a:pPr>
               <a:lnSpc>
-                <a:spcPct val="125000"/>
+                <a:spcPct val="120000"/>
               </a:lnSpc>
               <a:spcAft>
-                <a:spcPts val="1200"/>
+                <a:spcPts val="800"/>
               </a:spcAft>
               <a:defRPr sz="1500">
                 <a:solidFill>
@@ -3835,16 +4418,31 @@
               </a:defRPr>
             </a:pPr>
             <a:r>
-              <a:t>•  Power BI ready export folder (fact_tickets_sla.csv, 4 report pages, 4 rendered sample screenshots) covers both the after the fact SLA report and the volume forecast, rebuilt from source data on every run so it scales to a larger dataset.</a:t>
+              <a:rPr lang="en-US" sz="1500" b="1" dirty="0">
+                <a:solidFill>
+                  <a:srgbClr val="1F3752"/>
+                </a:solidFill>
+                <a:latin typeface="DejaVu Sans"/>
+              </a:rPr>
+              <a:t>•  Power BI ready export folder</a:t>
+            </a:r>
+            <a:r>
+              <a:rPr lang="en-US" sz="1500" b="0" dirty="0">
+                <a:solidFill>
+                  <a:srgbClr val="4B545D"/>
+                </a:solidFill>
+                <a:latin typeface="DejaVu Sans"/>
+              </a:rPr>
+              <a:t> (fact_tickets_sla.csv, 4 report pages, 4 rendered sample screenshots) covers both the after the fact SLA report and the volume forecast, rebuilt from source data on every run so it scales to a larger dataset.</a:t>
             </a:r>
           </a:p>
           <a:p>
             <a:pPr>
               <a:lnSpc>
-                <a:spcPct val="125000"/>
+                <a:spcPct val="120000"/>
               </a:lnSpc>
               <a:spcAft>
-                <a:spcPts val="1200"/>
+                <a:spcPts val="800"/>
               </a:spcAft>
               <a:defRPr sz="1500">
                 <a:solidFill>
@@ -3854,16 +4452,31 @@
               </a:defRPr>
             </a:pPr>
             <a:r>
-              <a:t>•  Power BI Desktop is not installed in this environment, so the screenshots are rendered stand ins from the same export tables, not native .pbix captures.</a:t>
+              <a:rPr lang="en-US" sz="1500" b="1" dirty="0">
+                <a:solidFill>
+                  <a:srgbClr val="1F3752"/>
+                </a:solidFill>
+                <a:latin typeface="DejaVu Sans"/>
+              </a:rPr>
+              <a:t>•  Power BI Desktop</a:t>
+            </a:r>
+            <a:r>
+              <a:rPr lang="en-US" sz="1500" b="0" dirty="0">
+                <a:solidFill>
+                  <a:srgbClr val="4B545D"/>
+                </a:solidFill>
+                <a:latin typeface="DejaVu Sans"/>
+              </a:rPr>
+              <a:t> is not installed in this environment, so the screenshots are rendered stand ins from the same export tables, not native .pbix captures.</a:t>
             </a:r>
           </a:p>
           <a:p>
             <a:pPr>
               <a:lnSpc>
-                <a:spcPct val="125000"/>
+                <a:spcPct val="120000"/>
               </a:lnSpc>
               <a:spcAft>
-                <a:spcPts val="1200"/>
+                <a:spcPts val="800"/>
               </a:spcAft>
               <a:defRPr sz="1500">
                 <a:solidFill>
@@ -3873,7 +4486,22 @@
               </a:defRPr>
             </a:pPr>
             <a:r>
-              <a:t>•  Monitoring plan defines retrain triggers (schedule, drift, new source coverage) before any of this becomes an operational service.</a:t>
+              <a:rPr lang="en-US" sz="1500" b="1" dirty="0">
+                <a:solidFill>
+                  <a:srgbClr val="1F3752"/>
+                </a:solidFill>
+                <a:latin typeface="DejaVu Sans"/>
+              </a:rPr>
+              <a:t>•  Monitoring plan</a:t>
+            </a:r>
+            <a:r>
+              <a:rPr lang="en-US" sz="1500" b="0" dirty="0">
+                <a:solidFill>
+                  <a:srgbClr val="4B545D"/>
+                </a:solidFill>
+                <a:latin typeface="DejaVu Sans"/>
+              </a:rPr>
+              <a:t> defines retrain triggers (schedule, drift, new source coverage) before any of this becomes an operational service.</a:t>
             </a:r>
           </a:p>
         </p:txBody>
@@ -3946,6 +4574,86 @@
             <a:r>
               <a:t>Help Desk Ticket SLA and Volume Forecasting | Historical analysis</a:t>
             </a:r>
+          </a:p>
+        </p:txBody>
+      </p:sp>
+      <p:sp>
+        <p:nvSpPr>
+          <p:cNvPr id="50" name="Takeaway Banner"/>
+          <p:cNvSpPr/>
+          <p:nvPr/>
+        </p:nvSpPr>
+        <p:spPr>
+          <a:xfrm>
+            <a:off x="594360" y="5715000"/>
+            <a:ext cx="11003280" cy="594360"/>
+          </a:xfrm>
+          <a:prstGeom prst="roundRect">
+            <a:avLst>
+              <a:gd name="adj" fmla="val 12000"/>
+            </a:avLst>
+          </a:prstGeom>
+          <a:solidFill>
+            <a:srgbClr val="1F3752"/>
+          </a:solidFill>
+          <a:ln>
+            <a:noFill/>
+          </a:ln>
+        </p:spPr>
+        <p:txBody>
+          <a:bodyPr wrap="square" lIns="228600" tIns="45720" rIns="182880" bIns="45720" anchor="ctr">
+            <a:normAutofit/>
+          </a:bodyPr>
+          <a:lstStyle/>
+          <a:p>
+            <a:pPr algn="l"/>
+            <a:r>
+              <a:rPr lang="en-US" sz="1500" b="1" dirty="0">
+                <a:solidFill>
+                  <a:srgbClr val="8CC4F2"/>
+                </a:solidFill>
+                <a:latin typeface="DejaVu Sans"/>
+              </a:rPr>
+              <a:t>KEY TAKEAWAY  |  </a:t>
+            </a:r>
+            <a:r>
+              <a:rPr lang="en-US" sz="1500" b="0" dirty="0">
+                <a:solidFill>
+                  <a:srgbClr val="FFFFFF"/>
+                </a:solidFill>
+                <a:latin typeface="DejaVu Sans"/>
+              </a:rPr>
+              <a:t>The model is reproducible and demo-ready end to end, but not yet an operational service.</a:t>
+            </a:r>
+          </a:p>
+        </p:txBody>
+      </p:sp>
+      <p:sp>
+        <p:nvSpPr>
+          <p:cNvPr id="51" name="Takeaway Accent"/>
+          <p:cNvSpPr/>
+          <p:nvPr/>
+        </p:nvSpPr>
+        <p:spPr>
+          <a:xfrm>
+            <a:off x="594360" y="5715000"/>
+            <a:ext cx="82296" cy="594360"/>
+          </a:xfrm>
+          <a:prstGeom prst="rect">
+            <a:avLst/>
+          </a:prstGeom>
+          <a:solidFill>
+            <a:srgbClr val="3470A8"/>
+          </a:solidFill>
+          <a:ln>
+            <a:noFill/>
+          </a:ln>
+        </p:spPr>
+        <p:txBody>
+          <a:bodyPr/>
+          <a:lstStyle/>
+          <a:p>
+            <a:endParaRPr lang="en-US"/>
           </a:p>
         </p:txBody>
       </p:sp>
@@ -3958,7 +4666,7 @@
 </file>
 
 <file path=ppt/slides/slide12.xml><?xml version="1.0" encoding="utf-8"?>
-<p:sld xmlns:a="http://schemas.openxmlformats.org/drawingml/2006/main" xmlns:p="http://schemas.openxmlformats.org/presentationml/2006/main" xmlns:r="http://schemas.openxmlformats.org/officeDocument/2006/relationships">
+<p:sld xmlns:a="http://schemas.openxmlformats.org/drawingml/2006/main" xmlns:r="http://schemas.openxmlformats.org/officeDocument/2006/relationships" xmlns:p="http://schemas.openxmlformats.org/presentationml/2006/main">
   <p:cSld>
     <p:bg>
       <p:bgPr>
@@ -3974,7 +4682,14 @@
         <p:cNvGrpSpPr/>
         <p:nvPr/>
       </p:nvGrpSpPr>
-      <p:grpSpPr/>
+      <p:grpSpPr>
+        <a:xfrm>
+          <a:off x="0" y="0"/>
+          <a:ext cx="0" cy="0"/>
+          <a:chOff x="0" y="0"/>
+          <a:chExt cx="0" cy="0"/>
+        </a:xfrm>
+      </p:grpSpPr>
       <p:sp>
         <p:nvSpPr>
           <p:cNvPr id="2" name="Rectangle 1"/>
@@ -4015,6 +4730,7 @@
           <a:lstStyle/>
           <a:p>
             <a:pPr algn="ctr"/>
+            <a:endParaRPr/>
           </a:p>
         </p:txBody>
       </p:sp>
@@ -4097,6 +4813,7 @@
           <a:lstStyle/>
           <a:p>
             <a:pPr algn="ctr"/>
+            <a:endParaRPr/>
           </a:p>
         </p:txBody>
       </p:sp>
@@ -4109,7 +4826,7 @@
         <p:spPr>
           <a:xfrm>
             <a:off x="822960" y="1536192"/>
-            <a:ext cx="10515600" cy="2891790"/>
+            <a:ext cx="10515600" cy="2878288"/>
           </a:xfrm>
           <a:prstGeom prst="rect">
             <a:avLst/>
@@ -4124,12 +4841,12 @@
           <a:p>
             <a:pPr>
               <a:lnSpc>
-                <a:spcPct val="125000"/>
+                <a:spcPct val="120000"/>
               </a:lnSpc>
               <a:spcAft>
-                <a:spcPts val="1200"/>
+                <a:spcPts val="800"/>
               </a:spcAft>
-              <a:defRPr sz="1500">
+              <a:defRPr sz="1700">
                 <a:solidFill>
                   <a:srgbClr val="4B545D"/>
                 </a:solidFill>
@@ -4137,18 +4854,33 @@
               </a:defRPr>
             </a:pPr>
             <a:r>
-              <a:t>•  Ready locally: data profile, cohort rules, rolling backtest, validation selection, error/interval outputs and monitoring plan.</a:t>
+              <a:rPr lang="en-US" sz="1700" b="1" dirty="0">
+                <a:solidFill>
+                  <a:srgbClr val="1F3752"/>
+                </a:solidFill>
+                <a:latin typeface="DejaVu Sans"/>
+              </a:rPr>
+              <a:t>•  Ready locally:</a:t>
+            </a:r>
+            <a:r>
+              <a:rPr lang="en-US" sz="1700" b="0" dirty="0">
+                <a:solidFill>
+                  <a:srgbClr val="4B545D"/>
+                </a:solidFill>
+                <a:latin typeface="DejaVu Sans"/>
+              </a:rPr>
+              <a:t> data profile, cohort rules, rolling backtest, validation selection, error/interval outputs and monitoring plan.</a:t>
             </a:r>
           </a:p>
           <a:p>
             <a:pPr>
               <a:lnSpc>
-                <a:spcPct val="125000"/>
+                <a:spcPct val="120000"/>
               </a:lnSpc>
               <a:spcAft>
-                <a:spcPts val="1200"/>
+                <a:spcPts val="800"/>
               </a:spcAft>
-              <a:defRPr sz="1800">
+              <a:defRPr sz="1700">
                 <a:solidFill>
                   <a:srgbClr val="4B545D"/>
                 </a:solidFill>
@@ -4156,18 +4888,33 @@
               </a:defRPr>
             </a:pPr>
             <a:r>
-              <a:t>•  Not ready: verified coverage, current arrivals, approved SLA rules, segmented forecasts or production integration.</a:t>
+              <a:rPr lang="en-US" sz="1700" b="1" dirty="0">
+                <a:solidFill>
+                  <a:srgbClr val="1F3752"/>
+                </a:solidFill>
+                <a:latin typeface="DejaVu Sans"/>
+              </a:rPr>
+              <a:t>•  Not ready:</a:t>
+            </a:r>
+            <a:r>
+              <a:rPr lang="en-US" sz="1700" b="0" dirty="0">
+                <a:solidFill>
+                  <a:srgbClr val="4B545D"/>
+                </a:solidFill>
+                <a:latin typeface="DejaVu Sans"/>
+              </a:rPr>
+              <a:t> verified coverage, current arrivals, approved SLA rules, segmented forecasts or production integration.</a:t>
             </a:r>
           </a:p>
           <a:p>
             <a:pPr>
               <a:lnSpc>
-                <a:spcPct val="125000"/>
+                <a:spcPct val="120000"/>
               </a:lnSpc>
               <a:spcAft>
-                <a:spcPts val="1200"/>
+                <a:spcPts val="800"/>
               </a:spcAft>
-              <a:defRPr sz="1800">
+              <a:defRPr sz="1700">
                 <a:solidFill>
                   <a:srgbClr val="4B545D"/>
                 </a:solidFill>
@@ -4175,18 +4922,33 @@
               </a:defRPr>
             </a:pPr>
             <a:r>
-              <a:t>•  Next: confirm source range/zero days and policy; test on current future data against the seasonal baseline.</a:t>
+              <a:rPr lang="en-US" sz="1700" b="1" dirty="0">
+                <a:solidFill>
+                  <a:srgbClr val="1F3752"/>
+                </a:solidFill>
+                <a:latin typeface="DejaVu Sans"/>
+              </a:rPr>
+              <a:t>•  Next:</a:t>
+            </a:r>
+            <a:r>
+              <a:rPr lang="en-US" sz="1700" b="0" dirty="0">
+                <a:solidFill>
+                  <a:srgbClr val="4B545D"/>
+                </a:solidFill>
+                <a:latin typeface="DejaVu Sans"/>
+              </a:rPr>
+              <a:t> confirm source range/zero days and policy; test on current future data against the seasonal baseline.</a:t>
             </a:r>
           </a:p>
           <a:p>
             <a:pPr>
               <a:lnSpc>
-                <a:spcPct val="125000"/>
+                <a:spcPct val="120000"/>
               </a:lnSpc>
               <a:spcAft>
-                <a:spcPts val="1200"/>
+                <a:spcPts val="800"/>
               </a:spcAft>
-              <a:defRPr sz="1800">
+              <a:defRPr sz="1700">
                 <a:solidFill>
                   <a:srgbClr val="4B545D"/>
                 </a:solidFill>
@@ -4194,7 +4956,22 @@
               </a:defRPr>
             </a:pPr>
             <a:r>
-              <a:t>•  Conclusion: stronger historical prototype, not an operationally validated staffing or compliance system.</a:t>
+              <a:rPr lang="en-US" sz="1700" b="1" dirty="0">
+                <a:solidFill>
+                  <a:srgbClr val="1F3752"/>
+                </a:solidFill>
+                <a:latin typeface="DejaVu Sans"/>
+              </a:rPr>
+              <a:t>•  Conclusion:</a:t>
+            </a:r>
+            <a:r>
+              <a:rPr lang="en-US" sz="1700" b="0" dirty="0">
+                <a:solidFill>
+                  <a:srgbClr val="4B545D"/>
+                </a:solidFill>
+                <a:latin typeface="DejaVu Sans"/>
+              </a:rPr>
+              <a:t> stronger historical prototype, not an operationally validated staffing or compliance system.</a:t>
             </a:r>
           </a:p>
         </p:txBody>
@@ -4267,6 +5044,86 @@
             <a:r>
               <a:t>Help Desk Ticket SLA and Volume Forecasting | Historical analysis</a:t>
             </a:r>
+          </a:p>
+        </p:txBody>
+      </p:sp>
+      <p:sp>
+        <p:nvSpPr>
+          <p:cNvPr id="50" name="Takeaway Banner"/>
+          <p:cNvSpPr/>
+          <p:nvPr/>
+        </p:nvSpPr>
+        <p:spPr>
+          <a:xfrm>
+            <a:off x="594360" y="5715000"/>
+            <a:ext cx="11003280" cy="594360"/>
+          </a:xfrm>
+          <a:prstGeom prst="roundRect">
+            <a:avLst>
+              <a:gd name="adj" fmla="val 12000"/>
+            </a:avLst>
+          </a:prstGeom>
+          <a:solidFill>
+            <a:srgbClr val="1F3752"/>
+          </a:solidFill>
+          <a:ln>
+            <a:noFill/>
+          </a:ln>
+        </p:spPr>
+        <p:txBody>
+          <a:bodyPr wrap="square" lIns="228600" tIns="45720" rIns="182880" bIns="45720" anchor="ctr">
+            <a:normAutofit/>
+          </a:bodyPr>
+          <a:lstStyle/>
+          <a:p>
+            <a:pPr algn="l"/>
+            <a:r>
+              <a:rPr lang="en-US" sz="1500" b="1" dirty="0">
+                <a:solidFill>
+                  <a:srgbClr val="8CC4F2"/>
+                </a:solidFill>
+                <a:latin typeface="DejaVu Sans"/>
+              </a:rPr>
+              <a:t>KEY TAKEAWAY  |  </a:t>
+            </a:r>
+            <a:r>
+              <a:rPr lang="en-US" sz="1500" b="0" dirty="0">
+                <a:solidFill>
+                  <a:srgbClr val="FFFFFF"/>
+                </a:solidFill>
+                <a:latin typeface="DejaVu Sans"/>
+              </a:rPr>
+              <a:t>A strong historical prototype — the next step is validating on current data before operational use.</a:t>
+            </a:r>
+          </a:p>
+        </p:txBody>
+      </p:sp>
+      <p:sp>
+        <p:nvSpPr>
+          <p:cNvPr id="51" name="Takeaway Accent"/>
+          <p:cNvSpPr/>
+          <p:nvPr/>
+        </p:nvSpPr>
+        <p:spPr>
+          <a:xfrm>
+            <a:off x="594360" y="5715000"/>
+            <a:ext cx="82296" cy="594360"/>
+          </a:xfrm>
+          <a:prstGeom prst="rect">
+            <a:avLst/>
+          </a:prstGeom>
+          <a:solidFill>
+            <a:srgbClr val="3470A8"/>
+          </a:solidFill>
+          <a:ln>
+            <a:noFill/>
+          </a:ln>
+        </p:spPr>
+        <p:txBody>
+          <a:bodyPr/>
+          <a:lstStyle/>
+          <a:p>
+            <a:endParaRPr lang="en-US"/>
           </a:p>
         </p:txBody>
       </p:sp>
@@ -4279,7 +5136,7 @@
 </file>
 
 <file path=ppt/slides/slide2.xml><?xml version="1.0" encoding="utf-8"?>
-<p:sld xmlns:a="http://schemas.openxmlformats.org/drawingml/2006/main" xmlns:p="http://schemas.openxmlformats.org/presentationml/2006/main" xmlns:r="http://schemas.openxmlformats.org/officeDocument/2006/relationships">
+<p:sld xmlns:a="http://schemas.openxmlformats.org/drawingml/2006/main" xmlns:r="http://schemas.openxmlformats.org/officeDocument/2006/relationships" xmlns:p="http://schemas.openxmlformats.org/presentationml/2006/main">
   <p:cSld>
     <p:bg>
       <p:bgPr>
@@ -4295,7 +5152,14 @@
         <p:cNvGrpSpPr/>
         <p:nvPr/>
       </p:nvGrpSpPr>
-      <p:grpSpPr/>
+      <p:grpSpPr>
+        <a:xfrm>
+          <a:off x="0" y="0"/>
+          <a:ext cx="0" cy="0"/>
+          <a:chOff x="0" y="0"/>
+          <a:chExt cx="0" cy="0"/>
+        </a:xfrm>
+      </p:grpSpPr>
       <p:sp>
         <p:nvSpPr>
           <p:cNvPr id="2" name="Rectangle 1"/>
@@ -4336,6 +5200,7 @@
           <a:lstStyle/>
           <a:p>
             <a:pPr algn="ctr"/>
+            <a:endParaRPr/>
           </a:p>
         </p:txBody>
       </p:sp>
@@ -4418,6 +5283,7 @@
           <a:lstStyle/>
           <a:p>
             <a:pPr algn="ctr"/>
+            <a:endParaRPr/>
           </a:p>
         </p:txBody>
       </p:sp>
@@ -4429,8 +5295,8 @@
         </p:nvSpPr>
         <p:spPr>
           <a:xfrm>
-            <a:off x="822960" y="1536192"/>
-            <a:ext cx="10515600" cy="2987040"/>
+            <a:off x="822960" y="1463040"/>
+            <a:ext cx="10515600" cy="2564356"/>
           </a:xfrm>
           <a:prstGeom prst="rect">
             <a:avLst/>
@@ -4445,12 +5311,12 @@
           <a:p>
             <a:pPr>
               <a:lnSpc>
-                <a:spcPct val="125000"/>
+                <a:spcPct val="120000"/>
               </a:lnSpc>
               <a:spcAft>
-                <a:spcPts val="1200"/>
+                <a:spcPts val="800"/>
               </a:spcAft>
-              <a:defRPr sz="1800">
+              <a:defRPr sz="1700">
                 <a:solidFill>
                   <a:srgbClr val="4B545D"/>
                 </a:solidFill>
@@ -4458,18 +5324,33 @@
               </a:defRPr>
             </a:pPr>
             <a:r>
-              <a:t>•  Retrospective: compare elapsed resolution time with configured priority references.</a:t>
+              <a:rPr lang="en-US" sz="1700" b="1" dirty="0">
+                <a:solidFill>
+                  <a:srgbClr val="1F3752"/>
+                </a:solidFill>
+                <a:latin typeface="DejaVu Sans"/>
+              </a:rPr>
+              <a:t>•  Retrospective:</a:t>
+            </a:r>
+            <a:r>
+              <a:rPr lang="en-US" sz="1700" b="0" dirty="0">
+                <a:solidFill>
+                  <a:srgbClr val="4B545D"/>
+                </a:solidFill>
+                <a:latin typeface="DejaVu Sans"/>
+              </a:rPr>
+              <a:t> compare elapsed resolution time with configured priority references.</a:t>
             </a:r>
           </a:p>
           <a:p>
             <a:pPr>
               <a:lnSpc>
-                <a:spcPct val="125000"/>
+                <a:spcPct val="120000"/>
               </a:lnSpc>
               <a:spcAft>
-                <a:spcPts val="1200"/>
+                <a:spcPts val="800"/>
               </a:spcAft>
-              <a:defRPr sz="1800">
+              <a:defRPr sz="1700">
                 <a:solidFill>
                   <a:srgbClr val="4B545D"/>
                 </a:solidFill>
@@ -4477,18 +5358,33 @@
               </a:defRPr>
             </a:pPr>
             <a:r>
-              <a:t>•  Predictive: count exact Ticket-type issues created per UTC day; evaluate 7- and 30-day paths.</a:t>
+              <a:rPr lang="en-US" sz="1700" b="1" dirty="0">
+                <a:solidFill>
+                  <a:srgbClr val="1F3752"/>
+                </a:solidFill>
+                <a:latin typeface="DejaVu Sans"/>
+              </a:rPr>
+              <a:t>•  Predictive:</a:t>
+            </a:r>
+            <a:r>
+              <a:rPr lang="en-US" sz="1700" b="0" dirty="0">
+                <a:solidFill>
+                  <a:srgbClr val="4B545D"/>
+                </a:solidFill>
+                <a:latin typeface="DejaVu Sans"/>
+              </a:rPr>
+              <a:t> count exact Ticket-type issues created per UTC day; evaluate 7- and 30-day paths.</a:t>
             </a:r>
           </a:p>
           <a:p>
             <a:pPr>
               <a:lnSpc>
-                <a:spcPct val="125000"/>
+                <a:spcPct val="120000"/>
               </a:lnSpc>
               <a:spcAft>
-                <a:spcPts val="1200"/>
+                <a:spcPts val="800"/>
               </a:spcAft>
-              <a:defRPr sz="1800">
+              <a:defRPr sz="1700">
                 <a:solidFill>
                   <a:srgbClr val="4B545D"/>
                 </a:solidFill>
@@ -4496,18 +5392,33 @@
               </a:defRPr>
             </a:pPr>
             <a:r>
-              <a:t>•  Primary metrics: reference attainment by priority; forecast MAE/RMSE, WAPE/sMAPE and interval coverage.</a:t>
+              <a:rPr lang="en-US" sz="1700" b="1" dirty="0">
+                <a:solidFill>
+                  <a:srgbClr val="1F3752"/>
+                </a:solidFill>
+                <a:latin typeface="DejaVu Sans"/>
+              </a:rPr>
+              <a:t>•  Primary metrics:</a:t>
+            </a:r>
+            <a:r>
+              <a:rPr lang="en-US" sz="1700" b="0" dirty="0">
+                <a:solidFill>
+                  <a:srgbClr val="4B545D"/>
+                </a:solidFill>
+                <a:latin typeface="DejaVu Sans"/>
+              </a:rPr>
+              <a:t> reference attainment by priority; forecast MAE/RMSE, WAPE/sMAPE and interval coverage.</a:t>
             </a:r>
           </a:p>
           <a:p>
             <a:pPr>
               <a:lnSpc>
-                <a:spcPct val="125000"/>
+                <a:spcPct val="120000"/>
               </a:lnSpc>
               <a:spcAft>
-                <a:spcPts val="1200"/>
+                <a:spcPts val="800"/>
               </a:spcAft>
-              <a:defRPr sz="1800">
+              <a:defRPr sz="1700">
                 <a:solidFill>
                   <a:srgbClr val="4B545D"/>
                 </a:solidFill>
@@ -4515,6 +5426,12 @@
               </a:defRPr>
             </a:pPr>
             <a:r>
+              <a:rPr lang="en-US" sz="1700" b="0" dirty="0">
+                <a:solidFill>
+                  <a:srgbClr val="4B545D"/>
+                </a:solidFill>
+                <a:latin typeface="DejaVu Sans"/>
+              </a:rPr>
               <a:t>•  No live alert is defined. SLA references are project-configured assumptions, not verified policy.</a:t>
             </a:r>
           </a:p>
@@ -4588,6 +5505,86 @@
             <a:r>
               <a:t>Help Desk Ticket SLA and Volume Forecasting | Historical analysis</a:t>
             </a:r>
+          </a:p>
+        </p:txBody>
+      </p:sp>
+      <p:sp>
+        <p:nvSpPr>
+          <p:cNvPr id="50" name="Takeaway Banner"/>
+          <p:cNvSpPr/>
+          <p:nvPr/>
+        </p:nvSpPr>
+        <p:spPr>
+          <a:xfrm>
+            <a:off x="594360" y="5715000"/>
+            <a:ext cx="11003280" cy="594360"/>
+          </a:xfrm>
+          <a:prstGeom prst="roundRect">
+            <a:avLst>
+              <a:gd name="adj" fmla="val 12000"/>
+            </a:avLst>
+          </a:prstGeom>
+          <a:solidFill>
+            <a:srgbClr val="1F3752"/>
+          </a:solidFill>
+          <a:ln>
+            <a:noFill/>
+          </a:ln>
+        </p:spPr>
+        <p:txBody>
+          <a:bodyPr wrap="square" lIns="228600" tIns="45720" rIns="182880" bIns="45720" anchor="ctr">
+            <a:normAutofit/>
+          </a:bodyPr>
+          <a:lstStyle/>
+          <a:p>
+            <a:pPr algn="l"/>
+            <a:r>
+              <a:rPr lang="en-US" sz="1500" b="1" dirty="0">
+                <a:solidFill>
+                  <a:srgbClr val="8CC4F2"/>
+                </a:solidFill>
+                <a:latin typeface="DejaVu Sans"/>
+              </a:rPr>
+              <a:t>KEY TAKEAWAY  |  </a:t>
+            </a:r>
+            <a:r>
+              <a:rPr lang="en-US" sz="1500" b="0" dirty="0">
+                <a:solidFill>
+                  <a:srgbClr val="FFFFFF"/>
+                </a:solidFill>
+                <a:latin typeface="DejaVu Sans"/>
+              </a:rPr>
+              <a:t>Two lenses — SLA hindsight and daily volume foresight — measured with transparent, assumption-labelled metrics.</a:t>
+            </a:r>
+          </a:p>
+        </p:txBody>
+      </p:sp>
+      <p:sp>
+        <p:nvSpPr>
+          <p:cNvPr id="51" name="Takeaway Accent"/>
+          <p:cNvSpPr/>
+          <p:nvPr/>
+        </p:nvSpPr>
+        <p:spPr>
+          <a:xfrm>
+            <a:off x="594360" y="5715000"/>
+            <a:ext cx="82296" cy="594360"/>
+          </a:xfrm>
+          <a:prstGeom prst="rect">
+            <a:avLst/>
+          </a:prstGeom>
+          <a:solidFill>
+            <a:srgbClr val="3470A8"/>
+          </a:solidFill>
+          <a:ln>
+            <a:noFill/>
+          </a:ln>
+        </p:spPr>
+        <p:txBody>
+          <a:bodyPr/>
+          <a:lstStyle/>
+          <a:p>
+            <a:endParaRPr lang="en-US"/>
           </a:p>
         </p:txBody>
       </p:sp>
@@ -4600,7 +5597,7 @@
 </file>
 
 <file path=ppt/slides/slide3.xml><?xml version="1.0" encoding="utf-8"?>
-<p:sld xmlns:a="http://schemas.openxmlformats.org/drawingml/2006/main" xmlns:p="http://schemas.openxmlformats.org/presentationml/2006/main" xmlns:r="http://schemas.openxmlformats.org/officeDocument/2006/relationships">
+<p:sld xmlns:a="http://schemas.openxmlformats.org/drawingml/2006/main" xmlns:r="http://schemas.openxmlformats.org/officeDocument/2006/relationships" xmlns:p="http://schemas.openxmlformats.org/presentationml/2006/main">
   <p:cSld>
     <p:bg>
       <p:bgPr>
@@ -4616,7 +5613,14 @@
         <p:cNvGrpSpPr/>
         <p:nvPr/>
       </p:nvGrpSpPr>
-      <p:grpSpPr/>
+      <p:grpSpPr>
+        <a:xfrm>
+          <a:off x="0" y="0"/>
+          <a:ext cx="0" cy="0"/>
+          <a:chOff x="0" y="0"/>
+          <a:chExt cx="0" cy="0"/>
+        </a:xfrm>
+      </p:grpSpPr>
       <p:sp>
         <p:nvSpPr>
           <p:cNvPr id="2" name="Rectangle 1"/>
@@ -4657,6 +5661,7 @@
           <a:lstStyle/>
           <a:p>
             <a:pPr algn="ctr"/>
+            <a:endParaRPr/>
           </a:p>
         </p:txBody>
       </p:sp>
@@ -4739,6 +5744,7 @@
           <a:lstStyle/>
           <a:p>
             <a:pPr algn="ctr"/>
+            <a:endParaRPr/>
           </a:p>
         </p:txBody>
       </p:sp>
@@ -4750,8 +5756,8 @@
         </p:nvSpPr>
         <p:spPr>
           <a:xfrm>
-            <a:off x="822960" y="1536192"/>
-            <a:ext cx="10515600" cy="1599565"/>
+            <a:off x="822960" y="1463040"/>
+            <a:ext cx="10515600" cy="2412327"/>
           </a:xfrm>
           <a:prstGeom prst="rect">
             <a:avLst/>
@@ -4766,12 +5772,12 @@
           <a:p>
             <a:pPr>
               <a:lnSpc>
-                <a:spcPct val="125000"/>
+                <a:spcPct val="120000"/>
               </a:lnSpc>
               <a:spcAft>
                 <a:spcPts val="800"/>
               </a:spcAft>
-              <a:defRPr sz="1300">
+              <a:defRPr sz="1500">
                 <a:solidFill>
                   <a:srgbClr val="4B545D"/>
                 </a:solidFill>
@@ -4779,18 +5785,33 @@
               </a:defRPr>
             </a:pPr>
             <a:r>
-              <a:t>•  Identity: Kaggle v1 bytes and Mendeley v2 digest match. Original CC BY 4.0 conflicts with Kaggle's CC0 label.</a:t>
+              <a:rPr lang="en-US" sz="1500" b="1" dirty="0">
+                <a:solidFill>
+                  <a:srgbClr val="1F3752"/>
+                </a:solidFill>
+                <a:latin typeface="DejaVu Sans"/>
+              </a:rPr>
+              <a:t>•  Identity:</a:t>
+            </a:r>
+            <a:r>
+              <a:rPr lang="en-US" sz="1500" b="0" dirty="0">
+                <a:solidFill>
+                  <a:srgbClr val="4B545D"/>
+                </a:solidFill>
+                <a:latin typeface="DejaVu Sans"/>
+              </a:rPr>
+              <a:t> Kaggle v1 bytes and Mendeley v2 digest match. Original CC BY 4.0 conflicts with Kaggle's CC0 label.</a:t>
             </a:r>
           </a:p>
           <a:p>
             <a:pPr>
               <a:lnSpc>
-                <a:spcPct val="125000"/>
+                <a:spcPct val="120000"/>
               </a:lnSpc>
               <a:spcAft>
                 <a:spcPts val="800"/>
               </a:spcAft>
-              <a:defRPr sz="1300">
+              <a:defRPr sz="1500">
                 <a:solidFill>
                   <a:srgbClr val="4B545D"/>
                 </a:solidFill>
@@ -4798,18 +5819,24 @@
               </a:defRPr>
             </a:pPr>
             <a:r>
+              <a:rPr lang="en-US" sz="1500" b="0" dirty="0">
+                <a:solidFill>
+                  <a:srgbClr val="4B545D"/>
+                </a:solidFill>
+                <a:latin typeface="DejaVu Sans"/>
+              </a:rPr>
               <a:t>•  66,691 issue rows, 58 fields; exact Ticket type is the analysis cohort.</a:t>
             </a:r>
           </a:p>
           <a:p>
             <a:pPr>
               <a:lnSpc>
-                <a:spcPct val="125000"/>
+                <a:spcPct val="120000"/>
               </a:lnSpc>
               <a:spcAft>
                 <a:spcPts val="800"/>
               </a:spcAft>
-              <a:defRPr sz="1300">
+              <a:defRPr sz="1500">
                 <a:solidFill>
                   <a:srgbClr val="4B545D"/>
                 </a:solidFill>
@@ -4817,18 +5844,24 @@
               </a:defRPr>
             </a:pPr>
             <a:r>
+              <a:rPr lang="en-US" sz="1500" b="0" dirty="0">
+                <a:solidFill>
+                  <a:srgbClr val="4B545D"/>
+                </a:solidFill>
+                <a:latin typeface="DejaVu Sans"/>
+              </a:rPr>
               <a:t>•  27,348 scoped Ticket records, 2016-01-03 to 2023-03-14 UTC.</a:t>
             </a:r>
           </a:p>
           <a:p>
             <a:pPr>
               <a:lnSpc>
-                <a:spcPct val="125000"/>
+                <a:spcPct val="120000"/>
               </a:lnSpc>
               <a:spcAft>
                 <a:spcPts val="800"/>
               </a:spcAft>
-              <a:defRPr sz="1100">
+              <a:defRPr sz="1500">
                 <a:solidFill>
                   <a:srgbClr val="4B545D"/>
                 </a:solidFill>
@@ -4836,18 +5869,24 @@
               </a:defRPr>
             </a:pPr>
             <a:r>
+              <a:rPr lang="en-US" sz="1500" b="0" dirty="0">
+                <a:solidFill>
+                  <a:srgbClr val="4B545D"/>
+                </a:solidFill>
+                <a:latin typeface="DejaVu Sans"/>
+              </a:rPr>
               <a:t>•  Documentation states 2016 to March 2023, but the file contains pre-2016 timestamps; earlier rows are profiled and excluded.</a:t>
             </a:r>
           </a:p>
           <a:p>
             <a:pPr>
               <a:lnSpc>
-                <a:spcPct val="125000"/>
+                <a:spcPct val="120000"/>
               </a:lnSpc>
               <a:spcAft>
                 <a:spcPts val="800"/>
               </a:spcAft>
-              <a:defRPr sz="1300">
+              <a:defRPr sz="1500">
                 <a:solidFill>
                   <a:srgbClr val="4B545D"/>
                 </a:solidFill>
@@ -4855,6 +5894,12 @@
               </a:defRPr>
             </a:pPr>
             <a:r>
+              <a:rPr lang="en-US" sz="1500" b="0" dirty="0">
+                <a:solidFill>
+                  <a:srgbClr val="4B545D"/>
+                </a:solidFill>
+                <a:latin typeface="DejaVu Sans"/>
+              </a:rPr>
               <a:t>•  344/2,628 dates have no Ticket rows; treated as zero under unverified coverage assumption.</a:t>
             </a:r>
           </a:p>
@@ -4862,7 +5907,7 @@
       </p:sp>
       <p:pic>
         <p:nvPicPr>
-          <p:cNvPr id="6" name="Picture 5" descr="notebook02_monthly_volume.png"/>
+          <p:cNvPr id="6" name="Picture 5" descr="Chart of monthly created-Ticket counts, 2016 to 2023"/>
           <p:cNvPicPr>
             <a:picLocks noChangeAspect="1"/>
           </p:cNvPicPr>
@@ -4876,8 +5921,8 @@
         </p:blipFill>
         <p:spPr>
           <a:xfrm>
-            <a:off x="2712567" y="3272917"/>
-            <a:ext cx="6766560" cy="1954784"/>
+            <a:off x="3847000" y="3870000"/>
+            <a:ext cx="4498000" cy="1300000"/>
           </a:xfrm>
           <a:prstGeom prst="rect">
             <a:avLst/>
@@ -4892,8 +5937,8 @@
         </p:nvSpPr>
         <p:spPr>
           <a:xfrm>
-            <a:off x="822960" y="5364861"/>
-            <a:ext cx="10515600" cy="399415"/>
+            <a:off x="822960" y="4910000"/>
+            <a:ext cx="10515600" cy="306944"/>
           </a:xfrm>
           <a:prstGeom prst="rect">
             <a:avLst/>
@@ -4908,19 +5953,25 @@
           <a:p>
             <a:pPr>
               <a:lnSpc>
-                <a:spcPct val="125000"/>
+                <a:spcPct val="120000"/>
               </a:lnSpc>
               <a:spcAft>
                 <a:spcPts val="800"/>
               </a:spcAft>
-              <a:defRPr sz="1300">
-                <a:solidFill>
-                  <a:srgbClr val="4B545D"/>
+              <a:defRPr sz="1300" i="1">
+                <a:solidFill>
+                  <a:srgbClr val="6B7580"/>
                 </a:solidFill>
                 <a:latin typeface="DejaVu Sans"/>
               </a:defRPr>
             </a:pPr>
             <a:r>
+              <a:rPr lang="en-US" sz="1300" b="0" i="1" dirty="0">
+                <a:solidFill>
+                  <a:srgbClr val="6B7580"/>
+                </a:solidFill>
+                <a:latin typeface="DejaVu Sans"/>
+              </a:rPr>
               <a:t>•  Monthly created-Ticket counts (notebook 02, EDA): volume varies across months and thins out in later years.</a:t>
             </a:r>
           </a:p>
@@ -4994,6 +6045,86 @@
             <a:r>
               <a:t>Help Desk Ticket SLA and Volume Forecasting | Historical analysis</a:t>
             </a:r>
+          </a:p>
+        </p:txBody>
+      </p:sp>
+      <p:sp>
+        <p:nvSpPr>
+          <p:cNvPr id="50" name="Takeaway Banner"/>
+          <p:cNvSpPr/>
+          <p:nvPr/>
+        </p:nvSpPr>
+        <p:spPr>
+          <a:xfrm>
+            <a:off x="594360" y="5715000"/>
+            <a:ext cx="11003280" cy="594360"/>
+          </a:xfrm>
+          <a:prstGeom prst="roundRect">
+            <a:avLst>
+              <a:gd name="adj" fmla="val 12000"/>
+            </a:avLst>
+          </a:prstGeom>
+          <a:solidFill>
+            <a:srgbClr val="1F3752"/>
+          </a:solidFill>
+          <a:ln>
+            <a:noFill/>
+          </a:ln>
+        </p:spPr>
+        <p:txBody>
+          <a:bodyPr wrap="square" lIns="228600" tIns="45720" rIns="182880" bIns="45720" anchor="ctr">
+            <a:normAutofit/>
+          </a:bodyPr>
+          <a:lstStyle/>
+          <a:p>
+            <a:pPr algn="l"/>
+            <a:r>
+              <a:rPr lang="en-US" sz="1500" b="1" dirty="0">
+                <a:solidFill>
+                  <a:srgbClr val="8CC4F2"/>
+                </a:solidFill>
+                <a:latin typeface="DejaVu Sans"/>
+              </a:rPr>
+              <a:t>KEY TAKEAWAY  |  </a:t>
+            </a:r>
+            <a:r>
+              <a:rPr lang="en-US" sz="1500" b="0" dirty="0">
+                <a:solidFill>
+                  <a:srgbClr val="FFFFFF"/>
+                </a:solidFill>
+                <a:latin typeface="DejaVu Sans"/>
+              </a:rPr>
+              <a:t>A verified 27,348-ticket cohort (2016–2023) forms the analysis base, with coverage gaps explicitly flagged.</a:t>
+            </a:r>
+          </a:p>
+        </p:txBody>
+      </p:sp>
+      <p:sp>
+        <p:nvSpPr>
+          <p:cNvPr id="51" name="Takeaway Accent"/>
+          <p:cNvSpPr/>
+          <p:nvPr/>
+        </p:nvSpPr>
+        <p:spPr>
+          <a:xfrm>
+            <a:off x="594360" y="5715000"/>
+            <a:ext cx="82296" cy="594360"/>
+          </a:xfrm>
+          <a:prstGeom prst="rect">
+            <a:avLst/>
+          </a:prstGeom>
+          <a:solidFill>
+            <a:srgbClr val="3470A8"/>
+          </a:solidFill>
+          <a:ln>
+            <a:noFill/>
+          </a:ln>
+        </p:spPr>
+        <p:txBody>
+          <a:bodyPr/>
+          <a:lstStyle/>
+          <a:p>
+            <a:endParaRPr lang="en-US"/>
           </a:p>
         </p:txBody>
       </p:sp>
@@ -5006,7 +6137,7 @@
 </file>
 
 <file path=ppt/slides/slide4.xml><?xml version="1.0" encoding="utf-8"?>
-<p:sld xmlns:a="http://schemas.openxmlformats.org/drawingml/2006/main" xmlns:p="http://schemas.openxmlformats.org/presentationml/2006/main" xmlns:r="http://schemas.openxmlformats.org/officeDocument/2006/relationships">
+<p:sld xmlns:a="http://schemas.openxmlformats.org/drawingml/2006/main" xmlns:r="http://schemas.openxmlformats.org/officeDocument/2006/relationships" xmlns:p="http://schemas.openxmlformats.org/presentationml/2006/main">
   <p:cSld>
     <p:bg>
       <p:bgPr>
@@ -5022,7 +6153,14 @@
         <p:cNvGrpSpPr/>
         <p:nvPr/>
       </p:nvGrpSpPr>
-      <p:grpSpPr/>
+      <p:grpSpPr>
+        <a:xfrm>
+          <a:off x="0" y="0"/>
+          <a:ext cx="0" cy="0"/>
+          <a:chOff x="0" y="0"/>
+          <a:chExt cx="0" cy="0"/>
+        </a:xfrm>
+      </p:grpSpPr>
       <p:sp>
         <p:nvSpPr>
           <p:cNvPr id="2" name="Rectangle 1"/>
@@ -5063,6 +6201,7 @@
           <a:lstStyle/>
           <a:p>
             <a:pPr algn="ctr"/>
+            <a:endParaRPr/>
           </a:p>
         </p:txBody>
       </p:sp>
@@ -5145,6 +6284,7 @@
           <a:lstStyle/>
           <a:p>
             <a:pPr algn="ctr"/>
+            <a:endParaRPr/>
           </a:p>
         </p:txBody>
       </p:sp>
@@ -5156,8 +6296,8 @@
         </p:nvSpPr>
         <p:spPr>
           <a:xfrm>
-            <a:off x="822960" y="1536192"/>
-            <a:ext cx="10515600" cy="720090"/>
+            <a:off x="822960" y="1463040"/>
+            <a:ext cx="10515600" cy="582019"/>
           </a:xfrm>
           <a:prstGeom prst="rect">
             <a:avLst/>
@@ -5172,19 +6312,25 @@
           <a:p>
             <a:pPr>
               <a:lnSpc>
-                <a:spcPct val="125000"/>
+                <a:spcPct val="120000"/>
               </a:lnSpc>
               <a:spcAft>
-                <a:spcPts val="1200"/>
+                <a:spcPts val="800"/>
               </a:spcAft>
-              <a:defRPr sz="1500">
-                <a:solidFill>
-                  <a:srgbClr val="4B545D"/>
+              <a:defRPr sz="1400" b="1">
+                <a:solidFill>
+                  <a:srgbClr val="1F3752"/>
                 </a:solidFill>
                 <a:latin typeface="DejaVu Sans"/>
               </a:defRPr>
             </a:pPr>
             <a:r>
+              <a:rPr lang="en-US" sz="1400" b="1" dirty="0">
+                <a:solidFill>
+                  <a:srgbClr val="1F3752"/>
+                </a:solidFill>
+                <a:latin typeface="DejaVu Sans"/>
+              </a:rPr>
               <a:t>•  Reference attainment by priority (exact Ticket type, 2016+, Done resolution, mapped priority, valid nonnegative duration):</a:t>
             </a:r>
           </a:p>
@@ -5196,7 +6342,13 @@
           <p:cNvGraphicFramePr>
             <a:graphicFrameLocks noGrp="1"/>
           </p:cNvGraphicFramePr>
-          <p:nvPr/>
+          <p:nvPr>
+            <p:extLst>
+              <p:ext uri="{D42A27DB-BD31-4B8C-83A1-F6EECF244321}">
+                <p14:modId xmlns:p14="http://schemas.microsoft.com/office/powerpoint/2010/main" val="2962920624"/>
+              </p:ext>
+            </p:extLst>
+          </p:nvPr>
         </p:nvGraphicFramePr>
         <p:xfrm>
           <a:off x="822960" y="2393442"/>
@@ -5209,24 +6361,48 @@
                 <a:tableStyleId>{5C22544A-7EE6-4342-B048-85BDC9FD1C3A}</a:tableStyleId>
               </a:tblPr>
               <a:tblGrid>
-                <a:gridCol w="2628900"/>
-                <a:gridCol w="2628900"/>
-                <a:gridCol w="2628900"/>
-                <a:gridCol w="2628900"/>
+                <a:gridCol w="2628900">
+                  <a:extLst>
+                    <a:ext uri="{9D8B030D-6E8A-4147-A177-3AD203B41FA5}">
+                      <a16:colId xmlns:a16="http://schemas.microsoft.com/office/drawing/2014/main" val="20000"/>
+                    </a:ext>
+                  </a:extLst>
+                </a:gridCol>
+                <a:gridCol w="2628900">
+                  <a:extLst>
+                    <a:ext uri="{9D8B030D-6E8A-4147-A177-3AD203B41FA5}">
+                      <a16:colId xmlns:a16="http://schemas.microsoft.com/office/drawing/2014/main" val="20001"/>
+                    </a:ext>
+                  </a:extLst>
+                </a:gridCol>
+                <a:gridCol w="2628900">
+                  <a:extLst>
+                    <a:ext uri="{9D8B030D-6E8A-4147-A177-3AD203B41FA5}">
+                      <a16:colId xmlns:a16="http://schemas.microsoft.com/office/drawing/2014/main" val="20002"/>
+                    </a:ext>
+                  </a:extLst>
+                </a:gridCol>
+                <a:gridCol w="2628900">
+                  <a:extLst>
+                    <a:ext uri="{9D8B030D-6E8A-4147-A177-3AD203B41FA5}">
+                      <a16:colId xmlns:a16="http://schemas.microsoft.com/office/drawing/2014/main" val="20003"/>
+                    </a:ext>
+                  </a:extLst>
+                </a:gridCol>
               </a:tblGrid>
-              <a:tr h="460247">
+              <a:tr h="320040">
                 <a:tc>
                   <a:txBody>
-                    <a:bodyPr wrap="square"/>
+                    <a:bodyPr/>
                     <a:lstStyle/>
                     <a:p>
                       <a:pPr>
                         <a:lnSpc>
-                          <a:spcPct val="125000"/>
+                          <a:spcPct val="100000"/>
                         </a:lnSpc>
                       </a:pPr>
                       <a:r>
-                        <a:rPr b="1" sz="1400">
+                        <a:rPr lang="en-US" sz="1300" b="1">
                           <a:solidFill>
                             <a:srgbClr val="FFFFFF"/>
                           </a:solidFill>
@@ -5234,6 +6410,12 @@
                         </a:rPr>
                         <a:t>Priority</a:t>
                       </a:r>
+                      <a:endParaRPr lang="en-US" sz="1300" b="1" dirty="0">
+                        <a:solidFill>
+                          <a:srgbClr val="FFFFFF"/>
+                        </a:solidFill>
+                        <a:latin typeface="DejaVu Sans"/>
+                      </a:endParaRPr>
                     </a:p>
                   </a:txBody>
                   <a:tcPr>
@@ -5244,16 +6426,16 @@
                 </a:tc>
                 <a:tc>
                   <a:txBody>
-                    <a:bodyPr wrap="square"/>
+                    <a:bodyPr/>
                     <a:lstStyle/>
                     <a:p>
                       <a:pPr>
                         <a:lnSpc>
-                          <a:spcPct val="125000"/>
+                          <a:spcPct val="100000"/>
                         </a:lnSpc>
                       </a:pPr>
                       <a:r>
-                        <a:rPr b="1" sz="1400">
+                        <a:rPr lang="en-US" sz="1300" b="1">
                           <a:solidFill>
                             <a:srgbClr val="FFFFFF"/>
                           </a:solidFill>
@@ -5261,6 +6443,12 @@
                         </a:rPr>
                         <a:t>Reference</a:t>
                       </a:r>
+                      <a:endParaRPr lang="en-US" sz="1300" b="1" dirty="0">
+                        <a:solidFill>
+                          <a:srgbClr val="FFFFFF"/>
+                        </a:solidFill>
+                        <a:latin typeface="DejaVu Sans"/>
+                      </a:endParaRPr>
                     </a:p>
                   </a:txBody>
                   <a:tcPr>
@@ -5271,16 +6459,16 @@
                 </a:tc>
                 <a:tc>
                   <a:txBody>
-                    <a:bodyPr wrap="square"/>
+                    <a:bodyPr/>
                     <a:lstStyle/>
                     <a:p>
                       <a:pPr>
                         <a:lnSpc>
-                          <a:spcPct val="125000"/>
+                          <a:spcPct val="100000"/>
                         </a:lnSpc>
                       </a:pPr>
                       <a:r>
-                        <a:rPr b="1" sz="1400">
+                        <a:rPr lang="en-US" sz="1300" b="1">
                           <a:solidFill>
                             <a:srgbClr val="FFFFFF"/>
                           </a:solidFill>
@@ -5288,6 +6476,12 @@
                         </a:rPr>
                         <a:t>Met / Assessed</a:t>
                       </a:r>
+                      <a:endParaRPr lang="en-US" sz="1300" b="1" dirty="0">
+                        <a:solidFill>
+                          <a:srgbClr val="FFFFFF"/>
+                        </a:solidFill>
+                        <a:latin typeface="DejaVu Sans"/>
+                      </a:endParaRPr>
                     </a:p>
                   </a:txBody>
                   <a:tcPr>
@@ -5298,16 +6492,16 @@
                 </a:tc>
                 <a:tc>
                   <a:txBody>
-                    <a:bodyPr wrap="square"/>
+                    <a:bodyPr/>
                     <a:lstStyle/>
                     <a:p>
                       <a:pPr>
                         <a:lnSpc>
-                          <a:spcPct val="125000"/>
+                          <a:spcPct val="100000"/>
                         </a:lnSpc>
                       </a:pPr>
                       <a:r>
-                        <a:rPr b="1" sz="1400">
+                        <a:rPr lang="en-US" sz="1300" b="1">
                           <a:solidFill>
                             <a:srgbClr val="FFFFFF"/>
                           </a:solidFill>
@@ -5315,6 +6509,12 @@
                         </a:rPr>
                         <a:t>Attainment</a:t>
                       </a:r>
+                      <a:endParaRPr lang="en-US" sz="1300" b="1" dirty="0">
+                        <a:solidFill>
+                          <a:srgbClr val="FFFFFF"/>
+                        </a:solidFill>
+                        <a:latin typeface="DejaVu Sans"/>
+                      </a:endParaRPr>
                     </a:p>
                   </a:txBody>
                   <a:tcPr>
@@ -5323,20 +6523,25 @@
                     </a:solidFill>
                   </a:tcPr>
                 </a:tc>
+                <a:extLst>
+                  <a:ext uri="{0D108BD9-81ED-4DB2-BD59-A6C34878D82A}">
+                    <a16:rowId xmlns:a16="http://schemas.microsoft.com/office/drawing/2014/main" val="10000"/>
+                  </a:ext>
+                </a:extLst>
               </a:tr>
-              <a:tr h="460247">
+              <a:tr h="320040">
                 <a:tc>
                   <a:txBody>
-                    <a:bodyPr wrap="square"/>
+                    <a:bodyPr/>
                     <a:lstStyle/>
                     <a:p>
                       <a:pPr>
                         <a:lnSpc>
-                          <a:spcPct val="125000"/>
+                          <a:spcPct val="100000"/>
                         </a:lnSpc>
                       </a:pPr>
                       <a:r>
-                        <a:rPr sz="1400">
+                        <a:rPr lang="en-PH" sz="1400">
                           <a:solidFill>
                             <a:srgbClr val="1F3752"/>
                           </a:solidFill>
@@ -5354,16 +6559,16 @@
                 </a:tc>
                 <a:tc>
                   <a:txBody>
-                    <a:bodyPr wrap="square"/>
+                    <a:bodyPr/>
                     <a:lstStyle/>
                     <a:p>
                       <a:pPr>
                         <a:lnSpc>
-                          <a:spcPct val="125000"/>
+                          <a:spcPct val="100000"/>
                         </a:lnSpc>
                       </a:pPr>
                       <a:r>
-                        <a:rPr sz="1400">
+                        <a:rPr lang="en-PH" sz="1400">
                           <a:solidFill>
                             <a:srgbClr val="4B545D"/>
                           </a:solidFill>
@@ -5381,16 +6586,16 @@
                 </a:tc>
                 <a:tc>
                   <a:txBody>
-                    <a:bodyPr wrap="square"/>
+                    <a:bodyPr/>
                     <a:lstStyle/>
                     <a:p>
                       <a:pPr>
                         <a:lnSpc>
-                          <a:spcPct val="125000"/>
+                          <a:spcPct val="100000"/>
                         </a:lnSpc>
                       </a:pPr>
                       <a:r>
-                        <a:rPr sz="1400">
+                        <a:rPr lang="en-PH" sz="1400">
                           <a:solidFill>
                             <a:srgbClr val="4B545D"/>
                           </a:solidFill>
@@ -5408,16 +6613,16 @@
                 </a:tc>
                 <a:tc>
                   <a:txBody>
-                    <a:bodyPr wrap="square"/>
+                    <a:bodyPr/>
                     <a:lstStyle/>
                     <a:p>
                       <a:pPr>
                         <a:lnSpc>
-                          <a:spcPct val="125000"/>
+                          <a:spcPct val="100000"/>
                         </a:lnSpc>
                       </a:pPr>
                       <a:r>
-                        <a:rPr sz="1400">
+                        <a:rPr lang="en-PH" sz="1400">
                           <a:solidFill>
                             <a:srgbClr val="4B545D"/>
                           </a:solidFill>
@@ -5433,20 +6638,25 @@
                     </a:solidFill>
                   </a:tcPr>
                 </a:tc>
+                <a:extLst>
+                  <a:ext uri="{0D108BD9-81ED-4DB2-BD59-A6C34878D82A}">
+                    <a16:rowId xmlns:a16="http://schemas.microsoft.com/office/drawing/2014/main" val="10001"/>
+                  </a:ext>
+                </a:extLst>
               </a:tr>
-              <a:tr h="460247">
+              <a:tr h="320040">
                 <a:tc>
                   <a:txBody>
-                    <a:bodyPr wrap="square"/>
+                    <a:bodyPr/>
                     <a:lstStyle/>
                     <a:p>
                       <a:pPr>
                         <a:lnSpc>
-                          <a:spcPct val="125000"/>
+                          <a:spcPct val="100000"/>
                         </a:lnSpc>
                       </a:pPr>
                       <a:r>
-                        <a:rPr sz="1400">
+                        <a:rPr lang="en-PH" sz="1400">
                           <a:solidFill>
                             <a:srgbClr val="1F3752"/>
                           </a:solidFill>
@@ -5464,16 +6674,16 @@
                 </a:tc>
                 <a:tc>
                   <a:txBody>
-                    <a:bodyPr wrap="square"/>
+                    <a:bodyPr/>
                     <a:lstStyle/>
                     <a:p>
                       <a:pPr>
                         <a:lnSpc>
-                          <a:spcPct val="125000"/>
+                          <a:spcPct val="100000"/>
                         </a:lnSpc>
                       </a:pPr>
                       <a:r>
-                        <a:rPr sz="1400">
+                        <a:rPr lang="en-PH" sz="1400">
                           <a:solidFill>
                             <a:srgbClr val="4B545D"/>
                           </a:solidFill>
@@ -5491,16 +6701,16 @@
                 </a:tc>
                 <a:tc>
                   <a:txBody>
-                    <a:bodyPr wrap="square"/>
+                    <a:bodyPr/>
                     <a:lstStyle/>
                     <a:p>
                       <a:pPr>
                         <a:lnSpc>
-                          <a:spcPct val="125000"/>
+                          <a:spcPct val="100000"/>
                         </a:lnSpc>
                       </a:pPr>
                       <a:r>
-                        <a:rPr sz="1400">
+                        <a:rPr lang="en-PH" sz="1400">
                           <a:solidFill>
                             <a:srgbClr val="4B545D"/>
                           </a:solidFill>
@@ -5518,16 +6728,16 @@
                 </a:tc>
                 <a:tc>
                   <a:txBody>
-                    <a:bodyPr wrap="square"/>
+                    <a:bodyPr/>
                     <a:lstStyle/>
                     <a:p>
                       <a:pPr>
                         <a:lnSpc>
-                          <a:spcPct val="125000"/>
+                          <a:spcPct val="100000"/>
                         </a:lnSpc>
                       </a:pPr>
                       <a:r>
-                        <a:rPr sz="1400">
+                        <a:rPr lang="en-PH" sz="1400">
                           <a:solidFill>
                             <a:srgbClr val="4B545D"/>
                           </a:solidFill>
@@ -5543,20 +6753,25 @@
                     </a:solidFill>
                   </a:tcPr>
                 </a:tc>
+                <a:extLst>
+                  <a:ext uri="{0D108BD9-81ED-4DB2-BD59-A6C34878D82A}">
+                    <a16:rowId xmlns:a16="http://schemas.microsoft.com/office/drawing/2014/main" val="10002"/>
+                  </a:ext>
+                </a:extLst>
               </a:tr>
-              <a:tr h="460247">
+              <a:tr h="320040">
                 <a:tc>
                   <a:txBody>
-                    <a:bodyPr wrap="square"/>
+                    <a:bodyPr/>
                     <a:lstStyle/>
                     <a:p>
                       <a:pPr>
                         <a:lnSpc>
-                          <a:spcPct val="125000"/>
+                          <a:spcPct val="100000"/>
                         </a:lnSpc>
                       </a:pPr>
                       <a:r>
-                        <a:rPr sz="1400">
+                        <a:rPr lang="en-PH" sz="1400">
                           <a:solidFill>
                             <a:srgbClr val="1F3752"/>
                           </a:solidFill>
@@ -5574,16 +6789,16 @@
                 </a:tc>
                 <a:tc>
                   <a:txBody>
-                    <a:bodyPr wrap="square"/>
+                    <a:bodyPr/>
                     <a:lstStyle/>
                     <a:p>
                       <a:pPr>
                         <a:lnSpc>
-                          <a:spcPct val="125000"/>
+                          <a:spcPct val="100000"/>
                         </a:lnSpc>
                       </a:pPr>
                       <a:r>
-                        <a:rPr sz="1400">
+                        <a:rPr lang="en-PH" sz="1400">
                           <a:solidFill>
                             <a:srgbClr val="4B545D"/>
                           </a:solidFill>
@@ -5601,16 +6816,16 @@
                 </a:tc>
                 <a:tc>
                   <a:txBody>
-                    <a:bodyPr wrap="square"/>
+                    <a:bodyPr/>
                     <a:lstStyle/>
                     <a:p>
                       <a:pPr>
                         <a:lnSpc>
-                          <a:spcPct val="125000"/>
+                          <a:spcPct val="100000"/>
                         </a:lnSpc>
                       </a:pPr>
                       <a:r>
-                        <a:rPr sz="1400">
+                        <a:rPr lang="en-PH" sz="1400">
                           <a:solidFill>
                             <a:srgbClr val="4B545D"/>
                           </a:solidFill>
@@ -5628,16 +6843,16 @@
                 </a:tc>
                 <a:tc>
                   <a:txBody>
-                    <a:bodyPr wrap="square"/>
+                    <a:bodyPr/>
                     <a:lstStyle/>
                     <a:p>
                       <a:pPr>
                         <a:lnSpc>
-                          <a:spcPct val="125000"/>
+                          <a:spcPct val="100000"/>
                         </a:lnSpc>
                       </a:pPr>
                       <a:r>
-                        <a:rPr sz="1400">
+                        <a:rPr lang="en-PH" sz="1400">
                           <a:solidFill>
                             <a:srgbClr val="4B545D"/>
                           </a:solidFill>
@@ -5653,20 +6868,25 @@
                     </a:solidFill>
                   </a:tcPr>
                 </a:tc>
+                <a:extLst>
+                  <a:ext uri="{0D108BD9-81ED-4DB2-BD59-A6C34878D82A}">
+                    <a16:rowId xmlns:a16="http://schemas.microsoft.com/office/drawing/2014/main" val="10003"/>
+                  </a:ext>
+                </a:extLst>
               </a:tr>
-              <a:tr h="460247">
+              <a:tr h="320040">
                 <a:tc>
                   <a:txBody>
-                    <a:bodyPr wrap="square"/>
+                    <a:bodyPr/>
                     <a:lstStyle/>
                     <a:p>
                       <a:pPr>
                         <a:lnSpc>
-                          <a:spcPct val="125000"/>
+                          <a:spcPct val="100000"/>
                         </a:lnSpc>
                       </a:pPr>
                       <a:r>
-                        <a:rPr sz="1400">
+                        <a:rPr lang="en-PH" sz="1400">
                           <a:solidFill>
                             <a:srgbClr val="1F3752"/>
                           </a:solidFill>
@@ -5684,16 +6904,16 @@
                 </a:tc>
                 <a:tc>
                   <a:txBody>
-                    <a:bodyPr wrap="square"/>
+                    <a:bodyPr/>
                     <a:lstStyle/>
                     <a:p>
                       <a:pPr>
                         <a:lnSpc>
-                          <a:spcPct val="125000"/>
+                          <a:spcPct val="100000"/>
                         </a:lnSpc>
                       </a:pPr>
                       <a:r>
-                        <a:rPr sz="1400">
+                        <a:rPr lang="en-PH" sz="1400">
                           <a:solidFill>
                             <a:srgbClr val="4B545D"/>
                           </a:solidFill>
@@ -5711,16 +6931,16 @@
                 </a:tc>
                 <a:tc>
                   <a:txBody>
-                    <a:bodyPr wrap="square"/>
+                    <a:bodyPr/>
                     <a:lstStyle/>
                     <a:p>
                       <a:pPr>
                         <a:lnSpc>
-                          <a:spcPct val="125000"/>
+                          <a:spcPct val="100000"/>
                         </a:lnSpc>
                       </a:pPr>
                       <a:r>
-                        <a:rPr sz="1400">
+                        <a:rPr lang="en-PH" sz="1400">
                           <a:solidFill>
                             <a:srgbClr val="4B545D"/>
                           </a:solidFill>
@@ -5738,16 +6958,16 @@
                 </a:tc>
                 <a:tc>
                   <a:txBody>
-                    <a:bodyPr wrap="square"/>
+                    <a:bodyPr/>
                     <a:lstStyle/>
                     <a:p>
                       <a:pPr>
                         <a:lnSpc>
-                          <a:spcPct val="125000"/>
+                          <a:spcPct val="100000"/>
                         </a:lnSpc>
                       </a:pPr>
                       <a:r>
-                        <a:rPr sz="1400">
+                        <a:rPr lang="en-PH" sz="1400">
                           <a:solidFill>
                             <a:srgbClr val="4B545D"/>
                           </a:solidFill>
@@ -5763,20 +6983,25 @@
                     </a:solidFill>
                   </a:tcPr>
                 </a:tc>
+                <a:extLst>
+                  <a:ext uri="{0D108BD9-81ED-4DB2-BD59-A6C34878D82A}">
+                    <a16:rowId xmlns:a16="http://schemas.microsoft.com/office/drawing/2014/main" val="10004"/>
+                  </a:ext>
+                </a:extLst>
               </a:tr>
-              <a:tr h="460247">
+              <a:tr h="320040">
                 <a:tc>
                   <a:txBody>
-                    <a:bodyPr wrap="square"/>
+                    <a:bodyPr/>
                     <a:lstStyle/>
                     <a:p>
                       <a:pPr>
                         <a:lnSpc>
-                          <a:spcPct val="125000"/>
+                          <a:spcPct val="100000"/>
                         </a:lnSpc>
                       </a:pPr>
                       <a:r>
-                        <a:rPr sz="1400">
+                        <a:rPr lang="en-PH" sz="1400">
                           <a:solidFill>
                             <a:srgbClr val="1F3752"/>
                           </a:solidFill>
@@ -5794,16 +7019,16 @@
                 </a:tc>
                 <a:tc>
                   <a:txBody>
-                    <a:bodyPr wrap="square"/>
+                    <a:bodyPr/>
                     <a:lstStyle/>
                     <a:p>
                       <a:pPr>
                         <a:lnSpc>
-                          <a:spcPct val="125000"/>
+                          <a:spcPct val="100000"/>
                         </a:lnSpc>
                       </a:pPr>
                       <a:r>
-                        <a:rPr sz="1400">
+                        <a:rPr lang="en-PH" sz="1400">
                           <a:solidFill>
                             <a:srgbClr val="4B545D"/>
                           </a:solidFill>
@@ -5821,16 +7046,16 @@
                 </a:tc>
                 <a:tc>
                   <a:txBody>
-                    <a:bodyPr wrap="square"/>
+                    <a:bodyPr/>
                     <a:lstStyle/>
                     <a:p>
                       <a:pPr>
                         <a:lnSpc>
-                          <a:spcPct val="125000"/>
+                          <a:spcPct val="100000"/>
                         </a:lnSpc>
                       </a:pPr>
                       <a:r>
-                        <a:rPr sz="1400">
+                        <a:rPr lang="en-PH" sz="1400">
                           <a:solidFill>
                             <a:srgbClr val="4B545D"/>
                           </a:solidFill>
@@ -5848,16 +7073,16 @@
                 </a:tc>
                 <a:tc>
                   <a:txBody>
-                    <a:bodyPr wrap="square"/>
+                    <a:bodyPr/>
                     <a:lstStyle/>
                     <a:p>
                       <a:pPr>
                         <a:lnSpc>
-                          <a:spcPct val="125000"/>
+                          <a:spcPct val="100000"/>
                         </a:lnSpc>
                       </a:pPr>
                       <a:r>
-                        <a:rPr sz="1400">
+                        <a:rPr lang="en-PH" sz="1400">
                           <a:solidFill>
                             <a:srgbClr val="4B545D"/>
                           </a:solidFill>
@@ -5873,6 +7098,11 @@
                     </a:solidFill>
                   </a:tcPr>
                 </a:tc>
+                <a:extLst>
+                  <a:ext uri="{0D108BD9-81ED-4DB2-BD59-A6C34878D82A}">
+                    <a16:rowId xmlns:a16="http://schemas.microsoft.com/office/drawing/2014/main" val="10005"/>
+                  </a:ext>
+                </a:extLst>
               </a:tr>
             </a:tbl>
           </a:graphicData>
@@ -5886,8 +7116,8 @@
         </p:nvSpPr>
         <p:spPr>
           <a:xfrm>
-            <a:off x="822960" y="5292084"/>
-            <a:ext cx="10515600" cy="983615"/>
+            <a:off x="822960" y="4114800"/>
+            <a:ext cx="10515600" cy="1304268"/>
           </a:xfrm>
           <a:prstGeom prst="rect">
             <a:avLst/>
@@ -5902,12 +7132,12 @@
           <a:p>
             <a:pPr>
               <a:lnSpc>
-                <a:spcPct val="125000"/>
+                <a:spcPct val="120000"/>
               </a:lnSpc>
               <a:spcAft>
                 <a:spcPts val="800"/>
               </a:spcAft>
-              <a:defRPr sz="1300">
+              <a:defRPr sz="1400">
                 <a:solidFill>
                   <a:srgbClr val="4B545D"/>
                 </a:solidFill>
@@ -5915,18 +7145,24 @@
               </a:defRPr>
             </a:pPr>
             <a:r>
+              <a:rPr lang="en-US" sz="1400" b="0" dirty="0">
+                <a:solidFill>
+                  <a:srgbClr val="4B545D"/>
+                </a:solidFill>
+                <a:latin typeface="DejaVu Sans"/>
+              </a:rPr>
               <a:t>•  Blocker/Highest mapped to Critical 4h; High 8h; Medium 24h; Low/Lowest 24h; unknown excluded.</a:t>
             </a:r>
           </a:p>
           <a:p>
             <a:pPr>
               <a:lnSpc>
-                <a:spcPct val="125000"/>
+                <a:spcPct val="120000"/>
               </a:lnSpc>
               <a:spcAft>
                 <a:spcPts val="800"/>
               </a:spcAft>
-              <a:defRPr sz="1100">
+              <a:defRPr sz="1400">
                 <a:solidFill>
                   <a:srgbClr val="4B545D"/>
                 </a:solidFill>
@@ -5934,18 +7170,24 @@
               </a:defRPr>
             </a:pPr>
             <a:r>
+              <a:rPr lang="en-US" sz="1400" b="0" dirty="0">
+                <a:solidFill>
+                  <a:srgbClr val="4B545D"/>
+                </a:solidFill>
+                <a:latin typeface="DejaVu Sans"/>
+              </a:rPr>
               <a:t>•  Duration is UTC wall-clock time from issue_created to issue_resolution_date; business-hour calendars and pause rules are not verified.</a:t>
             </a:r>
           </a:p>
           <a:p>
             <a:pPr>
               <a:lnSpc>
-                <a:spcPct val="125000"/>
+                <a:spcPct val="120000"/>
               </a:lnSpc>
               <a:spcAft>
                 <a:spcPts val="800"/>
               </a:spcAft>
-              <a:defRPr sz="1300">
+              <a:defRPr sz="1400">
                 <a:solidFill>
                   <a:srgbClr val="4B545D"/>
                 </a:solidFill>
@@ -5953,6 +7195,12 @@
               </a:defRPr>
             </a:pPr>
             <a:r>
+              <a:rPr lang="en-US" sz="1400" b="0" dirty="0">
+                <a:solidFill>
+                  <a:srgbClr val="4B545D"/>
+                </a:solidFill>
+                <a:latin typeface="DejaVu Sans"/>
+              </a:rPr>
               <a:t>•  Results are reference comparisons, not contractual compliance or live warnings.</a:t>
             </a:r>
           </a:p>
@@ -6026,6 +7274,86 @@
             <a:r>
               <a:t>Help Desk Ticket SLA and Volume Forecasting | Historical analysis</a:t>
             </a:r>
+          </a:p>
+        </p:txBody>
+      </p:sp>
+      <p:sp>
+        <p:nvSpPr>
+          <p:cNvPr id="50" name="Takeaway Banner"/>
+          <p:cNvSpPr/>
+          <p:nvPr/>
+        </p:nvSpPr>
+        <p:spPr>
+          <a:xfrm>
+            <a:off x="594360" y="5715000"/>
+            <a:ext cx="11003280" cy="594360"/>
+          </a:xfrm>
+          <a:prstGeom prst="roundRect">
+            <a:avLst>
+              <a:gd name="adj" fmla="val 12000"/>
+            </a:avLst>
+          </a:prstGeom>
+          <a:solidFill>
+            <a:srgbClr val="1F3752"/>
+          </a:solidFill>
+          <a:ln>
+            <a:noFill/>
+          </a:ln>
+        </p:spPr>
+        <p:txBody>
+          <a:bodyPr wrap="square" lIns="228600" tIns="45720" rIns="182880" bIns="45720" anchor="ctr">
+            <a:normAutofit/>
+          </a:bodyPr>
+          <a:lstStyle/>
+          <a:p>
+            <a:pPr algn="l"/>
+            <a:r>
+              <a:rPr lang="en-US" sz="1500" b="1" dirty="0">
+                <a:solidFill>
+                  <a:srgbClr val="8CC4F2"/>
+                </a:solidFill>
+                <a:latin typeface="DejaVu Sans"/>
+              </a:rPr>
+              <a:t>KEY TAKEAWAY  |  </a:t>
+            </a:r>
+            <a:r>
+              <a:rPr lang="en-US" sz="1500" b="0" dirty="0">
+                <a:solidFill>
+                  <a:srgbClr val="FFFFFF"/>
+                </a:solidFill>
+                <a:latin typeface="DejaVu Sans"/>
+              </a:rPr>
+              <a:t>Only 19.9% of assessed tickets met their priority reference — attainment is low across every priority.</a:t>
+            </a:r>
+          </a:p>
+        </p:txBody>
+      </p:sp>
+      <p:sp>
+        <p:nvSpPr>
+          <p:cNvPr id="51" name="Takeaway Accent"/>
+          <p:cNvSpPr/>
+          <p:nvPr/>
+        </p:nvSpPr>
+        <p:spPr>
+          <a:xfrm>
+            <a:off x="594360" y="5715000"/>
+            <a:ext cx="82296" cy="594360"/>
+          </a:xfrm>
+          <a:prstGeom prst="rect">
+            <a:avLst/>
+          </a:prstGeom>
+          <a:solidFill>
+            <a:srgbClr val="3470A8"/>
+          </a:solidFill>
+          <a:ln>
+            <a:noFill/>
+          </a:ln>
+        </p:spPr>
+        <p:txBody>
+          <a:bodyPr/>
+          <a:lstStyle/>
+          <a:p>
+            <a:endParaRPr lang="en-US"/>
           </a:p>
         </p:txBody>
       </p:sp>
@@ -6038,7 +7366,7 @@
 </file>
 
 <file path=ppt/slides/slide5.xml><?xml version="1.0" encoding="utf-8"?>
-<p:sld xmlns:a="http://schemas.openxmlformats.org/drawingml/2006/main" xmlns:p="http://schemas.openxmlformats.org/presentationml/2006/main" xmlns:r="http://schemas.openxmlformats.org/officeDocument/2006/relationships">
+<p:sld xmlns:a="http://schemas.openxmlformats.org/drawingml/2006/main" xmlns:r="http://schemas.openxmlformats.org/officeDocument/2006/relationships" xmlns:p="http://schemas.openxmlformats.org/presentationml/2006/main">
   <p:cSld>
     <p:bg>
       <p:bgPr>
@@ -6054,7 +7382,14 @@
         <p:cNvGrpSpPr/>
         <p:nvPr/>
       </p:nvGrpSpPr>
-      <p:grpSpPr/>
+      <p:grpSpPr>
+        <a:xfrm>
+          <a:off x="0" y="0"/>
+          <a:ext cx="0" cy="0"/>
+          <a:chOff x="0" y="0"/>
+          <a:chExt cx="0" cy="0"/>
+        </a:xfrm>
+      </p:grpSpPr>
       <p:sp>
         <p:nvSpPr>
           <p:cNvPr id="2" name="Rectangle 1"/>
@@ -6095,6 +7430,7 @@
           <a:lstStyle/>
           <a:p>
             <a:pPr algn="ctr"/>
+            <a:endParaRPr/>
           </a:p>
         </p:txBody>
       </p:sp>
@@ -6177,6 +7513,7 @@
           <a:lstStyle/>
           <a:p>
             <a:pPr algn="ctr"/>
+            <a:endParaRPr/>
           </a:p>
         </p:txBody>
       </p:sp>
@@ -6188,8 +7525,8 @@
         </p:nvSpPr>
         <p:spPr>
           <a:xfrm>
-            <a:off x="822960" y="1536192"/>
-            <a:ext cx="10515600" cy="815340"/>
+            <a:off x="822960" y="1463040"/>
+            <a:ext cx="10515600" cy="323486"/>
           </a:xfrm>
           <a:prstGeom prst="rect">
             <a:avLst/>
@@ -6204,12 +7541,12 @@
           <a:p>
             <a:pPr>
               <a:lnSpc>
-                <a:spcPct val="125000"/>
+                <a:spcPct val="120000"/>
               </a:lnSpc>
               <a:spcAft>
-                <a:spcPts val="1200"/>
+                <a:spcPts val="800"/>
               </a:spcAft>
-              <a:defRPr sz="1800">
+              <a:defRPr sz="1400">
                 <a:solidFill>
                   <a:srgbClr val="4B545D"/>
                 </a:solidFill>
@@ -6217,6 +7554,12 @@
               </a:defRPr>
             </a:pPr>
             <a:r>
+              <a:rPr lang="en-US" sz="1400" b="1" dirty="0">
+                <a:solidFill>
+                  <a:srgbClr val="1F3752"/>
+                </a:solidFill>
+                <a:latin typeface="DejaVu Sans"/>
+              </a:rPr>
               <a:t>•  Selected forecast model performance on the later, untouched historical test split, by horizon:</a:t>
             </a:r>
           </a:p>
@@ -6228,11 +7571,17 @@
           <p:cNvGraphicFramePr>
             <a:graphicFrameLocks noGrp="1"/>
           </p:cNvGraphicFramePr>
-          <p:nvPr/>
+          <p:nvPr>
+            <p:extLst>
+              <p:ext uri="{D42A27DB-BD31-4B8C-83A1-F6EECF244321}">
+                <p14:modId xmlns:p14="http://schemas.microsoft.com/office/powerpoint/2010/main" val="3204186206"/>
+              </p:ext>
+            </p:extLst>
+          </p:nvPr>
         </p:nvGraphicFramePr>
         <p:xfrm>
-          <a:off x="822960" y="2488692"/>
-          <a:ext cx="10515596" cy="2053336"/>
+          <a:off x="822960" y="1874520"/>
+          <a:ext cx="10515596" cy="1438148"/>
         </p:xfrm>
         <a:graphic>
           <a:graphicData uri="http://schemas.openxmlformats.org/drawingml/2006/table">
@@ -6241,18 +7590,60 @@
                 <a:tableStyleId>{5C22544A-7EE6-4342-B048-85BDC9FD1C3A}</a:tableStyleId>
               </a:tblPr>
               <a:tblGrid>
-                <a:gridCol w="1502228"/>
-                <a:gridCol w="1502228"/>
-                <a:gridCol w="1502228"/>
-                <a:gridCol w="1502228"/>
-                <a:gridCol w="1502228"/>
-                <a:gridCol w="1502228"/>
-                <a:gridCol w="1502228"/>
+                <a:gridCol w="1188720">
+                  <a:extLst>
+                    <a:ext uri="{9D8B030D-6E8A-4147-A177-3AD203B41FA5}">
+                      <a16:colId xmlns:a16="http://schemas.microsoft.com/office/drawing/2014/main" val="20000"/>
+                    </a:ext>
+                  </a:extLst>
+                </a:gridCol>
+                <a:gridCol w="2560320">
+                  <a:extLst>
+                    <a:ext uri="{9D8B030D-6E8A-4147-A177-3AD203B41FA5}">
+                      <a16:colId xmlns:a16="http://schemas.microsoft.com/office/drawing/2014/main" val="20001"/>
+                    </a:ext>
+                  </a:extLst>
+                </a:gridCol>
+                <a:gridCol w="1353312">
+                  <a:extLst>
+                    <a:ext uri="{9D8B030D-6E8A-4147-A177-3AD203B41FA5}">
+                      <a16:colId xmlns:a16="http://schemas.microsoft.com/office/drawing/2014/main" val="20002"/>
+                    </a:ext>
+                  </a:extLst>
+                </a:gridCol>
+                <a:gridCol w="1353312">
+                  <a:extLst>
+                    <a:ext uri="{9D8B030D-6E8A-4147-A177-3AD203B41FA5}">
+                      <a16:colId xmlns:a16="http://schemas.microsoft.com/office/drawing/2014/main" val="20003"/>
+                    </a:ext>
+                  </a:extLst>
+                </a:gridCol>
+                <a:gridCol w="1353312">
+                  <a:extLst>
+                    <a:ext uri="{9D8B030D-6E8A-4147-A177-3AD203B41FA5}">
+                      <a16:colId xmlns:a16="http://schemas.microsoft.com/office/drawing/2014/main" val="20004"/>
+                    </a:ext>
+                  </a:extLst>
+                </a:gridCol>
+                <a:gridCol w="1353312">
+                  <a:extLst>
+                    <a:ext uri="{9D8B030D-6E8A-4147-A177-3AD203B41FA5}">
+                      <a16:colId xmlns:a16="http://schemas.microsoft.com/office/drawing/2014/main" val="20005"/>
+                    </a:ext>
+                  </a:extLst>
+                </a:gridCol>
+                <a:gridCol w="1353308">
+                  <a:extLst>
+                    <a:ext uri="{9D8B030D-6E8A-4147-A177-3AD203B41FA5}">
+                      <a16:colId xmlns:a16="http://schemas.microsoft.com/office/drawing/2014/main" val="20006"/>
+                    </a:ext>
+                  </a:extLst>
+                </a:gridCol>
               </a:tblGrid>
-              <a:tr h="536448">
+              <a:tr h="457200">
                 <a:tc>
                   <a:txBody>
-                    <a:bodyPr wrap="square"/>
+                    <a:bodyPr/>
                     <a:lstStyle/>
                     <a:p>
                       <a:pPr>
@@ -6261,7 +7652,7 @@
                         </a:lnSpc>
                       </a:pPr>
                       <a:r>
-                        <a:rPr b="1" sz="1400">
+                        <a:rPr lang="en-US" sz="1300" b="1">
                           <a:solidFill>
                             <a:srgbClr val="FFFFFF"/>
                           </a:solidFill>
@@ -6269,6 +7660,12 @@
                         </a:rPr>
                         <a:t>Horizon</a:t>
                       </a:r>
+                      <a:endParaRPr lang="en-US" sz="1300" b="1" dirty="0">
+                        <a:solidFill>
+                          <a:srgbClr val="FFFFFF"/>
+                        </a:solidFill>
+                        <a:latin typeface="DejaVu Sans"/>
+                      </a:endParaRPr>
                     </a:p>
                   </a:txBody>
                   <a:tcPr>
@@ -6279,7 +7676,7 @@
                 </a:tc>
                 <a:tc>
                   <a:txBody>
-                    <a:bodyPr wrap="square"/>
+                    <a:bodyPr/>
                     <a:lstStyle/>
                     <a:p>
                       <a:pPr>
@@ -6288,7 +7685,7 @@
                         </a:lnSpc>
                       </a:pPr>
                       <a:r>
-                        <a:rPr b="1" sz="1400">
+                        <a:rPr lang="en-US" sz="1300" b="1">
                           <a:solidFill>
                             <a:srgbClr val="FFFFFF"/>
                           </a:solidFill>
@@ -6296,6 +7693,12 @@
                         </a:rPr>
                         <a:t>Selected model</a:t>
                       </a:r>
+                      <a:endParaRPr lang="en-US" sz="1300" b="1" dirty="0">
+                        <a:solidFill>
+                          <a:srgbClr val="FFFFFF"/>
+                        </a:solidFill>
+                        <a:latin typeface="DejaVu Sans"/>
+                      </a:endParaRPr>
                     </a:p>
                   </a:txBody>
                   <a:tcPr>
@@ -6306,7 +7709,7 @@
                 </a:tc>
                 <a:tc>
                   <a:txBody>
-                    <a:bodyPr wrap="square"/>
+                    <a:bodyPr/>
                     <a:lstStyle/>
                     <a:p>
                       <a:pPr>
@@ -6315,7 +7718,7 @@
                         </a:lnSpc>
                       </a:pPr>
                       <a:r>
-                        <a:rPr b="1" sz="1400">
+                        <a:rPr lang="en-US" sz="1300" b="1">
                           <a:solidFill>
                             <a:srgbClr val="FFFFFF"/>
                           </a:solidFill>
@@ -6323,6 +7726,12 @@
                         </a:rPr>
                         <a:t>Test MAE</a:t>
                       </a:r>
+                      <a:endParaRPr lang="en-US" sz="1300" b="1" dirty="0">
+                        <a:solidFill>
+                          <a:srgbClr val="FFFFFF"/>
+                        </a:solidFill>
+                        <a:latin typeface="DejaVu Sans"/>
+                      </a:endParaRPr>
                     </a:p>
                   </a:txBody>
                   <a:tcPr>
@@ -6333,7 +7742,7 @@
                 </a:tc>
                 <a:tc>
                   <a:txBody>
-                    <a:bodyPr wrap="square"/>
+                    <a:bodyPr/>
                     <a:lstStyle/>
                     <a:p>
                       <a:pPr>
@@ -6342,7 +7751,7 @@
                         </a:lnSpc>
                       </a:pPr>
                       <a:r>
-                        <a:rPr b="1" sz="1400">
+                        <a:rPr lang="en-US" sz="1300" b="1">
                           <a:solidFill>
                             <a:srgbClr val="FFFFFF"/>
                           </a:solidFill>
@@ -6350,6 +7759,12 @@
                         </a:rPr>
                         <a:t>Test RMSE</a:t>
                       </a:r>
+                      <a:endParaRPr lang="en-US" sz="1300" b="1" dirty="0">
+                        <a:solidFill>
+                          <a:srgbClr val="FFFFFF"/>
+                        </a:solidFill>
+                        <a:latin typeface="DejaVu Sans"/>
+                      </a:endParaRPr>
                     </a:p>
                   </a:txBody>
                   <a:tcPr>
@@ -6360,7 +7775,7 @@
                 </a:tc>
                 <a:tc>
                   <a:txBody>
-                    <a:bodyPr wrap="square"/>
+                    <a:bodyPr/>
                     <a:lstStyle/>
                     <a:p>
                       <a:pPr>
@@ -6369,7 +7784,7 @@
                         </a:lnSpc>
                       </a:pPr>
                       <a:r>
-                        <a:rPr b="1" sz="1400">
+                        <a:rPr lang="en-US" sz="1300" b="1">
                           <a:solidFill>
                             <a:srgbClr val="FFFFFF"/>
                           </a:solidFill>
@@ -6377,6 +7792,12 @@
                         </a:rPr>
                         <a:t>Test WAPE</a:t>
                       </a:r>
+                      <a:endParaRPr lang="en-US" sz="1300" b="1" dirty="0">
+                        <a:solidFill>
+                          <a:srgbClr val="FFFFFF"/>
+                        </a:solidFill>
+                        <a:latin typeface="DejaVu Sans"/>
+                      </a:endParaRPr>
                     </a:p>
                   </a:txBody>
                   <a:tcPr>
@@ -6387,7 +7808,7 @@
                 </a:tc>
                 <a:tc>
                   <a:txBody>
-                    <a:bodyPr wrap="square"/>
+                    <a:bodyPr/>
                     <a:lstStyle/>
                     <a:p>
                       <a:pPr>
@@ -6396,7 +7817,7 @@
                         </a:lnSpc>
                       </a:pPr>
                       <a:r>
-                        <a:rPr b="1" sz="1400">
+                        <a:rPr lang="en-US" sz="1300" b="1">
                           <a:solidFill>
                             <a:srgbClr val="FFFFFF"/>
                           </a:solidFill>
@@ -6404,6 +7825,12 @@
                         </a:rPr>
                         <a:t>Test sMAPE</a:t>
                       </a:r>
+                      <a:endParaRPr lang="en-US" sz="1300" b="1" dirty="0">
+                        <a:solidFill>
+                          <a:srgbClr val="FFFFFF"/>
+                        </a:solidFill>
+                        <a:latin typeface="DejaVu Sans"/>
+                      </a:endParaRPr>
                     </a:p>
                   </a:txBody>
                   <a:tcPr>
@@ -6414,7 +7841,7 @@
                 </a:tc>
                 <a:tc>
                   <a:txBody>
-                    <a:bodyPr wrap="square"/>
+                    <a:bodyPr/>
                     <a:lstStyle/>
                     <a:p>
                       <a:pPr>
@@ -6423,7 +7850,7 @@
                         </a:lnSpc>
                       </a:pPr>
                       <a:r>
-                        <a:rPr b="1" sz="1400">
+                        <a:rPr lang="en-US" sz="1300" b="1">
                           <a:solidFill>
                             <a:srgbClr val="FFFFFF"/>
                           </a:solidFill>
@@ -6431,6 +7858,12 @@
                         </a:rPr>
                         <a:t>90% coverage</a:t>
                       </a:r>
+                      <a:endParaRPr lang="en-US" sz="1300" b="1" dirty="0">
+                        <a:solidFill>
+                          <a:srgbClr val="FFFFFF"/>
+                        </a:solidFill>
+                        <a:latin typeface="DejaVu Sans"/>
+                      </a:endParaRPr>
                     </a:p>
                   </a:txBody>
                   <a:tcPr>
@@ -6439,11 +7872,16 @@
                     </a:solidFill>
                   </a:tcPr>
                 </a:tc>
+                <a:extLst>
+                  <a:ext uri="{0D108BD9-81ED-4DB2-BD59-A6C34878D82A}">
+                    <a16:rowId xmlns:a16="http://schemas.microsoft.com/office/drawing/2014/main" val="10000"/>
+                  </a:ext>
+                </a:extLst>
               </a:tr>
-              <a:tr h="980440">
+              <a:tr h="502920">
                 <a:tc>
                   <a:txBody>
-                    <a:bodyPr wrap="square"/>
+                    <a:bodyPr/>
                     <a:lstStyle/>
                     <a:p>
                       <a:pPr>
@@ -6452,7 +7890,7 @@
                         </a:lnSpc>
                       </a:pPr>
                       <a:r>
-                        <a:rPr sz="1400">
+                        <a:rPr lang="en-US" sz="1300">
                           <a:solidFill>
                             <a:srgbClr val="1F3752"/>
                           </a:solidFill>
@@ -6460,6 +7898,12 @@
                         </a:rPr>
                         <a:t>7-day</a:t>
                       </a:r>
+                      <a:endParaRPr lang="en-US" sz="1300" dirty="0">
+                        <a:solidFill>
+                          <a:srgbClr val="1F3752"/>
+                        </a:solidFill>
+                        <a:latin typeface="DejaVu Sans"/>
+                      </a:endParaRPr>
                     </a:p>
                   </a:txBody>
                   <a:tcPr>
@@ -6470,7 +7914,7 @@
                 </a:tc>
                 <a:tc>
                   <a:txBody>
-                    <a:bodyPr wrap="square"/>
+                    <a:bodyPr/>
                     <a:lstStyle/>
                     <a:p>
                       <a:pPr>
@@ -6479,7 +7923,7 @@
                         </a:lnSpc>
                       </a:pPr>
                       <a:r>
-                        <a:rPr sz="1400">
+                        <a:rPr lang="en-US" sz="1300">
                           <a:solidFill>
                             <a:srgbClr val="4B545D"/>
                           </a:solidFill>
@@ -6487,6 +7931,12 @@
                         </a:rPr>
                         <a:t>XGBoost autoregression (28-day lags)</a:t>
                       </a:r>
+                      <a:endParaRPr lang="en-US" sz="1300" dirty="0">
+                        <a:solidFill>
+                          <a:srgbClr val="4B545D"/>
+                        </a:solidFill>
+                        <a:latin typeface="DejaVu Sans"/>
+                      </a:endParaRPr>
                     </a:p>
                   </a:txBody>
                   <a:tcPr>
@@ -6497,7 +7947,7 @@
                 </a:tc>
                 <a:tc>
                   <a:txBody>
-                    <a:bodyPr wrap="square"/>
+                    <a:bodyPr/>
                     <a:lstStyle/>
                     <a:p>
                       <a:pPr>
@@ -6506,7 +7956,7 @@
                         </a:lnSpc>
                       </a:pPr>
                       <a:r>
-                        <a:rPr sz="1400">
+                        <a:rPr lang="en-US" sz="1300">
                           <a:solidFill>
                             <a:srgbClr val="4B545D"/>
                           </a:solidFill>
@@ -6514,6 +7964,12 @@
                         </a:rPr>
                         <a:t>5.05</a:t>
                       </a:r>
+                      <a:endParaRPr lang="en-US" sz="1300" dirty="0">
+                        <a:solidFill>
+                          <a:srgbClr val="4B545D"/>
+                        </a:solidFill>
+                        <a:latin typeface="DejaVu Sans"/>
+                      </a:endParaRPr>
                     </a:p>
                   </a:txBody>
                   <a:tcPr>
@@ -6524,7 +7980,7 @@
                 </a:tc>
                 <a:tc>
                   <a:txBody>
-                    <a:bodyPr wrap="square"/>
+                    <a:bodyPr/>
                     <a:lstStyle/>
                     <a:p>
                       <a:pPr>
@@ -6533,7 +7989,7 @@
                         </a:lnSpc>
                       </a:pPr>
                       <a:r>
-                        <a:rPr sz="1400">
+                        <a:rPr lang="en-US" sz="1300">
                           <a:solidFill>
                             <a:srgbClr val="4B545D"/>
                           </a:solidFill>
@@ -6541,6 +7997,12 @@
                         </a:rPr>
                         <a:t>7.72</a:t>
                       </a:r>
+                      <a:endParaRPr lang="en-US" sz="1300" dirty="0">
+                        <a:solidFill>
+                          <a:srgbClr val="4B545D"/>
+                        </a:solidFill>
+                        <a:latin typeface="DejaVu Sans"/>
+                      </a:endParaRPr>
                     </a:p>
                   </a:txBody>
                   <a:tcPr>
@@ -6551,7 +8013,7 @@
                 </a:tc>
                 <a:tc>
                   <a:txBody>
-                    <a:bodyPr wrap="square"/>
+                    <a:bodyPr/>
                     <a:lstStyle/>
                     <a:p>
                       <a:pPr>
@@ -6560,7 +8022,7 @@
                         </a:lnSpc>
                       </a:pPr>
                       <a:r>
-                        <a:rPr sz="1400">
+                        <a:rPr lang="en-US" sz="1300">
                           <a:solidFill>
                             <a:srgbClr val="4B545D"/>
                           </a:solidFill>
@@ -6568,6 +8030,12 @@
                         </a:rPr>
                         <a:t>30.4%</a:t>
                       </a:r>
+                      <a:endParaRPr lang="en-US" sz="1300" dirty="0">
+                        <a:solidFill>
+                          <a:srgbClr val="4B545D"/>
+                        </a:solidFill>
+                        <a:latin typeface="DejaVu Sans"/>
+                      </a:endParaRPr>
                     </a:p>
                   </a:txBody>
                   <a:tcPr>
@@ -6578,7 +8046,7 @@
                 </a:tc>
                 <a:tc>
                   <a:txBody>
-                    <a:bodyPr wrap="square"/>
+                    <a:bodyPr/>
                     <a:lstStyle/>
                     <a:p>
                       <a:pPr>
@@ -6587,7 +8055,7 @@
                         </a:lnSpc>
                       </a:pPr>
                       <a:r>
-                        <a:rPr sz="1400">
+                        <a:rPr lang="en-US" sz="1300">
                           <a:solidFill>
                             <a:srgbClr val="4B545D"/>
                           </a:solidFill>
@@ -6595,6 +8063,12 @@
                         </a:rPr>
                         <a:t>49.0%</a:t>
                       </a:r>
+                      <a:endParaRPr lang="en-US" sz="1300" dirty="0">
+                        <a:solidFill>
+                          <a:srgbClr val="4B545D"/>
+                        </a:solidFill>
+                        <a:latin typeface="DejaVu Sans"/>
+                      </a:endParaRPr>
                     </a:p>
                   </a:txBody>
                   <a:tcPr>
@@ -6605,7 +8079,7 @@
                 </a:tc>
                 <a:tc>
                   <a:txBody>
-                    <a:bodyPr wrap="square"/>
+                    <a:bodyPr/>
                     <a:lstStyle/>
                     <a:p>
                       <a:pPr>
@@ -6614,7 +8088,7 @@
                         </a:lnSpc>
                       </a:pPr>
                       <a:r>
-                        <a:rPr sz="1400">
+                        <a:rPr lang="en-US" sz="1300">
                           <a:solidFill>
                             <a:srgbClr val="4B545D"/>
                           </a:solidFill>
@@ -6622,6 +8096,12 @@
                         </a:rPr>
                         <a:t>86.6%</a:t>
                       </a:r>
+                      <a:endParaRPr lang="en-US" sz="1300" dirty="0">
+                        <a:solidFill>
+                          <a:srgbClr val="4B545D"/>
+                        </a:solidFill>
+                        <a:latin typeface="DejaVu Sans"/>
+                      </a:endParaRPr>
                     </a:p>
                   </a:txBody>
                   <a:tcPr>
@@ -6630,11 +8110,16 @@
                     </a:solidFill>
                   </a:tcPr>
                 </a:tc>
+                <a:extLst>
+                  <a:ext uri="{0D108BD9-81ED-4DB2-BD59-A6C34878D82A}">
+                    <a16:rowId xmlns:a16="http://schemas.microsoft.com/office/drawing/2014/main" val="10001"/>
+                  </a:ext>
+                </a:extLst>
               </a:tr>
-              <a:tr h="536448">
+              <a:tr h="320040">
                 <a:tc>
                   <a:txBody>
-                    <a:bodyPr wrap="square"/>
+                    <a:bodyPr/>
                     <a:lstStyle/>
                     <a:p>
                       <a:pPr>
@@ -6643,7 +8128,7 @@
                         </a:lnSpc>
                       </a:pPr>
                       <a:r>
-                        <a:rPr sz="1400">
+                        <a:rPr lang="en-US" sz="1300">
                           <a:solidFill>
                             <a:srgbClr val="1F3752"/>
                           </a:solidFill>
@@ -6651,6 +8136,12 @@
                         </a:rPr>
                         <a:t>30-day</a:t>
                       </a:r>
+                      <a:endParaRPr lang="en-US" sz="1300" dirty="0">
+                        <a:solidFill>
+                          <a:srgbClr val="1F3752"/>
+                        </a:solidFill>
+                        <a:latin typeface="DejaVu Sans"/>
+                      </a:endParaRPr>
                     </a:p>
                   </a:txBody>
                   <a:tcPr>
@@ -6661,7 +8152,7 @@
                 </a:tc>
                 <a:tc>
                   <a:txBody>
-                    <a:bodyPr wrap="square"/>
+                    <a:bodyPr/>
                     <a:lstStyle/>
                     <a:p>
                       <a:pPr>
@@ -6670,7 +8161,7 @@
                         </a:lnSpc>
                       </a:pPr>
                       <a:r>
-                        <a:rPr sz="1400">
+                        <a:rPr lang="en-US" sz="1300">
                           <a:solidFill>
                             <a:srgbClr val="4B545D"/>
                           </a:solidFill>
@@ -6678,6 +8169,12 @@
                         </a:rPr>
                         <a:t>ETS (weekly additive)</a:t>
                       </a:r>
+                      <a:endParaRPr lang="en-US" sz="1300" dirty="0">
+                        <a:solidFill>
+                          <a:srgbClr val="4B545D"/>
+                        </a:solidFill>
+                        <a:latin typeface="DejaVu Sans"/>
+                      </a:endParaRPr>
                     </a:p>
                   </a:txBody>
                   <a:tcPr>
@@ -6688,7 +8185,7 @@
                 </a:tc>
                 <a:tc>
                   <a:txBody>
-                    <a:bodyPr wrap="square"/>
+                    <a:bodyPr/>
                     <a:lstStyle/>
                     <a:p>
                       <a:pPr>
@@ -6697,7 +8194,7 @@
                         </a:lnSpc>
                       </a:pPr>
                       <a:r>
-                        <a:rPr sz="1400">
+                        <a:rPr lang="en-US" sz="1300">
                           <a:solidFill>
                             <a:srgbClr val="4B545D"/>
                           </a:solidFill>
@@ -6705,6 +8202,12 @@
                         </a:rPr>
                         <a:t>4.67</a:t>
                       </a:r>
+                      <a:endParaRPr lang="en-US" sz="1300" dirty="0">
+                        <a:solidFill>
+                          <a:srgbClr val="4B545D"/>
+                        </a:solidFill>
+                        <a:latin typeface="DejaVu Sans"/>
+                      </a:endParaRPr>
                     </a:p>
                   </a:txBody>
                   <a:tcPr>
@@ -6715,7 +8218,7 @@
                 </a:tc>
                 <a:tc>
                   <a:txBody>
-                    <a:bodyPr wrap="square"/>
+                    <a:bodyPr/>
                     <a:lstStyle/>
                     <a:p>
                       <a:pPr>
@@ -6724,7 +8227,7 @@
                         </a:lnSpc>
                       </a:pPr>
                       <a:r>
-                        <a:rPr sz="1400">
+                        <a:rPr lang="en-US" sz="1300">
                           <a:solidFill>
                             <a:srgbClr val="4B545D"/>
                           </a:solidFill>
@@ -6732,6 +8235,12 @@
                         </a:rPr>
                         <a:t>7.20</a:t>
                       </a:r>
+                      <a:endParaRPr lang="en-US" sz="1300" dirty="0">
+                        <a:solidFill>
+                          <a:srgbClr val="4B545D"/>
+                        </a:solidFill>
+                        <a:latin typeface="DejaVu Sans"/>
+                      </a:endParaRPr>
                     </a:p>
                   </a:txBody>
                   <a:tcPr>
@@ -6742,7 +8251,7 @@
                 </a:tc>
                 <a:tc>
                   <a:txBody>
-                    <a:bodyPr wrap="square"/>
+                    <a:bodyPr/>
                     <a:lstStyle/>
                     <a:p>
                       <a:pPr>
@@ -6751,7 +8260,7 @@
                         </a:lnSpc>
                       </a:pPr>
                       <a:r>
-                        <a:rPr sz="1400">
+                        <a:rPr lang="en-US" sz="1300">
                           <a:solidFill>
                             <a:srgbClr val="4B545D"/>
                           </a:solidFill>
@@ -6759,6 +8268,12 @@
                         </a:rPr>
                         <a:t>27.5%</a:t>
                       </a:r>
+                      <a:endParaRPr lang="en-US" sz="1300" dirty="0">
+                        <a:solidFill>
+                          <a:srgbClr val="4B545D"/>
+                        </a:solidFill>
+                        <a:latin typeface="DejaVu Sans"/>
+                      </a:endParaRPr>
                     </a:p>
                   </a:txBody>
                   <a:tcPr>
@@ -6769,7 +8284,7 @@
                 </a:tc>
                 <a:tc>
                   <a:txBody>
-                    <a:bodyPr wrap="square"/>
+                    <a:bodyPr/>
                     <a:lstStyle/>
                     <a:p>
                       <a:pPr>
@@ -6778,7 +8293,7 @@
                         </a:lnSpc>
                       </a:pPr>
                       <a:r>
-                        <a:rPr sz="1400">
+                        <a:rPr lang="en-US" sz="1300">
                           <a:solidFill>
                             <a:srgbClr val="4B545D"/>
                           </a:solidFill>
@@ -6786,6 +8301,12 @@
                         </a:rPr>
                         <a:t>41.3%</a:t>
                       </a:r>
+                      <a:endParaRPr lang="en-US" sz="1300" dirty="0">
+                        <a:solidFill>
+                          <a:srgbClr val="4B545D"/>
+                        </a:solidFill>
+                        <a:latin typeface="DejaVu Sans"/>
+                      </a:endParaRPr>
                     </a:p>
                   </a:txBody>
                   <a:tcPr>
@@ -6796,7 +8317,7 @@
                 </a:tc>
                 <a:tc>
                   <a:txBody>
-                    <a:bodyPr wrap="square"/>
+                    <a:bodyPr/>
                     <a:lstStyle/>
                     <a:p>
                       <a:pPr>
@@ -6805,7 +8326,7 @@
                         </a:lnSpc>
                       </a:pPr>
                       <a:r>
-                        <a:rPr sz="1400">
+                        <a:rPr lang="en-US" sz="1300">
                           <a:solidFill>
                             <a:srgbClr val="4B545D"/>
                           </a:solidFill>
@@ -6813,6 +8334,12 @@
                         </a:rPr>
                         <a:t>87.7%</a:t>
                       </a:r>
+                      <a:endParaRPr lang="en-US" sz="1300" dirty="0">
+                        <a:solidFill>
+                          <a:srgbClr val="4B545D"/>
+                        </a:solidFill>
+                        <a:latin typeface="DejaVu Sans"/>
+                      </a:endParaRPr>
                     </a:p>
                   </a:txBody>
                   <a:tcPr>
@@ -6821,6 +8348,11 @@
                     </a:solidFill>
                   </a:tcPr>
                 </a:tc>
+                <a:extLst>
+                  <a:ext uri="{0D108BD9-81ED-4DB2-BD59-A6C34878D82A}">
+                    <a16:rowId xmlns:a16="http://schemas.microsoft.com/office/drawing/2014/main" val="10002"/>
+                  </a:ext>
+                </a:extLst>
               </a:tr>
             </a:tbl>
           </a:graphicData>
@@ -6834,8 +8366,8 @@
         </p:nvSpPr>
         <p:spPr>
           <a:xfrm>
-            <a:off x="822960" y="4679188"/>
-            <a:ext cx="10515600" cy="1529715"/>
+            <a:off x="822960" y="3246120"/>
+            <a:ext cx="10515600" cy="1923925"/>
           </a:xfrm>
           <a:prstGeom prst="rect">
             <a:avLst/>
@@ -6850,12 +8382,12 @@
           <a:p>
             <a:pPr>
               <a:lnSpc>
-                <a:spcPct val="125000"/>
+                <a:spcPct val="120000"/>
               </a:lnSpc>
               <a:spcAft>
                 <a:spcPts val="800"/>
               </a:spcAft>
-              <a:defRPr sz="1300">
+              <a:defRPr sz="1400">
                 <a:solidFill>
                   <a:srgbClr val="4B545D"/>
                 </a:solidFill>
@@ -6863,18 +8395,33 @@
               </a:defRPr>
             </a:pPr>
             <a:r>
-              <a:t>•  Data scale: 66,691 source rows; 27,348 scoped Ticket records; 2,628 calendar days (2016-01-03 to 2023-03-14).</a:t>
+              <a:rPr lang="en-US" sz="1400" b="1" dirty="0">
+                <a:solidFill>
+                  <a:srgbClr val="1F3752"/>
+                </a:solidFill>
+                <a:latin typeface="DejaVu Sans"/>
+              </a:rPr>
+              <a:t>•  Data scale:</a:t>
+            </a:r>
+            <a:r>
+              <a:rPr lang="en-US" sz="1400" b="0" dirty="0">
+                <a:solidFill>
+                  <a:srgbClr val="4B545D"/>
+                </a:solidFill>
+                <a:latin typeface="DejaVu Sans"/>
+              </a:rPr>
+              <a:t> 66,691 source rows; 27,348 scoped Ticket records; 2,628 calendar days (2016-01-03 to 2023-03-14).</a:t>
             </a:r>
           </a:p>
           <a:p>
             <a:pPr>
               <a:lnSpc>
-                <a:spcPct val="125000"/>
+                <a:spcPct val="120000"/>
               </a:lnSpc>
               <a:spcAft>
                 <a:spcPts val="800"/>
               </a:spcAft>
-              <a:defRPr sz="1300">
+              <a:defRPr sz="1400">
                 <a:solidFill>
                   <a:srgbClr val="4B545D"/>
                 </a:solidFill>
@@ -6882,18 +8429,24 @@
               </a:defRPr>
             </a:pPr>
             <a:r>
+              <a:rPr lang="en-US" sz="1400" b="0" dirty="0">
+                <a:solidFill>
+                  <a:srgbClr val="4B545D"/>
+                </a:solidFill>
+                <a:latin typeface="DejaVu Sans"/>
+              </a:rPr>
               <a:t>•  344 dates (13.1%) have no Ticket rows, treated as zero under an unverified coverage assumption.</a:t>
             </a:r>
           </a:p>
           <a:p>
             <a:pPr>
               <a:lnSpc>
-                <a:spcPct val="125000"/>
+                <a:spcPct val="120000"/>
               </a:lnSpc>
               <a:spcAft>
                 <a:spcPts val="800"/>
               </a:spcAft>
-              <a:defRPr sz="1300">
+              <a:defRPr sz="1400">
                 <a:solidFill>
                   <a:srgbClr val="4B545D"/>
                 </a:solidFill>
@@ -6901,18 +8454,33 @@
               </a:defRPr>
             </a:pPr>
             <a:r>
-              <a:t>•  Retrospective reference attainment overall: 3,333 / 16,735 assessed tickets (19.9%).</a:t>
+              <a:rPr lang="en-US" sz="1400" b="1" dirty="0">
+                <a:solidFill>
+                  <a:srgbClr val="1F3752"/>
+                </a:solidFill>
+                <a:latin typeface="DejaVu Sans"/>
+              </a:rPr>
+              <a:t>•  Retrospective reference attainment overall:</a:t>
+            </a:r>
+            <a:r>
+              <a:rPr lang="en-US" sz="1400" b="0" dirty="0">
+                <a:solidFill>
+                  <a:srgbClr val="4B545D"/>
+                </a:solidFill>
+                <a:latin typeface="DejaVu Sans"/>
+              </a:rPr>
+              <a:t> 3,333 / 16,735 assessed tickets (19.9%).</a:t>
             </a:r>
           </a:p>
           <a:p>
             <a:pPr>
               <a:lnSpc>
-                <a:spcPct val="125000"/>
+                <a:spcPct val="120000"/>
               </a:lnSpc>
               <a:spcAft>
                 <a:spcPts val="800"/>
               </a:spcAft>
-              <a:defRPr sz="1300">
+              <a:defRPr sz="1400">
                 <a:solidFill>
                   <a:srgbClr val="4B545D"/>
                 </a:solidFill>
@@ -6920,7 +8488,22 @@
               </a:defRPr>
             </a:pPr>
             <a:r>
-              <a:t>•  Feature reduction: 10/34 training-only MI-selected features; PCA used 26 components for 95% of target-related variance.</a:t>
+              <a:rPr lang="en-US" sz="1400" b="1" dirty="0">
+                <a:solidFill>
+                  <a:srgbClr val="1F3752"/>
+                </a:solidFill>
+                <a:latin typeface="DejaVu Sans"/>
+              </a:rPr>
+              <a:t>•  Feature reduction:</a:t>
+            </a:r>
+            <a:r>
+              <a:rPr lang="en-US" sz="1400" b="0" dirty="0">
+                <a:solidFill>
+                  <a:srgbClr val="4B545D"/>
+                </a:solidFill>
+                <a:latin typeface="DejaVu Sans"/>
+              </a:rPr>
+              <a:t> 10/34 training-only MI-selected features; PCA used 26 components for 95% of target-related variance.</a:t>
             </a:r>
           </a:p>
         </p:txBody>
@@ -6993,6 +8576,86 @@
             <a:r>
               <a:t>Help Desk Ticket SLA and Volume Forecasting | Historical analysis</a:t>
             </a:r>
+          </a:p>
+        </p:txBody>
+      </p:sp>
+      <p:sp>
+        <p:nvSpPr>
+          <p:cNvPr id="50" name="Takeaway Banner"/>
+          <p:cNvSpPr/>
+          <p:nvPr/>
+        </p:nvSpPr>
+        <p:spPr>
+          <a:xfrm>
+            <a:off x="594360" y="5715000"/>
+            <a:ext cx="11003280" cy="594360"/>
+          </a:xfrm>
+          <a:prstGeom prst="roundRect">
+            <a:avLst>
+              <a:gd name="adj" fmla="val 12000"/>
+            </a:avLst>
+          </a:prstGeom>
+          <a:solidFill>
+            <a:srgbClr val="1F3752"/>
+          </a:solidFill>
+          <a:ln>
+            <a:noFill/>
+          </a:ln>
+        </p:spPr>
+        <p:txBody>
+          <a:bodyPr wrap="square" lIns="228600" tIns="45720" rIns="182880" bIns="45720" anchor="ctr">
+            <a:normAutofit/>
+          </a:bodyPr>
+          <a:lstStyle/>
+          <a:p>
+            <a:pPr algn="l"/>
+            <a:r>
+              <a:rPr lang="en-US" sz="1500" b="1" dirty="0">
+                <a:solidFill>
+                  <a:srgbClr val="8CC4F2"/>
+                </a:solidFill>
+                <a:latin typeface="DejaVu Sans"/>
+              </a:rPr>
+              <a:t>KEY TAKEAWAY  |  </a:t>
+            </a:r>
+            <a:r>
+              <a:rPr lang="en-US" sz="1500" b="0" dirty="0">
+                <a:solidFill>
+                  <a:srgbClr val="FFFFFF"/>
+                </a:solidFill>
+                <a:latin typeface="DejaVu Sans"/>
+              </a:rPr>
+              <a:t>Forecasts miss by about 5 tickets/day with ~87% interval coverage, while SLA attainment sits at 19.9%.</a:t>
+            </a:r>
+          </a:p>
+        </p:txBody>
+      </p:sp>
+      <p:sp>
+        <p:nvSpPr>
+          <p:cNvPr id="51" name="Takeaway Accent"/>
+          <p:cNvSpPr/>
+          <p:nvPr/>
+        </p:nvSpPr>
+        <p:spPr>
+          <a:xfrm>
+            <a:off x="594360" y="5715000"/>
+            <a:ext cx="82296" cy="594360"/>
+          </a:xfrm>
+          <a:prstGeom prst="rect">
+            <a:avLst/>
+          </a:prstGeom>
+          <a:solidFill>
+            <a:srgbClr val="3470A8"/>
+          </a:solidFill>
+          <a:ln>
+            <a:noFill/>
+          </a:ln>
+        </p:spPr>
+        <p:txBody>
+          <a:bodyPr/>
+          <a:lstStyle/>
+          <a:p>
+            <a:endParaRPr lang="en-US"/>
           </a:p>
         </p:txBody>
       </p:sp>
@@ -7005,7 +8668,7 @@
 </file>
 
 <file path=ppt/slides/slide6.xml><?xml version="1.0" encoding="utf-8"?>
-<p:sld xmlns:a="http://schemas.openxmlformats.org/drawingml/2006/main" xmlns:p="http://schemas.openxmlformats.org/presentationml/2006/main" xmlns:r="http://schemas.openxmlformats.org/officeDocument/2006/relationships">
+<p:sld xmlns:a="http://schemas.openxmlformats.org/drawingml/2006/main" xmlns:r="http://schemas.openxmlformats.org/officeDocument/2006/relationships" xmlns:p="http://schemas.openxmlformats.org/presentationml/2006/main">
   <p:cSld>
     <p:bg>
       <p:bgPr>
@@ -7021,7 +8684,14 @@
         <p:cNvGrpSpPr/>
         <p:nvPr/>
       </p:nvGrpSpPr>
-      <p:grpSpPr/>
+      <p:grpSpPr>
+        <a:xfrm>
+          <a:off x="0" y="0"/>
+          <a:ext cx="0" cy="0"/>
+          <a:chOff x="0" y="0"/>
+          <a:chExt cx="0" cy="0"/>
+        </a:xfrm>
+      </p:grpSpPr>
       <p:sp>
         <p:nvSpPr>
           <p:cNvPr id="2" name="Rectangle 1"/>
@@ -7062,6 +8732,7 @@
           <a:lstStyle/>
           <a:p>
             <a:pPr algn="ctr"/>
+            <a:endParaRPr/>
           </a:p>
         </p:txBody>
       </p:sp>
@@ -7144,6 +8815,7 @@
           <a:lstStyle/>
           <a:p>
             <a:pPr algn="ctr"/>
+            <a:endParaRPr/>
           </a:p>
         </p:txBody>
       </p:sp>
@@ -7155,8 +8827,8 @@
         </p:nvSpPr>
         <p:spPr>
           <a:xfrm>
-            <a:off x="822960" y="1536192"/>
-            <a:ext cx="10515600" cy="815340"/>
+            <a:off x="822960" y="1463040"/>
+            <a:ext cx="10515600" cy="640080"/>
           </a:xfrm>
           <a:prstGeom prst="rect">
             <a:avLst/>
@@ -7171,12 +8843,12 @@
           <a:p>
             <a:pPr>
               <a:lnSpc>
-                <a:spcPct val="125000"/>
+                <a:spcPct val="120000"/>
               </a:lnSpc>
               <a:spcAft>
-                <a:spcPts val="1200"/>
+                <a:spcPts val="800"/>
               </a:spcAft>
-              <a:defRPr sz="1800">
+              <a:defRPr sz="1500">
                 <a:solidFill>
                   <a:srgbClr val="4B545D"/>
                 </a:solidFill>
@@ -7184,6 +8856,12 @@
               </a:defRPr>
             </a:pPr>
             <a:r>
+              <a:rPr lang="en-US" sz="1500" b="1" dirty="0">
+                <a:solidFill>
+                  <a:srgbClr val="1F3752"/>
+                </a:solidFill>
+                <a:latin typeface="DejaVu Sans"/>
+              </a:rPr>
               <a:t>•  Eight notebooks, one canonical output/issue_helpdesk/ folder, then decks/report/app read from it:</a:t>
             </a:r>
           </a:p>
@@ -7191,7 +8869,7 @@
       </p:sp>
       <p:pic>
         <p:nvPicPr>
-          <p:cNvPr id="6" name="Picture 5" descr="process_flow_diagram.png"/>
+          <p:cNvPr id="6" name="Picture 5" descr="Process flow diagram: eight notebooks write to one canonical output folder that feeds the decks, report and app"/>
           <p:cNvPicPr>
             <a:picLocks noChangeAspect="1"/>
           </p:cNvPicPr>
@@ -7205,8 +8883,8 @@
         </p:blipFill>
         <p:spPr>
           <a:xfrm>
-            <a:off x="2797195" y="2488692"/>
-            <a:ext cx="6597304" cy="3311524"/>
+            <a:off x="3062875" y="2148840"/>
+            <a:ext cx="6066250" cy="3044952"/>
           </a:xfrm>
           <a:prstGeom prst="rect">
             <a:avLst/>
@@ -7221,8 +8899,8 @@
         </p:nvSpPr>
         <p:spPr>
           <a:xfrm>
-            <a:off x="822960" y="5937376"/>
-            <a:ext cx="10515600" cy="399415"/>
+            <a:off x="822960" y="5239512"/>
+            <a:ext cx="10515600" cy="306944"/>
           </a:xfrm>
           <a:prstGeom prst="rect">
             <a:avLst/>
@@ -7237,19 +8915,25 @@
           <a:p>
             <a:pPr>
               <a:lnSpc>
-                <a:spcPct val="125000"/>
+                <a:spcPct val="120000"/>
               </a:lnSpc>
               <a:spcAft>
                 <a:spcPts val="800"/>
               </a:spcAft>
-              <a:defRPr sz="1300">
-                <a:solidFill>
-                  <a:srgbClr val="4B545D"/>
+              <a:defRPr sz="1300" i="1">
+                <a:solidFill>
+                  <a:srgbClr val="6B7580"/>
                 </a:solidFill>
                 <a:latin typeface="DejaVu Sans"/>
               </a:defRPr>
             </a:pPr>
             <a:r>
+              <a:rPr lang="en-US" sz="1300" i="1" dirty="0">
+                <a:solidFill>
+                  <a:srgbClr val="6B7580"/>
+                </a:solidFill>
+                <a:latin typeface="DejaVu Sans"/>
+              </a:rPr>
               <a:t>•  Full step-by-step mapping with exact function and file names: docs/process_flow.md.</a:t>
             </a:r>
           </a:p>
@@ -7323,6 +9007,86 @@
             <a:r>
               <a:t>Help Desk Ticket SLA and Volume Forecasting | Historical analysis</a:t>
             </a:r>
+          </a:p>
+        </p:txBody>
+      </p:sp>
+      <p:sp>
+        <p:nvSpPr>
+          <p:cNvPr id="50" name="Takeaway Banner"/>
+          <p:cNvSpPr/>
+          <p:nvPr/>
+        </p:nvSpPr>
+        <p:spPr>
+          <a:xfrm>
+            <a:off x="594360" y="5715000"/>
+            <a:ext cx="11003280" cy="594360"/>
+          </a:xfrm>
+          <a:prstGeom prst="roundRect">
+            <a:avLst>
+              <a:gd name="adj" fmla="val 12000"/>
+            </a:avLst>
+          </a:prstGeom>
+          <a:solidFill>
+            <a:srgbClr val="1F3752"/>
+          </a:solidFill>
+          <a:ln>
+            <a:noFill/>
+          </a:ln>
+        </p:spPr>
+        <p:txBody>
+          <a:bodyPr wrap="square" lIns="228600" tIns="45720" rIns="182880" bIns="45720" anchor="ctr">
+            <a:normAutofit/>
+          </a:bodyPr>
+          <a:lstStyle/>
+          <a:p>
+            <a:pPr algn="l"/>
+            <a:r>
+              <a:rPr lang="en-US" sz="1500" b="1" dirty="0">
+                <a:solidFill>
+                  <a:srgbClr val="8CC4F2"/>
+                </a:solidFill>
+                <a:latin typeface="DejaVu Sans"/>
+              </a:rPr>
+              <a:t>KEY TAKEAWAY  |  </a:t>
+            </a:r>
+            <a:r>
+              <a:rPr lang="en-US" sz="1500" b="0" dirty="0">
+                <a:solidFill>
+                  <a:srgbClr val="FFFFFF"/>
+                </a:solidFill>
+                <a:latin typeface="DejaVu Sans"/>
+              </a:rPr>
+              <a:t>A single reproducible pipeline of eight notebooks feeds every deck, report and app output.</a:t>
+            </a:r>
+          </a:p>
+        </p:txBody>
+      </p:sp>
+      <p:sp>
+        <p:nvSpPr>
+          <p:cNvPr id="51" name="Takeaway Accent"/>
+          <p:cNvSpPr/>
+          <p:nvPr/>
+        </p:nvSpPr>
+        <p:spPr>
+          <a:xfrm>
+            <a:off x="594360" y="5715000"/>
+            <a:ext cx="82296" cy="594360"/>
+          </a:xfrm>
+          <a:prstGeom prst="rect">
+            <a:avLst/>
+          </a:prstGeom>
+          <a:solidFill>
+            <a:srgbClr val="3470A8"/>
+          </a:solidFill>
+          <a:ln>
+            <a:noFill/>
+          </a:ln>
+        </p:spPr>
+        <p:txBody>
+          <a:bodyPr/>
+          <a:lstStyle/>
+          <a:p>
+            <a:endParaRPr lang="en-US"/>
           </a:p>
         </p:txBody>
       </p:sp>
@@ -7335,7 +9099,7 @@
 </file>
 
 <file path=ppt/slides/slide7.xml><?xml version="1.0" encoding="utf-8"?>
-<p:sld xmlns:a="http://schemas.openxmlformats.org/drawingml/2006/main" xmlns:p="http://schemas.openxmlformats.org/presentationml/2006/main" xmlns:r="http://schemas.openxmlformats.org/officeDocument/2006/relationships">
+<p:sld xmlns:a="http://schemas.openxmlformats.org/drawingml/2006/main" xmlns:r="http://schemas.openxmlformats.org/officeDocument/2006/relationships" xmlns:p="http://schemas.openxmlformats.org/presentationml/2006/main">
   <p:cSld>
     <p:bg>
       <p:bgPr>
@@ -7351,7 +9115,14 @@
         <p:cNvGrpSpPr/>
         <p:nvPr/>
       </p:nvGrpSpPr>
-      <p:grpSpPr/>
+      <p:grpSpPr>
+        <a:xfrm>
+          <a:off x="0" y="0"/>
+          <a:ext cx="0" cy="0"/>
+          <a:chOff x="0" y="0"/>
+          <a:chExt cx="0" cy="0"/>
+        </a:xfrm>
+      </p:grpSpPr>
       <p:sp>
         <p:nvSpPr>
           <p:cNvPr id="2" name="Rectangle 1"/>
@@ -7392,6 +9163,7 @@
           <a:lstStyle/>
           <a:p>
             <a:pPr algn="ctr"/>
+            <a:endParaRPr/>
           </a:p>
         </p:txBody>
       </p:sp>
@@ -7474,6 +9246,7 @@
           <a:lstStyle/>
           <a:p>
             <a:pPr algn="ctr"/>
+            <a:endParaRPr/>
           </a:p>
         </p:txBody>
       </p:sp>
@@ -7485,8 +9258,8 @@
         </p:nvSpPr>
         <p:spPr>
           <a:xfrm>
-            <a:off x="822960" y="1536192"/>
-            <a:ext cx="10515600" cy="1837689"/>
+            <a:off x="822960" y="1463040"/>
+            <a:ext cx="10515600" cy="2135328"/>
           </a:xfrm>
           <a:prstGeom prst="rect">
             <a:avLst/>
@@ -7501,12 +9274,12 @@
           <a:p>
             <a:pPr>
               <a:lnSpc>
-                <a:spcPct val="125000"/>
+                <a:spcPct val="120000"/>
               </a:lnSpc>
               <a:spcAft>
                 <a:spcPts val="800"/>
               </a:spcAft>
-              <a:defRPr sz="1300">
+              <a:defRPr sz="1500">
                 <a:solidFill>
                   <a:srgbClr val="4B545D"/>
                 </a:solidFill>
@@ -7514,18 +9287,33 @@
               </a:defRPr>
             </a:pPr>
             <a:r>
-              <a:t>•  Target: daily counts of exact Ticket records; UTC calendar.</a:t>
+              <a:rPr lang="en-US" sz="1500" b="1" dirty="0">
+                <a:solidFill>
+                  <a:srgbClr val="1F3752"/>
+                </a:solidFill>
+                <a:latin typeface="DejaVu Sans"/>
+              </a:rPr>
+              <a:t>•  Target:</a:t>
+            </a:r>
+            <a:r>
+              <a:rPr lang="en-US" sz="1500" b="0" dirty="0">
+                <a:solidFill>
+                  <a:srgbClr val="4B545D"/>
+                </a:solidFill>
+                <a:latin typeface="DejaVu Sans"/>
+              </a:rPr>
+              <a:t> daily counts of exact Ticket records; UTC calendar.</a:t>
             </a:r>
           </a:p>
           <a:p>
             <a:pPr>
               <a:lnSpc>
-                <a:spcPct val="125000"/>
+                <a:spcPct val="120000"/>
               </a:lnSpc>
               <a:spcAft>
                 <a:spcPts val="800"/>
               </a:spcAft>
-              <a:defRPr sz="1300">
+              <a:defRPr sz="1500">
                 <a:solidFill>
                   <a:srgbClr val="4B545D"/>
                 </a:solidFill>
@@ -7533,18 +9321,24 @@
               </a:defRPr>
             </a:pPr>
             <a:r>
+              <a:rPr lang="en-US" sz="1500" b="0" dirty="0">
+                <a:solidFill>
+                  <a:srgbClr val="4B545D"/>
+                </a:solidFill>
+                <a:latin typeface="DejaVu Sans"/>
+              </a:rPr>
               <a:t>•  Separate 7- and 30-day expanding-window forecasts; the month horizon predicts daily counts, not one monthly total.</a:t>
             </a:r>
           </a:p>
           <a:p>
             <a:pPr>
               <a:lnSpc>
-                <a:spcPct val="125000"/>
+                <a:spcPct val="120000"/>
               </a:lnSpc>
               <a:spcAft>
                 <a:spcPts val="800"/>
               </a:spcAft>
-              <a:defRPr sz="1300">
+              <a:defRPr sz="1500">
                 <a:solidFill>
                   <a:srgbClr val="4B545D"/>
                 </a:solidFill>
@@ -7552,18 +9346,33 @@
               </a:defRPr>
             </a:pPr>
             <a:r>
-              <a:t>•  30-day experiment: 48 validation origins; 48 later test origins.</a:t>
+              <a:rPr lang="en-US" sz="1500" b="1" dirty="0">
+                <a:solidFill>
+                  <a:srgbClr val="1F3752"/>
+                </a:solidFill>
+                <a:latin typeface="DejaVu Sans"/>
+              </a:rPr>
+              <a:t>•  30-day experiment:</a:t>
+            </a:r>
+            <a:r>
+              <a:rPr lang="en-US" sz="1500" b="0" dirty="0">
+                <a:solidFill>
+                  <a:srgbClr val="4B545D"/>
+                </a:solidFill>
+                <a:latin typeface="DejaVu Sans"/>
+              </a:rPr>
+              <a:t> 48 validation origins; 48 later test origins.</a:t>
             </a:r>
           </a:p>
           <a:p>
             <a:pPr>
               <a:lnSpc>
-                <a:spcPct val="125000"/>
+                <a:spcPct val="120000"/>
               </a:lnSpc>
               <a:spcAft>
                 <a:spcPts val="800"/>
               </a:spcAft>
-              <a:defRPr sz="1300">
+              <a:defRPr sz="1500">
                 <a:solidFill>
                   <a:srgbClr val="4B545D"/>
                 </a:solidFill>
@@ -7571,18 +9380,24 @@
               </a:defRPr>
             </a:pPr>
             <a:r>
+              <a:rPr lang="en-US" sz="1500" b="0" dirty="0">
+                <a:solidFill>
+                  <a:srgbClr val="4B545D"/>
+                </a:solidFill>
+                <a:latin typeface="DejaVu Sans"/>
+              </a:rPr>
               <a:t>•  Compared seasonal naive, additive weekly ETS, XGBoost autoregression, and MI-selected/PCA Ridge.</a:t>
             </a:r>
           </a:p>
           <a:p>
             <a:pPr>
               <a:lnSpc>
-                <a:spcPct val="125000"/>
+                <a:spcPct val="120000"/>
               </a:lnSpc>
               <a:spcAft>
                 <a:spcPts val="800"/>
               </a:spcAft>
-              <a:defRPr sz="1300">
+              <a:defRPr sz="1500">
                 <a:solidFill>
                   <a:srgbClr val="4B545D"/>
                 </a:solidFill>
@@ -7590,6 +9405,12 @@
               </a:defRPr>
             </a:pPr>
             <a:r>
+              <a:rPr lang="en-US" sz="1500" b="0" dirty="0">
+                <a:solidFill>
+                  <a:srgbClr val="4B545D"/>
+                </a:solidFill>
+                <a:latin typeface="DejaVu Sans"/>
+              </a:rPr>
               <a:t>•  Validation MAE selects a model separately for each horizon; test remains separate.</a:t>
             </a:r>
           </a:p>
@@ -7597,7 +9418,7 @@
       </p:sp>
       <p:pic>
         <p:nvPicPr>
-          <p:cNvPr id="6" name="Picture 5" descr="notebook03_lead_time_mae.png"/>
+          <p:cNvPr id="6" name="Picture 5" descr="Chart of 30-day final-test forecast MAE by lead-time band"/>
           <p:cNvPicPr>
             <a:picLocks noChangeAspect="1"/>
           </p:cNvPicPr>
@@ -7611,8 +9432,8 @@
         </p:blipFill>
         <p:spPr>
           <a:xfrm>
-            <a:off x="2712567" y="3511041"/>
-            <a:ext cx="6766560" cy="2105152"/>
+            <a:off x="4312071" y="3870000"/>
+            <a:ext cx="3567857" cy="1110000"/>
           </a:xfrm>
           <a:prstGeom prst="rect">
             <a:avLst/>
@@ -7627,8 +9448,8 @@
         </p:nvSpPr>
         <p:spPr>
           <a:xfrm>
-            <a:off x="822960" y="5753353"/>
-            <a:ext cx="10515600" cy="542290"/>
+            <a:off x="822960" y="5017840"/>
+            <a:ext cx="10515600" cy="560000"/>
           </a:xfrm>
           <a:prstGeom prst="rect">
             <a:avLst/>
@@ -7643,19 +9464,25 @@
           <a:p>
             <a:pPr>
               <a:lnSpc>
-                <a:spcPct val="125000"/>
+                <a:spcPct val="120000"/>
               </a:lnSpc>
               <a:spcAft>
-                <a:spcPts val="800"/>
+                <a:spcPts val="0"/>
               </a:spcAft>
-              <a:defRPr sz="1100">
-                <a:solidFill>
-                  <a:srgbClr val="4B545D"/>
+              <a:defRPr sz="1300" i="1">
+                <a:solidFill>
+                  <a:srgbClr val="6B7580"/>
                 </a:solidFill>
                 <a:latin typeface="DejaVu Sans"/>
               </a:defRPr>
             </a:pPr>
             <a:r>
+              <a:rPr lang="en-US" sz="1300" b="0" i="1" dirty="0">
+                <a:solidFill>
+                  <a:srgbClr val="6B7580"/>
+                </a:solidFill>
+                <a:latin typeface="DejaVu Sans"/>
+              </a:rPr>
               <a:t>•  30-day final-test MAE by lead-time band (notebook 03): error typically grows with lead time, one reason a 7-day path is tracked separately.</a:t>
             </a:r>
           </a:p>
@@ -7729,6 +9556,86 @@
             <a:r>
               <a:t>Help Desk Ticket SLA and Volume Forecasting | Historical analysis</a:t>
             </a:r>
+          </a:p>
+        </p:txBody>
+      </p:sp>
+      <p:sp>
+        <p:nvSpPr>
+          <p:cNvPr id="50" name="Takeaway Banner"/>
+          <p:cNvSpPr/>
+          <p:nvPr/>
+        </p:nvSpPr>
+        <p:spPr>
+          <a:xfrm>
+            <a:off x="594360" y="5715000"/>
+            <a:ext cx="11003280" cy="594360"/>
+          </a:xfrm>
+          <a:prstGeom prst="roundRect">
+            <a:avLst>
+              <a:gd name="adj" fmla="val 12000"/>
+            </a:avLst>
+          </a:prstGeom>
+          <a:solidFill>
+            <a:srgbClr val="1F3752"/>
+          </a:solidFill>
+          <a:ln>
+            <a:noFill/>
+          </a:ln>
+        </p:spPr>
+        <p:txBody>
+          <a:bodyPr wrap="square" lIns="228600" tIns="45720" rIns="182880" bIns="45720" anchor="ctr">
+            <a:normAutofit/>
+          </a:bodyPr>
+          <a:lstStyle/>
+          <a:p>
+            <a:pPr algn="l"/>
+            <a:r>
+              <a:rPr lang="en-US" sz="1500" b="1" dirty="0">
+                <a:solidFill>
+                  <a:srgbClr val="8CC4F2"/>
+                </a:solidFill>
+                <a:latin typeface="DejaVu Sans"/>
+              </a:rPr>
+              <a:t>KEY TAKEAWAY  |  </a:t>
+            </a:r>
+            <a:r>
+              <a:rPr lang="en-US" sz="1500" b="0" dirty="0">
+                <a:solidFill>
+                  <a:srgbClr val="FFFFFF"/>
+                </a:solidFill>
+                <a:latin typeface="DejaVu Sans"/>
+              </a:rPr>
+              <a:t>Horizon-specific models, chosen on validation and judged on a held-out test, keep the evaluation honest.</a:t>
+            </a:r>
+          </a:p>
+        </p:txBody>
+      </p:sp>
+      <p:sp>
+        <p:nvSpPr>
+          <p:cNvPr id="51" name="Takeaway Accent"/>
+          <p:cNvSpPr/>
+          <p:nvPr/>
+        </p:nvSpPr>
+        <p:spPr>
+          <a:xfrm>
+            <a:off x="594360" y="5715000"/>
+            <a:ext cx="82296" cy="594360"/>
+          </a:xfrm>
+          <a:prstGeom prst="rect">
+            <a:avLst/>
+          </a:prstGeom>
+          <a:solidFill>
+            <a:srgbClr val="3470A8"/>
+          </a:solidFill>
+          <a:ln>
+            <a:noFill/>
+          </a:ln>
+        </p:spPr>
+        <p:txBody>
+          <a:bodyPr/>
+          <a:lstStyle/>
+          <a:p>
+            <a:endParaRPr lang="en-US"/>
           </a:p>
         </p:txBody>
       </p:sp>
@@ -7741,7 +9648,7 @@
 </file>
 
 <file path=ppt/slides/slide8.xml><?xml version="1.0" encoding="utf-8"?>
-<p:sld xmlns:a="http://schemas.openxmlformats.org/drawingml/2006/main" xmlns:p="http://schemas.openxmlformats.org/presentationml/2006/main" xmlns:r="http://schemas.openxmlformats.org/officeDocument/2006/relationships">
+<p:sld xmlns:a="http://schemas.openxmlformats.org/drawingml/2006/main" xmlns:r="http://schemas.openxmlformats.org/officeDocument/2006/relationships" xmlns:p="http://schemas.openxmlformats.org/presentationml/2006/main">
   <p:cSld>
     <p:bg>
       <p:bgPr>
@@ -7757,7 +9664,14 @@
         <p:cNvGrpSpPr/>
         <p:nvPr/>
       </p:nvGrpSpPr>
-      <p:grpSpPr/>
+      <p:grpSpPr>
+        <a:xfrm>
+          <a:off x="0" y="0"/>
+          <a:ext cx="0" cy="0"/>
+          <a:chOff x="0" y="0"/>
+          <a:chExt cx="0" cy="0"/>
+        </a:xfrm>
+      </p:grpSpPr>
       <p:sp>
         <p:nvSpPr>
           <p:cNvPr id="2" name="Rectangle 1"/>
@@ -7798,6 +9712,7 @@
           <a:lstStyle/>
           <a:p>
             <a:pPr algn="ctr"/>
+            <a:endParaRPr/>
           </a:p>
         </p:txBody>
       </p:sp>
@@ -7880,6 +9795,7 @@
           <a:lstStyle/>
           <a:p>
             <a:pPr algn="ctr"/>
+            <a:endParaRPr/>
           </a:p>
         </p:txBody>
       </p:sp>
@@ -7891,8 +9807,8 @@
         </p:nvSpPr>
         <p:spPr>
           <a:xfrm>
-            <a:off x="822960" y="1536192"/>
-            <a:ext cx="10515600" cy="529590"/>
+            <a:off x="822960" y="1463040"/>
+            <a:ext cx="10515600" cy="323486"/>
           </a:xfrm>
           <a:prstGeom prst="rect">
             <a:avLst/>
@@ -7907,12 +9823,12 @@
           <a:p>
             <a:pPr>
               <a:lnSpc>
-                <a:spcPct val="125000"/>
+                <a:spcPct val="120000"/>
               </a:lnSpc>
               <a:spcAft>
-                <a:spcPts val="1200"/>
+                <a:spcPts val="800"/>
               </a:spcAft>
-              <a:defRPr sz="1800">
+              <a:defRPr sz="1400">
                 <a:solidFill>
                   <a:srgbClr val="4B545D"/>
                 </a:solidFill>
@@ -7920,7 +9836,22 @@
               </a:defRPr>
             </a:pPr>
             <a:r>
-              <a:t>•  30-day validation winner: ETS (weekly additive) (MAE 4.39 tickets/day).</a:t>
+              <a:rPr lang="en-US" sz="1400" b="1" dirty="0">
+                <a:solidFill>
+                  <a:srgbClr val="1F3752"/>
+                </a:solidFill>
+                <a:latin typeface="DejaVu Sans"/>
+              </a:rPr>
+              <a:t>•  30-day validation winner:</a:t>
+            </a:r>
+            <a:r>
+              <a:rPr lang="en-US" sz="1400" b="0" dirty="0">
+                <a:solidFill>
+                  <a:srgbClr val="4B545D"/>
+                </a:solidFill>
+                <a:latin typeface="DejaVu Sans"/>
+              </a:rPr>
+              <a:t> ETS (weekly additive) (MAE 4.39 tickets/day).</a:t>
             </a:r>
           </a:p>
         </p:txBody>
@@ -7931,11 +9862,17 @@
           <p:cNvGraphicFramePr>
             <a:graphicFrameLocks noGrp="1"/>
           </p:cNvGraphicFramePr>
-          <p:nvPr/>
+          <p:nvPr>
+            <p:extLst>
+              <p:ext uri="{D42A27DB-BD31-4B8C-83A1-F6EECF244321}">
+                <p14:modId xmlns:p14="http://schemas.microsoft.com/office/powerpoint/2010/main" val="2066950601"/>
+              </p:ext>
+            </p:extLst>
+          </p:nvPr>
         </p:nvGraphicFramePr>
         <p:xfrm>
-          <a:off x="822960" y="2202942"/>
-          <a:ext cx="10515600" cy="2558796"/>
+          <a:off x="822960" y="1874520"/>
+          <a:ext cx="10515600" cy="1691640"/>
         </p:xfrm>
         <a:graphic>
           <a:graphicData uri="http://schemas.openxmlformats.org/drawingml/2006/table">
@@ -7944,15 +9881,39 @@
                 <a:tableStyleId>{5C22544A-7EE6-4342-B048-85BDC9FD1C3A}</a:tableStyleId>
               </a:tblPr>
               <a:tblGrid>
-                <a:gridCol w="2628900"/>
-                <a:gridCol w="2628900"/>
-                <a:gridCol w="2628900"/>
-                <a:gridCol w="2628900"/>
+                <a:gridCol w="4206240">
+                  <a:extLst>
+                    <a:ext uri="{9D8B030D-6E8A-4147-A177-3AD203B41FA5}">
+                      <a16:colId xmlns:a16="http://schemas.microsoft.com/office/drawing/2014/main" val="20000"/>
+                    </a:ext>
+                  </a:extLst>
+                </a:gridCol>
+                <a:gridCol w="2103120">
+                  <a:extLst>
+                    <a:ext uri="{9D8B030D-6E8A-4147-A177-3AD203B41FA5}">
+                      <a16:colId xmlns:a16="http://schemas.microsoft.com/office/drawing/2014/main" val="20001"/>
+                    </a:ext>
+                  </a:extLst>
+                </a:gridCol>
+                <a:gridCol w="2103120">
+                  <a:extLst>
+                    <a:ext uri="{9D8B030D-6E8A-4147-A177-3AD203B41FA5}">
+                      <a16:colId xmlns:a16="http://schemas.microsoft.com/office/drawing/2014/main" val="20002"/>
+                    </a:ext>
+                  </a:extLst>
+                </a:gridCol>
+                <a:gridCol w="2103120">
+                  <a:extLst>
+                    <a:ext uri="{9D8B030D-6E8A-4147-A177-3AD203B41FA5}">
+                      <a16:colId xmlns:a16="http://schemas.microsoft.com/office/drawing/2014/main" val="20003"/>
+                    </a:ext>
+                  </a:extLst>
+                </a:gridCol>
               </a:tblGrid>
-              <a:tr h="475488">
+              <a:tr h="338328">
                 <a:tc>
                   <a:txBody>
-                    <a:bodyPr wrap="square"/>
+                    <a:bodyPr/>
                     <a:lstStyle/>
                     <a:p>
                       <a:pPr>
@@ -7961,7 +9922,7 @@
                         </a:lnSpc>
                       </a:pPr>
                       <a:r>
-                        <a:rPr b="1" sz="1400">
+                        <a:rPr lang="en-PH" sz="1300" b="1">
                           <a:solidFill>
                             <a:srgbClr val="FFFFFF"/>
                           </a:solidFill>
@@ -7979,7 +9940,7 @@
                 </a:tc>
                 <a:tc>
                   <a:txBody>
-                    <a:bodyPr wrap="square"/>
+                    <a:bodyPr/>
                     <a:lstStyle/>
                     <a:p>
                       <a:pPr>
@@ -7988,7 +9949,7 @@
                         </a:lnSpc>
                       </a:pPr>
                       <a:r>
-                        <a:rPr b="1" sz="1400">
+                        <a:rPr lang="en-PH" sz="1300" b="1">
                           <a:solidFill>
                             <a:srgbClr val="FFFFFF"/>
                           </a:solidFill>
@@ -8006,7 +9967,7 @@
                 </a:tc>
                 <a:tc>
                   <a:txBody>
-                    <a:bodyPr wrap="square"/>
+                    <a:bodyPr/>
                     <a:lstStyle/>
                     <a:p>
                       <a:pPr>
@@ -8015,7 +9976,7 @@
                         </a:lnSpc>
                       </a:pPr>
                       <a:r>
-                        <a:rPr b="1" sz="1400">
+                        <a:rPr lang="en-PH" sz="1300" b="1">
                           <a:solidFill>
                             <a:srgbClr val="FFFFFF"/>
                           </a:solidFill>
@@ -8033,7 +9994,7 @@
                 </a:tc>
                 <a:tc>
                   <a:txBody>
-                    <a:bodyPr wrap="square"/>
+                    <a:bodyPr/>
                     <a:lstStyle/>
                     <a:p>
                       <a:pPr>
@@ -8042,7 +10003,7 @@
                         </a:lnSpc>
                       </a:pPr>
                       <a:r>
-                        <a:rPr b="1" sz="1400">
+                        <a:rPr lang="en-PH" sz="1300" b="1">
                           <a:solidFill>
                             <a:srgbClr val="FFFFFF"/>
                           </a:solidFill>
@@ -8058,11 +10019,16 @@
                     </a:solidFill>
                   </a:tcPr>
                 </a:tc>
+                <a:extLst>
+                  <a:ext uri="{0D108BD9-81ED-4DB2-BD59-A6C34878D82A}">
+                    <a16:rowId xmlns:a16="http://schemas.microsoft.com/office/drawing/2014/main" val="10000"/>
+                  </a:ext>
+                </a:extLst>
               </a:tr>
-              <a:tr h="475488">
+              <a:tr h="338328">
                 <a:tc>
                   <a:txBody>
-                    <a:bodyPr wrap="square"/>
+                    <a:bodyPr/>
                     <a:lstStyle/>
                     <a:p>
                       <a:pPr>
@@ -8071,7 +10037,7 @@
                         </a:lnSpc>
                       </a:pPr>
                       <a:r>
-                        <a:rPr sz="1400">
+                        <a:rPr lang="en-PH" sz="1300" b="1">
                           <a:solidFill>
                             <a:srgbClr val="1F3752"/>
                           </a:solidFill>
@@ -8089,7 +10055,7 @@
                 </a:tc>
                 <a:tc>
                   <a:txBody>
-                    <a:bodyPr wrap="square"/>
+                    <a:bodyPr/>
                     <a:lstStyle/>
                     <a:p>
                       <a:pPr>
@@ -8098,7 +10064,7 @@
                         </a:lnSpc>
                       </a:pPr>
                       <a:r>
-                        <a:rPr sz="1400">
+                        <a:rPr lang="en-PH" sz="1300" b="1">
                           <a:solidFill>
                             <a:srgbClr val="4B545D"/>
                           </a:solidFill>
@@ -8116,7 +10082,7 @@
                 </a:tc>
                 <a:tc>
                   <a:txBody>
-                    <a:bodyPr wrap="square"/>
+                    <a:bodyPr/>
                     <a:lstStyle/>
                     <a:p>
                       <a:pPr>
@@ -8125,7 +10091,7 @@
                         </a:lnSpc>
                       </a:pPr>
                       <a:r>
-                        <a:rPr sz="1400">
+                        <a:rPr lang="en-PH" sz="1300" b="1">
                           <a:solidFill>
                             <a:srgbClr val="4B545D"/>
                           </a:solidFill>
@@ -8143,7 +10109,7 @@
                 </a:tc>
                 <a:tc>
                   <a:txBody>
-                    <a:bodyPr wrap="square"/>
+                    <a:bodyPr/>
                     <a:lstStyle/>
                     <a:p>
                       <a:pPr>
@@ -8152,7 +10118,7 @@
                         </a:lnSpc>
                       </a:pPr>
                       <a:r>
-                        <a:rPr sz="1400">
+                        <a:rPr lang="en-PH" sz="1300" b="1">
                           <a:solidFill>
                             <a:srgbClr val="4B545D"/>
                           </a:solidFill>
@@ -8168,11 +10134,16 @@
                     </a:solidFill>
                   </a:tcPr>
                 </a:tc>
+                <a:extLst>
+                  <a:ext uri="{0D108BD9-81ED-4DB2-BD59-A6C34878D82A}">
+                    <a16:rowId xmlns:a16="http://schemas.microsoft.com/office/drawing/2014/main" val="10001"/>
+                  </a:ext>
+                </a:extLst>
               </a:tr>
-              <a:tr h="535940">
+              <a:tr h="338328">
                 <a:tc>
                   <a:txBody>
-                    <a:bodyPr wrap="square"/>
+                    <a:bodyPr/>
                     <a:lstStyle/>
                     <a:p>
                       <a:pPr>
@@ -8181,7 +10152,7 @@
                         </a:lnSpc>
                       </a:pPr>
                       <a:r>
-                        <a:rPr sz="1400">
+                        <a:rPr lang="en-PH" sz="1300">
                           <a:solidFill>
                             <a:srgbClr val="1F3752"/>
                           </a:solidFill>
@@ -8199,7 +10170,7 @@
                 </a:tc>
                 <a:tc>
                   <a:txBody>
-                    <a:bodyPr wrap="square"/>
+                    <a:bodyPr/>
                     <a:lstStyle/>
                     <a:p>
                       <a:pPr>
@@ -8208,7 +10179,7 @@
                         </a:lnSpc>
                       </a:pPr>
                       <a:r>
-                        <a:rPr sz="1400">
+                        <a:rPr lang="en-PH" sz="1300">
                           <a:solidFill>
                             <a:srgbClr val="4B545D"/>
                           </a:solidFill>
@@ -8226,7 +10197,7 @@
                 </a:tc>
                 <a:tc>
                   <a:txBody>
-                    <a:bodyPr wrap="square"/>
+                    <a:bodyPr/>
                     <a:lstStyle/>
                     <a:p>
                       <a:pPr>
@@ -8235,7 +10206,7 @@
                         </a:lnSpc>
                       </a:pPr>
                       <a:r>
-                        <a:rPr sz="1400">
+                        <a:rPr lang="en-PH" sz="1300">
                           <a:solidFill>
                             <a:srgbClr val="4B545D"/>
                           </a:solidFill>
@@ -8253,7 +10224,7 @@
                 </a:tc>
                 <a:tc>
                   <a:txBody>
-                    <a:bodyPr wrap="square"/>
+                    <a:bodyPr/>
                     <a:lstStyle/>
                     <a:p>
                       <a:pPr>
@@ -8262,7 +10233,7 @@
                         </a:lnSpc>
                       </a:pPr>
                       <a:r>
-                        <a:rPr sz="1400">
+                        <a:rPr lang="en-PH" sz="1300">
                           <a:solidFill>
                             <a:srgbClr val="4B545D"/>
                           </a:solidFill>
@@ -8278,11 +10249,16 @@
                     </a:solidFill>
                   </a:tcPr>
                 </a:tc>
+                <a:extLst>
+                  <a:ext uri="{0D108BD9-81ED-4DB2-BD59-A6C34878D82A}">
+                    <a16:rowId xmlns:a16="http://schemas.microsoft.com/office/drawing/2014/main" val="10002"/>
+                  </a:ext>
+                </a:extLst>
               </a:tr>
-              <a:tr h="535940">
+              <a:tr h="338328">
                 <a:tc>
                   <a:txBody>
-                    <a:bodyPr wrap="square"/>
+                    <a:bodyPr/>
                     <a:lstStyle/>
                     <a:p>
                       <a:pPr>
@@ -8291,7 +10267,7 @@
                         </a:lnSpc>
                       </a:pPr>
                       <a:r>
-                        <a:rPr sz="1400">
+                        <a:rPr lang="en-PH" sz="1300">
                           <a:solidFill>
                             <a:srgbClr val="1F3752"/>
                           </a:solidFill>
@@ -8309,7 +10285,7 @@
                 </a:tc>
                 <a:tc>
                   <a:txBody>
-                    <a:bodyPr wrap="square"/>
+                    <a:bodyPr/>
                     <a:lstStyle/>
                     <a:p>
                       <a:pPr>
@@ -8318,7 +10294,7 @@
                         </a:lnSpc>
                       </a:pPr>
                       <a:r>
-                        <a:rPr sz="1400">
+                        <a:rPr lang="en-PH" sz="1300">
                           <a:solidFill>
                             <a:srgbClr val="4B545D"/>
                           </a:solidFill>
@@ -8336,7 +10312,7 @@
                 </a:tc>
                 <a:tc>
                   <a:txBody>
-                    <a:bodyPr wrap="square"/>
+                    <a:bodyPr/>
                     <a:lstStyle/>
                     <a:p>
                       <a:pPr>
@@ -8345,7 +10321,7 @@
                         </a:lnSpc>
                       </a:pPr>
                       <a:r>
-                        <a:rPr sz="1400">
+                        <a:rPr lang="en-PH" sz="1300">
                           <a:solidFill>
                             <a:srgbClr val="4B545D"/>
                           </a:solidFill>
@@ -8363,7 +10339,7 @@
                 </a:tc>
                 <a:tc>
                   <a:txBody>
-                    <a:bodyPr wrap="square"/>
+                    <a:bodyPr/>
                     <a:lstStyle/>
                     <a:p>
                       <a:pPr>
@@ -8372,7 +10348,7 @@
                         </a:lnSpc>
                       </a:pPr>
                       <a:r>
-                        <a:rPr sz="1400">
+                        <a:rPr lang="en-PH" sz="1300">
                           <a:solidFill>
                             <a:srgbClr val="4B545D"/>
                           </a:solidFill>
@@ -8388,11 +10364,16 @@
                     </a:solidFill>
                   </a:tcPr>
                 </a:tc>
+                <a:extLst>
+                  <a:ext uri="{0D108BD9-81ED-4DB2-BD59-A6C34878D82A}">
+                    <a16:rowId xmlns:a16="http://schemas.microsoft.com/office/drawing/2014/main" val="10003"/>
+                  </a:ext>
+                </a:extLst>
               </a:tr>
-              <a:tr h="535940">
+              <a:tr h="338328">
                 <a:tc>
                   <a:txBody>
-                    <a:bodyPr wrap="square"/>
+                    <a:bodyPr/>
                     <a:lstStyle/>
                     <a:p>
                       <a:pPr>
@@ -8401,7 +10382,7 @@
                         </a:lnSpc>
                       </a:pPr>
                       <a:r>
-                        <a:rPr sz="1400">
+                        <a:rPr lang="en-US" sz="1300">
                           <a:solidFill>
                             <a:srgbClr val="1F3752"/>
                           </a:solidFill>
@@ -8419,7 +10400,7 @@
                 </a:tc>
                 <a:tc>
                   <a:txBody>
-                    <a:bodyPr wrap="square"/>
+                    <a:bodyPr/>
                     <a:lstStyle/>
                     <a:p>
                       <a:pPr>
@@ -8428,7 +10409,7 @@
                         </a:lnSpc>
                       </a:pPr>
                       <a:r>
-                        <a:rPr sz="1400">
+                        <a:rPr lang="en-PH" sz="1300">
                           <a:solidFill>
                             <a:srgbClr val="4B545D"/>
                           </a:solidFill>
@@ -8446,7 +10427,7 @@
                 </a:tc>
                 <a:tc>
                   <a:txBody>
-                    <a:bodyPr wrap="square"/>
+                    <a:bodyPr/>
                     <a:lstStyle/>
                     <a:p>
                       <a:pPr>
@@ -8455,7 +10436,7 @@
                         </a:lnSpc>
                       </a:pPr>
                       <a:r>
-                        <a:rPr sz="1400">
+                        <a:rPr lang="en-PH" sz="1300">
                           <a:solidFill>
                             <a:srgbClr val="4B545D"/>
                           </a:solidFill>
@@ -8473,7 +10454,7 @@
                 </a:tc>
                 <a:tc>
                   <a:txBody>
-                    <a:bodyPr wrap="square"/>
+                    <a:bodyPr/>
                     <a:lstStyle/>
                     <a:p>
                       <a:pPr>
@@ -8482,7 +10463,7 @@
                         </a:lnSpc>
                       </a:pPr>
                       <a:r>
-                        <a:rPr sz="1400">
+                        <a:rPr lang="en-PH" sz="1300">
                           <a:solidFill>
                             <a:srgbClr val="4B545D"/>
                           </a:solidFill>
@@ -8498,6 +10479,11 @@
                     </a:solidFill>
                   </a:tcPr>
                 </a:tc>
+                <a:extLst>
+                  <a:ext uri="{0D108BD9-81ED-4DB2-BD59-A6C34878D82A}">
+                    <a16:rowId xmlns:a16="http://schemas.microsoft.com/office/drawing/2014/main" val="10004"/>
+                  </a:ext>
+                </a:extLst>
               </a:tr>
             </a:tbl>
           </a:graphicData>
@@ -8511,8 +10497,8 @@
         </p:nvSpPr>
         <p:spPr>
           <a:xfrm>
-            <a:off x="822960" y="4898898"/>
-            <a:ext cx="10515600" cy="913765"/>
+            <a:off x="822960" y="3749040"/>
+            <a:ext cx="10515600" cy="972767"/>
           </a:xfrm>
           <a:prstGeom prst="rect">
             <a:avLst/>
@@ -8527,12 +10513,12 @@
           <a:p>
             <a:pPr>
               <a:lnSpc>
-                <a:spcPct val="125000"/>
+                <a:spcPct val="120000"/>
               </a:lnSpc>
               <a:spcAft>
                 <a:spcPts val="800"/>
               </a:spcAft>
-              <a:defRPr sz="1300">
+              <a:defRPr sz="1400">
                 <a:solidFill>
                   <a:srgbClr val="4B545D"/>
                 </a:solidFill>
@@ -8540,18 +10526,24 @@
               </a:defRPr>
             </a:pPr>
             <a:r>
+              <a:rPr lang="en-US" sz="1400" b="0" dirty="0">
+                <a:solidFill>
+                  <a:srgbClr val="4B545D"/>
+                </a:solidFill>
+                <a:latin typeface="DejaVu Sans"/>
+              </a:rPr>
               <a:t>•  30-day selected-model test MAE 4.67, RMSE 7.20, WAPE 27.5%, sMAPE 41.3%.</a:t>
             </a:r>
           </a:p>
           <a:p>
             <a:pPr>
               <a:lnSpc>
-                <a:spcPct val="125000"/>
+                <a:spcPct val="120000"/>
               </a:lnSpc>
               <a:spcAft>
                 <a:spcPts val="800"/>
               </a:spcAft>
-              <a:defRPr sz="1300">
+              <a:defRPr sz="1400">
                 <a:solidFill>
                   <a:srgbClr val="4B545D"/>
                 </a:solidFill>
@@ -8559,7 +10551,22 @@
               </a:defRPr>
             </a:pPr>
             <a:r>
-              <a:t>•  7-day comparison: XGBoost autoregression (28-day lags), test MAE 5.05 tickets/day (its own validation-selected model).</a:t>
+              <a:rPr lang="en-US" sz="1400" b="1" dirty="0">
+                <a:solidFill>
+                  <a:srgbClr val="1F3752"/>
+                </a:solidFill>
+                <a:latin typeface="DejaVu Sans"/>
+              </a:rPr>
+              <a:t>•  7-day comparison:</a:t>
+            </a:r>
+            <a:r>
+              <a:rPr lang="en-US" sz="1400" b="0" dirty="0">
+                <a:solidFill>
+                  <a:srgbClr val="4B545D"/>
+                </a:solidFill>
+                <a:latin typeface="DejaVu Sans"/>
+              </a:rPr>
+              <a:t> XGBoost autoregression (28-day lags), test MAE 5.05 tickets/day (its own validation-selected model).</a:t>
             </a:r>
           </a:p>
         </p:txBody>
@@ -8632,6 +10639,86 @@
             <a:r>
               <a:t>Help Desk Ticket SLA and Volume Forecasting | Historical analysis</a:t>
             </a:r>
+          </a:p>
+        </p:txBody>
+      </p:sp>
+      <p:sp>
+        <p:nvSpPr>
+          <p:cNvPr id="50" name="Takeaway Banner"/>
+          <p:cNvSpPr/>
+          <p:nvPr/>
+        </p:nvSpPr>
+        <p:spPr>
+          <a:xfrm>
+            <a:off x="594360" y="5715000"/>
+            <a:ext cx="11003280" cy="594360"/>
+          </a:xfrm>
+          <a:prstGeom prst="roundRect">
+            <a:avLst>
+              <a:gd name="adj" fmla="val 12000"/>
+            </a:avLst>
+          </a:prstGeom>
+          <a:solidFill>
+            <a:srgbClr val="1F3752"/>
+          </a:solidFill>
+          <a:ln>
+            <a:noFill/>
+          </a:ln>
+        </p:spPr>
+        <p:txBody>
+          <a:bodyPr wrap="square" lIns="228600" tIns="45720" rIns="182880" bIns="45720" anchor="ctr">
+            <a:normAutofit/>
+          </a:bodyPr>
+          <a:lstStyle/>
+          <a:p>
+            <a:pPr algn="l"/>
+            <a:r>
+              <a:rPr lang="en-US" sz="1500" b="1" dirty="0">
+                <a:solidFill>
+                  <a:srgbClr val="8CC4F2"/>
+                </a:solidFill>
+                <a:latin typeface="DejaVu Sans"/>
+              </a:rPr>
+              <a:t>KEY TAKEAWAY  |  </a:t>
+            </a:r>
+            <a:r>
+              <a:rPr lang="en-US" sz="1500" b="0" dirty="0">
+                <a:solidFill>
+                  <a:srgbClr val="FFFFFF"/>
+                </a:solidFill>
+                <a:latin typeface="DejaVu Sans"/>
+              </a:rPr>
+              <a:t>Weekly ETS wins the 30-day horizon (test MAE 4.67), cutting error ~28% versus the seasonal naive baseline.</a:t>
+            </a:r>
+          </a:p>
+        </p:txBody>
+      </p:sp>
+      <p:sp>
+        <p:nvSpPr>
+          <p:cNvPr id="51" name="Takeaway Accent"/>
+          <p:cNvSpPr/>
+          <p:nvPr/>
+        </p:nvSpPr>
+        <p:spPr>
+          <a:xfrm>
+            <a:off x="594360" y="5715000"/>
+            <a:ext cx="82296" cy="594360"/>
+          </a:xfrm>
+          <a:prstGeom prst="rect">
+            <a:avLst/>
+          </a:prstGeom>
+          <a:solidFill>
+            <a:srgbClr val="3470A8"/>
+          </a:solidFill>
+          <a:ln>
+            <a:noFill/>
+          </a:ln>
+        </p:spPr>
+        <p:txBody>
+          <a:bodyPr/>
+          <a:lstStyle/>
+          <a:p>
+            <a:endParaRPr lang="en-US"/>
           </a:p>
         </p:txBody>
       </p:sp>
@@ -8644,7 +10731,7 @@
 </file>
 
 <file path=ppt/slides/slide9.xml><?xml version="1.0" encoding="utf-8"?>
-<p:sld xmlns:a="http://schemas.openxmlformats.org/drawingml/2006/main" xmlns:p="http://schemas.openxmlformats.org/presentationml/2006/main" xmlns:r="http://schemas.openxmlformats.org/officeDocument/2006/relationships">
+<p:sld xmlns:a="http://schemas.openxmlformats.org/drawingml/2006/main" xmlns:r="http://schemas.openxmlformats.org/officeDocument/2006/relationships" xmlns:p="http://schemas.openxmlformats.org/presentationml/2006/main">
   <p:cSld>
     <p:bg>
       <p:bgPr>
@@ -8660,7 +10747,14 @@
         <p:cNvGrpSpPr/>
         <p:nvPr/>
       </p:nvGrpSpPr>
-      <p:grpSpPr/>
+      <p:grpSpPr>
+        <a:xfrm>
+          <a:off x="0" y="0"/>
+          <a:ext cx="0" cy="0"/>
+          <a:chOff x="0" y="0"/>
+          <a:chExt cx="0" cy="0"/>
+        </a:xfrm>
+      </p:grpSpPr>
       <p:sp>
         <p:nvSpPr>
           <p:cNvPr id="2" name="Rectangle 1"/>
@@ -8701,6 +10795,7 @@
           <a:lstStyle/>
           <a:p>
             <a:pPr algn="ctr"/>
+            <a:endParaRPr/>
           </a:p>
         </p:txBody>
       </p:sp>
@@ -8783,6 +10878,7 @@
           <a:lstStyle/>
           <a:p>
             <a:pPr algn="ctr"/>
+            <a:endParaRPr/>
           </a:p>
         </p:txBody>
       </p:sp>
@@ -8794,8 +10890,8 @@
         </p:nvSpPr>
         <p:spPr>
           <a:xfrm>
-            <a:off x="822960" y="1536192"/>
-            <a:ext cx="10515600" cy="983615"/>
+            <a:off x="822960" y="1463040"/>
+            <a:ext cx="10515600" cy="1304268"/>
           </a:xfrm>
           <a:prstGeom prst="rect">
             <a:avLst/>
@@ -8810,12 +10906,12 @@
           <a:p>
             <a:pPr>
               <a:lnSpc>
-                <a:spcPct val="125000"/>
+                <a:spcPct val="120000"/>
               </a:lnSpc>
               <a:spcAft>
                 <a:spcPts val="800"/>
               </a:spcAft>
-              <a:defRPr sz="1300">
+              <a:defRPr sz="1400" b="0">
                 <a:solidFill>
                   <a:srgbClr val="4B545D"/>
                 </a:solidFill>
@@ -8823,18 +10919,24 @@
               </a:defRPr>
             </a:pPr>
             <a:r>
+              <a:rPr lang="en-US" sz="1400" b="0" dirty="0">
+                <a:solidFill>
+                  <a:srgbClr val="4B545D"/>
+                </a:solidFill>
+                <a:latin typeface="DejaVu Sans"/>
+              </a:rPr>
               <a:t>•  MAE is the typical daily miss; RMSE emphasizes larger errors. WAPE/sMAPE express relative error.</a:t>
             </a:r>
           </a:p>
           <a:p>
             <a:pPr>
               <a:lnSpc>
-                <a:spcPct val="125000"/>
+                <a:spcPct val="120000"/>
               </a:lnSpc>
               <a:spcAft>
                 <a:spcPts val="800"/>
               </a:spcAft>
-              <a:defRPr sz="1300">
+              <a:defRPr sz="1400" b="0">
                 <a:solidFill>
                   <a:srgbClr val="4B545D"/>
                 </a:solidFill>
@@ -8842,18 +10944,33 @@
               </a:defRPr>
             </a:pPr>
             <a:r>
-              <a:t>•  Selected-model 90% test interval coverage: 87.7%; calibrated on validation residuals.</a:t>
+              <a:rPr lang="en-US" sz="1400" b="1" dirty="0">
+                <a:solidFill>
+                  <a:srgbClr val="1F3752"/>
+                </a:solidFill>
+                <a:latin typeface="DejaVu Sans"/>
+              </a:rPr>
+              <a:t>•  Selected-model 90% test interval coverage:</a:t>
+            </a:r>
+            <a:r>
+              <a:rPr lang="en-US" sz="1400" b="0" dirty="0">
+                <a:solidFill>
+                  <a:srgbClr val="4B545D"/>
+                </a:solidFill>
+                <a:latin typeface="DejaVu Sans"/>
+              </a:rPr>
+              <a:t> 87.7%; calibrated on validation residuals.</a:t>
             </a:r>
           </a:p>
           <a:p>
             <a:pPr>
               <a:lnSpc>
-                <a:spcPct val="125000"/>
+                <a:spcPct val="120000"/>
               </a:lnSpc>
               <a:spcAft>
                 <a:spcPts val="800"/>
               </a:spcAft>
-              <a:defRPr sz="1100">
+              <a:defRPr sz="1400" b="0">
                 <a:solidFill>
                   <a:srgbClr val="4B545D"/>
                 </a:solidFill>
@@ -8861,14 +10978,29 @@
               </a:defRPr>
             </a:pPr>
             <a:r>
-              <a:t>•  Panel: XGBoost SHAP, not ETS. Separate ETS state/residual evidence is linked in the report; fitted residuals are not test errors.</a:t>
+              <a:rPr lang="en-US" sz="1400" b="1" dirty="0">
+                <a:solidFill>
+                  <a:srgbClr val="1F3752"/>
+                </a:solidFill>
+                <a:latin typeface="DejaVu Sans"/>
+              </a:rPr>
+              <a:t>•  Panel:</a:t>
+            </a:r>
+            <a:r>
+              <a:rPr lang="en-US" sz="1400" b="0" dirty="0">
+                <a:solidFill>
+                  <a:srgbClr val="4B545D"/>
+                </a:solidFill>
+                <a:latin typeface="DejaVu Sans"/>
+              </a:rPr>
+              <a:t> XGBoost SHAP, not ETS. Separate ETS state/residual evidence is linked in the report; fitted residuals are not test errors.</a:t>
             </a:r>
           </a:p>
         </p:txBody>
       </p:sp>
       <p:pic>
         <p:nvPicPr>
-          <p:cNvPr id="6" name="Picture 5" descr="notebook04_explainability.png"/>
+          <p:cNvPr id="6" name="Picture 5" descr="Explainability panel showing XGBoost feature importance and SHAP values, led by lag_21, lag_28 and lag_14"/>
           <p:cNvPicPr>
             <a:picLocks noChangeAspect="1"/>
           </p:cNvPicPr>
@@ -8882,8 +11014,8 @@
         </p:blipFill>
         <p:spPr>
           <a:xfrm>
-            <a:off x="1981047" y="2656967"/>
-            <a:ext cx="8229600" cy="1995054"/>
+            <a:off x="2402147" y="2813712"/>
+            <a:ext cx="7177500" cy="1740000"/>
           </a:xfrm>
           <a:prstGeom prst="rect">
             <a:avLst/>
@@ -8898,8 +11030,8 @@
         </p:nvSpPr>
         <p:spPr>
           <a:xfrm>
-            <a:off x="822960" y="4789181"/>
-            <a:ext cx="10515600" cy="542290"/>
+            <a:off x="822960" y="5000000"/>
+            <a:ext cx="10515600" cy="547009"/>
           </a:xfrm>
           <a:prstGeom prst="rect">
             <a:avLst/>
@@ -8914,19 +11046,25 @@
           <a:p>
             <a:pPr>
               <a:lnSpc>
-                <a:spcPct val="125000"/>
+                <a:spcPct val="120000"/>
               </a:lnSpc>
               <a:spcAft>
                 <a:spcPts val="800"/>
               </a:spcAft>
-              <a:defRPr sz="1100">
-                <a:solidFill>
-                  <a:srgbClr val="4B545D"/>
+              <a:defRPr sz="1300" i="1">
+                <a:solidFill>
+                  <a:srgbClr val="6B7580"/>
                 </a:solidFill>
                 <a:latin typeface="DejaVu Sans"/>
               </a:defRPr>
             </a:pPr>
             <a:r>
+              <a:rPr lang="en-US" sz="1300" i="1" dirty="0">
+                <a:solidFill>
+                  <a:srgbClr val="6B7580"/>
+                </a:solidFill>
+                <a:latin typeface="DejaVu Sans"/>
+              </a:rPr>
               <a:t>•  Leading XGBoost validation features: lag_21, lag_28, lag_14. Validation-only SHAP highlights: lag_28, lag_21, lag_14; importance is association, not causation. Feature selection kept 10/34 MI-selected features.</a:t>
             </a:r>
           </a:p>
@@ -9000,6 +11138,86 @@
             <a:r>
               <a:t>Help Desk Ticket SLA and Volume Forecasting | Historical analysis</a:t>
             </a:r>
+          </a:p>
+        </p:txBody>
+      </p:sp>
+      <p:sp>
+        <p:nvSpPr>
+          <p:cNvPr id="50" name="Takeaway Banner"/>
+          <p:cNvSpPr/>
+          <p:nvPr/>
+        </p:nvSpPr>
+        <p:spPr>
+          <a:xfrm>
+            <a:off x="594360" y="5715000"/>
+            <a:ext cx="11003280" cy="594360"/>
+          </a:xfrm>
+          <a:prstGeom prst="roundRect">
+            <a:avLst>
+              <a:gd name="adj" fmla="val 12000"/>
+            </a:avLst>
+          </a:prstGeom>
+          <a:solidFill>
+            <a:srgbClr val="1F3752"/>
+          </a:solidFill>
+          <a:ln>
+            <a:noFill/>
+          </a:ln>
+        </p:spPr>
+        <p:txBody>
+          <a:bodyPr wrap="square" lIns="228600" tIns="45720" rIns="182880" bIns="45720" anchor="ctr">
+            <a:normAutofit/>
+          </a:bodyPr>
+          <a:lstStyle/>
+          <a:p>
+            <a:pPr algn="l"/>
+            <a:r>
+              <a:rPr lang="en-US" sz="1500" b="1" dirty="0">
+                <a:solidFill>
+                  <a:srgbClr val="8CC4F2"/>
+                </a:solidFill>
+                <a:latin typeface="DejaVu Sans"/>
+              </a:rPr>
+              <a:t>KEY TAKEAWAY  |  </a:t>
+            </a:r>
+            <a:r>
+              <a:rPr lang="en-US" sz="1500" b="0" dirty="0">
+                <a:solidFill>
+                  <a:srgbClr val="FFFFFF"/>
+                </a:solidFill>
+                <a:latin typeface="DejaVu Sans"/>
+              </a:rPr>
+              <a:t>Intervals are well calibrated (87.7% vs. 90% target), and recent weekly lags drive the forecast.</a:t>
+            </a:r>
+          </a:p>
+        </p:txBody>
+      </p:sp>
+      <p:sp>
+        <p:nvSpPr>
+          <p:cNvPr id="51" name="Takeaway Accent"/>
+          <p:cNvSpPr/>
+          <p:nvPr/>
+        </p:nvSpPr>
+        <p:spPr>
+          <a:xfrm>
+            <a:off x="594360" y="5715000"/>
+            <a:ext cx="82296" cy="594360"/>
+          </a:xfrm>
+          <a:prstGeom prst="rect">
+            <a:avLst/>
+          </a:prstGeom>
+          <a:solidFill>
+            <a:srgbClr val="3470A8"/>
+          </a:solidFill>
+          <a:ln>
+            <a:noFill/>
+          </a:ln>
+        </p:spPr>
+        <p:txBody>
+          <a:bodyPr/>
+          <a:lstStyle/>
+          <a:p>
+            <a:endParaRPr lang="en-US"/>
           </a:p>
         </p:txBody>
       </p:sp>
